--- a/Phase A/ThrivePath - Presentation.pptx
+++ b/Phase A/ThrivePath - Presentation.pptx
@@ -29,33 +29,39 @@
     <p:sldId id="277" r:id="rId27"/>
     <p:sldId id="278" r:id="rId28"/>
     <p:sldId id="279" r:id="rId29"/>
+    <p:sldId id="280" r:id="rId30"/>
+    <p:sldId id="281" r:id="rId31"/>
   </p:sldIdLst>
   <p:sldSz cx="18288000" cy="10287000"/>
   <p:notesSz cx="6858000" cy="9144000"/>
   <p:embeddedFontLst>
     <p:embeddedFont>
       <p:font typeface="Ubuntu" charset="1" panose="020B0504030602030204"/>
-      <p:regular r:id="rId30"/>
+      <p:regular r:id="rId32"/>
+    </p:embeddedFont>
+    <p:embeddedFont>
+      <p:font typeface="Suez One" charset="1" panose="00000500000000000000"/>
+      <p:regular r:id="rId33"/>
     </p:embeddedFont>
     <p:embeddedFont>
       <p:font typeface="Ubuntu Bold" charset="1" panose="020B0804030602030204"/>
-      <p:regular r:id="rId31"/>
+      <p:regular r:id="rId34"/>
     </p:embeddedFont>
     <p:embeddedFont>
       <p:font typeface="Open Sans 1" charset="1" panose="020B0606030504020204"/>
-      <p:regular r:id="rId32"/>
+      <p:regular r:id="rId35"/>
     </p:embeddedFont>
     <p:embeddedFont>
       <p:font typeface="Open Sans 1 Bold" charset="1" panose="020B0806030504020204"/>
-      <p:regular r:id="rId33"/>
+      <p:regular r:id="rId36"/>
     </p:embeddedFont>
     <p:embeddedFont>
       <p:font typeface="Fredoka" charset="1" panose="02000000000000000000"/>
-      <p:regular r:id="rId34"/>
+      <p:regular r:id="rId37"/>
     </p:embeddedFont>
     <p:embeddedFont>
       <p:font typeface="Arimo" charset="1" panose="020B0604020202020204"/>
-      <p:regular r:id="rId35"/>
+      <p:regular r:id="rId38"/>
     </p:embeddedFont>
   </p:embeddedFontLst>
   <p:defaultTextStyle>
@@ -3730,6 +3736,50 @@
           </a:blipFill>
         </p:spPr>
       </p:sp>
+      <p:sp>
+        <p:nvSpPr>
+          <p:cNvPr name="TextBox 13" id="13"/>
+          <p:cNvSpPr txBox="true"/>
+          <p:nvPr/>
+        </p:nvSpPr>
+        <p:spPr>
+          <a:xfrm rot="0">
+            <a:off x="17259300" y="9182100"/>
+            <a:ext cx="218509" cy="738150"/>
+          </a:xfrm>
+          <a:prstGeom prst="rect">
+            <a:avLst/>
+          </a:prstGeom>
+        </p:spPr>
+        <p:txBody>
+          <a:bodyPr anchor="t" rtlCol="false" tIns="0" lIns="0" bIns="0" rIns="0" wrap="none">
+            <a:spAutoFit/>
+          </a:bodyPr>
+          <a:lstStyle/>
+          <a:p>
+            <a:pPr algn="ctr">
+              <a:lnSpc>
+                <a:spcPts val="6160"/>
+              </a:lnSpc>
+              <a:spcBef>
+                <a:spcPct val="0"/>
+              </a:spcBef>
+            </a:pPr>
+            <a:r>
+              <a:rPr lang="en-US" sz="4400">
+                <a:solidFill>
+                  <a:srgbClr val="000000"/>
+                </a:solidFill>
+                <a:latin typeface="Suez One"/>
+                <a:ea typeface="Suez One"/>
+                <a:cs typeface="Suez One"/>
+                <a:sym typeface="Suez One"/>
+              </a:rPr>
+              <a:t>1</a:t>
+            </a:r>
+          </a:p>
+        </p:txBody>
+      </p:sp>
     </p:spTree>
   </p:cSld>
   <p:clrMapOvr>
@@ -3763,8 +3813,8 @@
         </p:nvSpPr>
         <p:spPr>
           <a:xfrm rot="0">
-            <a:off x="-2049514" y="573087"/>
-            <a:ext cx="15315831" cy="949325"/>
+            <a:off x="2009775" y="1438299"/>
+            <a:ext cx="15702433" cy="949325"/>
           </a:xfrm>
           <a:prstGeom prst="rect">
             <a:avLst/>
@@ -3776,13 +3826,13 @@
           </a:bodyPr>
           <a:lstStyle/>
           <a:p>
-            <a:pPr algn="ctr">
+            <a:pPr algn="l">
               <a:lnSpc>
                 <a:spcPts val="7150"/>
               </a:lnSpc>
             </a:pPr>
             <a:r>
-              <a:rPr lang="en-US" b="true" sz="6500">
+              <a:rPr lang="en-US" sz="6500" b="true">
                 <a:solidFill>
                   <a:srgbClr val="034383"/>
                 </a:solidFill>
@@ -3791,21 +3841,185 @@
                 <a:cs typeface="Ubuntu Bold"/>
                 <a:sym typeface="Ubuntu Bold"/>
               </a:rPr>
-              <a:t>CHANGING DAILY HABITS</a:t>
+              <a:t>NUTRITION CHANGING</a:t>
             </a:r>
           </a:p>
         </p:txBody>
       </p:sp>
-      <p:sp>
-        <p:nvSpPr>
-          <p:cNvPr name="Freeform 3" id="3"/>
+      <p:grpSp>
+        <p:nvGrpSpPr>
+          <p:cNvPr name="Group 3" id="3"/>
+          <p:cNvGrpSpPr/>
+          <p:nvPr/>
+        </p:nvGrpSpPr>
+        <p:grpSpPr>
+          <a:xfrm rot="0">
+            <a:off x="2764867" y="-699889"/>
+            <a:ext cx="16931738" cy="1533898"/>
+            <a:chOff x="0" y="0"/>
+            <a:chExt cx="4459388" cy="403990"/>
+          </a:xfrm>
+        </p:grpSpPr>
+        <p:sp>
+          <p:nvSpPr>
+            <p:cNvPr name="Freeform 4" id="4"/>
+            <p:cNvSpPr/>
+            <p:nvPr/>
+          </p:nvSpPr>
+          <p:spPr>
+            <a:xfrm flipH="false" flipV="false" rot="0">
+              <a:off x="0" y="0"/>
+              <a:ext cx="4459388" cy="403990"/>
+            </a:xfrm>
+            <a:custGeom>
+              <a:avLst/>
+              <a:gdLst/>
+              <a:ahLst/>
+              <a:cxnLst/>
+              <a:rect r="r" b="b" t="t" l="l"/>
+              <a:pathLst>
+                <a:path h="403990" w="4459388">
+                  <a:moveTo>
+                    <a:pt x="0" y="0"/>
+                  </a:moveTo>
+                  <a:lnTo>
+                    <a:pt x="4459388" y="0"/>
+                  </a:lnTo>
+                  <a:lnTo>
+                    <a:pt x="4459388" y="403990"/>
+                  </a:lnTo>
+                  <a:lnTo>
+                    <a:pt x="0" y="403990"/>
+                  </a:lnTo>
+                  <a:close/>
+                </a:path>
+              </a:pathLst>
+            </a:custGeom>
+            <a:solidFill>
+              <a:srgbClr val="034383"/>
+            </a:solidFill>
+          </p:spPr>
+        </p:sp>
+        <p:sp>
+          <p:nvSpPr>
+            <p:cNvPr name="TextBox 5" id="5"/>
+            <p:cNvSpPr txBox="true"/>
+            <p:nvPr/>
+          </p:nvSpPr>
+          <p:spPr>
+            <a:xfrm>
+              <a:off x="0" y="-38100"/>
+              <a:ext cx="4459388" cy="442090"/>
+            </a:xfrm>
+            <a:prstGeom prst="rect">
+              <a:avLst/>
+            </a:prstGeom>
+          </p:spPr>
+          <p:txBody>
+            <a:bodyPr anchor="ctr" rtlCol="false" tIns="50800" lIns="50800" bIns="50800" rIns="50800"/>
+            <a:lstStyle/>
+            <a:p>
+              <a:pPr algn="ctr">
+                <a:lnSpc>
+                  <a:spcPts val="3295"/>
+                </a:lnSpc>
+              </a:pPr>
+            </a:p>
+          </p:txBody>
+        </p:sp>
+      </p:grpSp>
+      <p:grpSp>
+        <p:nvGrpSpPr>
+          <p:cNvPr name="Group 6" id="6"/>
+          <p:cNvGrpSpPr/>
+          <p:nvPr/>
+        </p:nvGrpSpPr>
+        <p:grpSpPr>
+          <a:xfrm rot="-5400000">
+            <a:off x="-5015057" y="4582096"/>
+            <a:ext cx="10698089" cy="1533898"/>
+            <a:chOff x="0" y="0"/>
+            <a:chExt cx="2817604" cy="403990"/>
+          </a:xfrm>
+        </p:grpSpPr>
+        <p:sp>
+          <p:nvSpPr>
+            <p:cNvPr name="Freeform 7" id="7"/>
+            <p:cNvSpPr/>
+            <p:nvPr/>
+          </p:nvSpPr>
+          <p:spPr>
+            <a:xfrm flipH="false" flipV="false" rot="0">
+              <a:off x="0" y="0"/>
+              <a:ext cx="2817604" cy="403990"/>
+            </a:xfrm>
+            <a:custGeom>
+              <a:avLst/>
+              <a:gdLst/>
+              <a:ahLst/>
+              <a:cxnLst/>
+              <a:rect r="r" b="b" t="t" l="l"/>
+              <a:pathLst>
+                <a:path h="403990" w="2817604">
+                  <a:moveTo>
+                    <a:pt x="0" y="0"/>
+                  </a:moveTo>
+                  <a:lnTo>
+                    <a:pt x="2817604" y="0"/>
+                  </a:lnTo>
+                  <a:lnTo>
+                    <a:pt x="2817604" y="403990"/>
+                  </a:lnTo>
+                  <a:lnTo>
+                    <a:pt x="0" y="403990"/>
+                  </a:lnTo>
+                  <a:close/>
+                </a:path>
+              </a:pathLst>
+            </a:custGeom>
+            <a:solidFill>
+              <a:srgbClr val="034383"/>
+            </a:solidFill>
+          </p:spPr>
+        </p:sp>
+        <p:sp>
+          <p:nvSpPr>
+            <p:cNvPr name="TextBox 8" id="8"/>
+            <p:cNvSpPr txBox="true"/>
+            <p:nvPr/>
+          </p:nvSpPr>
+          <p:spPr>
+            <a:xfrm>
+              <a:off x="0" y="-38100"/>
+              <a:ext cx="2817604" cy="442090"/>
+            </a:xfrm>
+            <a:prstGeom prst="rect">
+              <a:avLst/>
+            </a:prstGeom>
+          </p:spPr>
+          <p:txBody>
+            <a:bodyPr anchor="ctr" rtlCol="false" tIns="50800" lIns="50800" bIns="50800" rIns="50800"/>
+            <a:lstStyle/>
+            <a:p>
+              <a:pPr algn="ctr">
+                <a:lnSpc>
+                  <a:spcPts val="3295"/>
+                </a:lnSpc>
+              </a:pPr>
+            </a:p>
+          </p:txBody>
+        </p:sp>
+      </p:grpSp>
+      <p:sp>
+        <p:nvSpPr>
+          <p:cNvPr name="Freeform 9" id="9"/>
           <p:cNvSpPr/>
           <p:nvPr/>
         </p:nvSpPr>
         <p:spPr>
-          <a:xfrm flipH="false" flipV="false" rot="5400000">
-            <a:off x="12090482" y="-626645"/>
-            <a:ext cx="6562966" cy="7473357"/>
+          <a:xfrm flipH="false" flipV="false" rot="0">
+            <a:off x="-47625" y="-163489"/>
+            <a:ext cx="4114800" cy="4114800"/>
           </a:xfrm>
           <a:custGeom>
             <a:avLst/>
@@ -3814,18 +4028,18 @@
             <a:cxnLst/>
             <a:rect r="r" b="b" t="t" l="l"/>
             <a:pathLst>
-              <a:path h="7473357" w="6562966">
+              <a:path h="4114800" w="4114800">
                 <a:moveTo>
                   <a:pt x="0" y="0"/>
                 </a:moveTo>
                 <a:lnTo>
-                  <a:pt x="6562967" y="0"/>
-                </a:lnTo>
-                <a:lnTo>
-                  <a:pt x="6562967" y="7473357"/>
-                </a:lnTo>
-                <a:lnTo>
-                  <a:pt x="0" y="7473357"/>
+                  <a:pt x="4114800" y="0"/>
+                </a:lnTo>
+                <a:lnTo>
+                  <a:pt x="4114800" y="4114800"/>
+                </a:lnTo>
+                <a:lnTo>
+                  <a:pt x="0" y="4114800"/>
                 </a:lnTo>
                 <a:lnTo>
                   <a:pt x="0" y="0"/>
@@ -3853,16 +4067,81 @@
           </a:ln>
         </p:spPr>
       </p:sp>
-      <p:sp>
-        <p:nvSpPr>
-          <p:cNvPr name="Freeform 4" id="4"/>
+      <p:grpSp>
+        <p:nvGrpSpPr>
+          <p:cNvPr name="Group 10" id="10"/>
+          <p:cNvGrpSpPr/>
+          <p:nvPr/>
+        </p:nvGrpSpPr>
+        <p:grpSpPr>
+          <a:xfrm rot="0">
+            <a:off x="17096423" y="4991100"/>
+            <a:ext cx="111442" cy="108585"/>
+            <a:chOff x="0" y="0"/>
+            <a:chExt cx="148590" cy="144780"/>
+          </a:xfrm>
+        </p:grpSpPr>
+        <p:sp>
+          <p:nvSpPr>
+            <p:cNvPr name="Freeform 11" id="11"/>
+            <p:cNvSpPr/>
+            <p:nvPr/>
+          </p:nvSpPr>
+          <p:spPr>
+            <a:xfrm flipH="false" flipV="false" rot="0">
+              <a:off x="46990" y="45720"/>
+              <a:ext cx="49530" cy="52070"/>
+            </a:xfrm>
+            <a:custGeom>
+              <a:avLst/>
+              <a:gdLst/>
+              <a:ahLst/>
+              <a:cxnLst/>
+              <a:rect r="r" b="b" t="t" l="l"/>
+              <a:pathLst>
+                <a:path h="52070" w="49530">
+                  <a:moveTo>
+                    <a:pt x="49530" y="17780"/>
+                  </a:moveTo>
+                  <a:cubicBezTo>
+                    <a:pt x="27940" y="52070"/>
+                    <a:pt x="7620" y="45720"/>
+                    <a:pt x="3810" y="38100"/>
+                  </a:cubicBezTo>
+                  <a:cubicBezTo>
+                    <a:pt x="0" y="31750"/>
+                    <a:pt x="3810" y="10160"/>
+                    <a:pt x="10160" y="5080"/>
+                  </a:cubicBezTo>
+                  <a:cubicBezTo>
+                    <a:pt x="16510" y="0"/>
+                    <a:pt x="43180" y="7620"/>
+                    <a:pt x="43180" y="7620"/>
+                  </a:cubicBezTo>
+                </a:path>
+              </a:pathLst>
+            </a:custGeom>
+            <a:solidFill>
+              <a:srgbClr val="99B9BE"/>
+            </a:solidFill>
+            <a:ln cap="sq">
+              <a:noFill/>
+              <a:prstDash val="solid"/>
+              <a:miter/>
+            </a:ln>
+          </p:spPr>
+        </p:sp>
+      </p:grpSp>
+      <p:sp>
+        <p:nvSpPr>
+          <p:cNvPr name="Freeform 12" id="12"/>
           <p:cNvSpPr/>
           <p:nvPr/>
         </p:nvSpPr>
         <p:spPr>
           <a:xfrm flipH="false" flipV="false" rot="0">
-            <a:off x="76200" y="2008531"/>
-            <a:ext cx="11359062" cy="5835718"/>
+            <a:off x="8703346" y="1973950"/>
+            <a:ext cx="9286228" cy="8313050"/>
           </a:xfrm>
           <a:custGeom>
             <a:avLst/>
@@ -3871,18 +4150,18 @@
             <a:cxnLst/>
             <a:rect r="r" b="b" t="t" l="l"/>
             <a:pathLst>
-              <a:path h="5835718" w="11359062">
+              <a:path h="8313050" w="9286228">
                 <a:moveTo>
                   <a:pt x="0" y="0"/>
                 </a:moveTo>
                 <a:lnTo>
-                  <a:pt x="11359062" y="0"/>
-                </a:lnTo>
-                <a:lnTo>
-                  <a:pt x="11359062" y="5835718"/>
-                </a:lnTo>
-                <a:lnTo>
-                  <a:pt x="0" y="5835718"/>
+                  <a:pt x="9286228" y="0"/>
+                </a:lnTo>
+                <a:lnTo>
+                  <a:pt x="9286228" y="8313050"/>
+                </a:lnTo>
+                <a:lnTo>
+                  <a:pt x="0" y="8313050"/>
                 </a:lnTo>
                 <a:lnTo>
                   <a:pt x="0" y="0"/>
@@ -3901,14 +4180,40 @@
       </p:sp>
       <p:sp>
         <p:nvSpPr>
-          <p:cNvPr name="TextBox 5" id="5"/>
+          <p:cNvPr name="AutoShape 13" id="13"/>
+          <p:cNvSpPr/>
+          <p:nvPr/>
+        </p:nvSpPr>
+        <p:spPr>
+          <a:xfrm flipV="true">
+            <a:off x="14159408" y="9351248"/>
+            <a:ext cx="2802942" cy="0"/>
+          </a:xfrm>
+          <a:prstGeom prst="line">
+            <a:avLst/>
+          </a:prstGeom>
+          <a:ln cap="rnd" w="19050">
+            <a:solidFill>
+              <a:srgbClr val="000000">
+                <a:alpha val="20784"/>
+              </a:srgbClr>
+            </a:solidFill>
+            <a:prstDash val="solid"/>
+            <a:headEnd type="none" len="sm" w="sm"/>
+            <a:tailEnd type="none" len="sm" w="sm"/>
+          </a:ln>
+        </p:spPr>
+      </p:sp>
+      <p:sp>
+        <p:nvSpPr>
+          <p:cNvPr name="TextBox 14" id="14"/>
           <p:cNvSpPr txBox="true"/>
           <p:nvPr/>
         </p:nvSpPr>
         <p:spPr>
           <a:xfrm rot="0">
-            <a:off x="10814643" y="2123878"/>
-            <a:ext cx="6444657" cy="1362710"/>
+            <a:off x="1682146" y="2985400"/>
+            <a:ext cx="6992625" cy="1153795"/>
           </a:xfrm>
           <a:prstGeom prst="rect">
             <a:avLst/>
@@ -3920,15 +4225,13 @@
           </a:bodyPr>
           <a:lstStyle/>
           <a:p>
-            <a:pPr algn="l" marL="561339" indent="-280669" lvl="1">
+            <a:pPr algn="just">
               <a:lnSpc>
-                <a:spcPts val="3639"/>
+                <a:spcPts val="3079"/>
               </a:lnSpc>
-              <a:buFont typeface="Arial"/>
-              <a:buChar char="•"/>
             </a:pPr>
             <a:r>
-              <a:rPr lang="en-US" sz="2599">
+              <a:rPr lang="en-US" sz="2199">
                 <a:solidFill>
                   <a:srgbClr val="034383"/>
                 </a:solidFill>
@@ -3941,38 +4244,38 @@
             </a:r>
           </a:p>
           <a:p>
-            <a:pPr algn="l" marL="1122678" indent="-374226" lvl="2">
+            <a:pPr algn="just" marL="474979" indent="-237490" lvl="1">
               <a:lnSpc>
-                <a:spcPts val="3639"/>
+                <a:spcPts val="3079"/>
               </a:lnSpc>
               <a:buFont typeface="Arial"/>
-              <a:buChar char="⚬"/>
+              <a:buChar char="•"/>
             </a:pPr>
             <a:r>
-              <a:rPr lang="en-US" sz="2599">
+              <a:rPr lang="en-US" sz="2199">
                 <a:solidFill>
-                  <a:srgbClr val="000000"/>
+                  <a:srgbClr val="0D1D29"/>
                 </a:solidFill>
                 <a:latin typeface="Open Sans 1"/>
                 <a:ea typeface="Open Sans 1"/>
                 <a:cs typeface="Open Sans 1"/>
                 <a:sym typeface="Open Sans 1"/>
               </a:rPr>
-              <a:t>Adjusts daily routines to improve overall health and development.</a:t>
+              <a:t>Tailors dietary recommendations based on the child's profile (gender, age, weight).</a:t>
             </a:r>
           </a:p>
         </p:txBody>
       </p:sp>
       <p:sp>
         <p:nvSpPr>
-          <p:cNvPr name="TextBox 6" id="6"/>
+          <p:cNvPr name="TextBox 15" id="15"/>
           <p:cNvSpPr txBox="true"/>
           <p:nvPr/>
         </p:nvSpPr>
         <p:spPr>
           <a:xfrm rot="0">
-            <a:off x="10814643" y="3751580"/>
-            <a:ext cx="6444657" cy="4105910"/>
+            <a:off x="1682146" y="8133980"/>
+            <a:ext cx="6992625" cy="1544320"/>
           </a:xfrm>
           <a:prstGeom prst="rect">
             <a:avLst/>
@@ -3984,128 +4287,13 @@
           </a:bodyPr>
           <a:lstStyle/>
           <a:p>
-            <a:pPr algn="l" marL="561339" indent="-280669" lvl="1">
+            <a:pPr algn="just">
               <a:lnSpc>
-                <a:spcPts val="3639"/>
-              </a:lnSpc>
-              <a:buFont typeface="Arial"/>
-              <a:buChar char="•"/>
-            </a:pPr>
-            <a:r>
-              <a:rPr lang="en-US" sz="2599">
-                <a:solidFill>
-                  <a:srgbClr val="034383"/>
-                </a:solidFill>
-                <a:latin typeface="Open Sans 1"/>
-                <a:ea typeface="Open Sans 1"/>
-                <a:cs typeface="Open Sans 1"/>
-                <a:sym typeface="Open Sans 1"/>
-              </a:rPr>
-              <a:t>Key Steps</a:t>
-            </a:r>
-          </a:p>
-          <a:p>
-            <a:pPr algn="l" marL="1122678" indent="-374226" lvl="2">
-              <a:lnSpc>
-                <a:spcPts val="3639"/>
-              </a:lnSpc>
-              <a:buFont typeface="Arial"/>
-              <a:buChar char="⚬"/>
-            </a:pPr>
-            <a:r>
-              <a:rPr lang="en-US" sz="2599">
-                <a:solidFill>
-                  <a:srgbClr val="000000"/>
-                </a:solidFill>
-                <a:latin typeface="Open Sans 1"/>
-                <a:ea typeface="Open Sans 1"/>
-                <a:cs typeface="Open Sans 1"/>
-                <a:sym typeface="Open Sans 1"/>
-              </a:rPr>
-              <a:t>Sleep Calculation: Ensures sufficient rest based on age.</a:t>
-            </a:r>
-          </a:p>
-          <a:p>
-            <a:pPr algn="l" marL="1122678" indent="-374226" lvl="2">
-              <a:lnSpc>
-                <a:spcPts val="3639"/>
-              </a:lnSpc>
-              <a:buFont typeface="Arial"/>
-              <a:buChar char="⚬"/>
-            </a:pPr>
-            <a:r>
-              <a:rPr lang="en-US" sz="2599">
-                <a:solidFill>
-                  <a:srgbClr val="000000"/>
-                </a:solidFill>
-                <a:latin typeface="Open Sans 1"/>
-                <a:ea typeface="Open Sans 1"/>
-                <a:cs typeface="Open Sans 1"/>
-                <a:sym typeface="Open Sans 1"/>
-              </a:rPr>
-              <a:t>Physical Activity Planning: Promotes regular and active movement.</a:t>
-            </a:r>
-          </a:p>
-          <a:p>
-            <a:pPr algn="l" marL="1122678" indent="-374226" lvl="2">
-              <a:lnSpc>
-                <a:spcPts val="3639"/>
-              </a:lnSpc>
-              <a:buFont typeface="Arial"/>
-              <a:buChar char="⚬"/>
-            </a:pPr>
-            <a:r>
-              <a:rPr lang="en-US" sz="2599">
-                <a:solidFill>
-                  <a:srgbClr val="000000"/>
-                </a:solidFill>
-                <a:latin typeface="Open Sans 1"/>
-                <a:ea typeface="Open Sans 1"/>
-                <a:cs typeface="Open Sans 1"/>
-                <a:sym typeface="Open Sans 1"/>
-              </a:rPr>
-              <a:t>Hydration Goals: Recommends proper daily water intake.</a:t>
-            </a:r>
-          </a:p>
-          <a:p>
-            <a:pPr algn="l">
-              <a:lnSpc>
-                <a:spcPts val="3639"/>
+                <a:spcPts val="3079"/>
               </a:lnSpc>
             </a:pPr>
-          </a:p>
-        </p:txBody>
-      </p:sp>
-      <p:sp>
-        <p:nvSpPr>
-          <p:cNvPr name="TextBox 7" id="7"/>
-          <p:cNvSpPr txBox="true"/>
-          <p:nvPr/>
-        </p:nvSpPr>
-        <p:spPr>
-          <a:xfrm rot="0">
-            <a:off x="10814643" y="7653749"/>
-            <a:ext cx="6734435" cy="1819910"/>
-          </a:xfrm>
-          <a:prstGeom prst="rect">
-            <a:avLst/>
-          </a:prstGeom>
-        </p:spPr>
-        <p:txBody>
-          <a:bodyPr anchor="t" rtlCol="false" tIns="0" lIns="0" bIns="0" rIns="0">
-            <a:spAutoFit/>
-          </a:bodyPr>
-          <a:lstStyle/>
-          <a:p>
-            <a:pPr algn="l" marL="561339" indent="-280669" lvl="1">
-              <a:lnSpc>
-                <a:spcPts val="3639"/>
-              </a:lnSpc>
-              <a:buFont typeface="Arial"/>
-              <a:buChar char="•"/>
-            </a:pPr>
-            <a:r>
-              <a:rPr lang="en-US" sz="2599">
+            <a:r>
+              <a:rPr lang="en-US" sz="2199">
                 <a:solidFill>
                   <a:srgbClr val="034383"/>
                 </a:solidFill>
@@ -4118,79 +4306,233 @@
             </a:r>
           </a:p>
           <a:p>
-            <a:pPr algn="l" marL="1122678" indent="-374226" lvl="2">
+            <a:pPr algn="just" marL="474979" indent="-237490" lvl="1">
               <a:lnSpc>
-                <a:spcPts val="3639"/>
+                <a:spcPts val="3079"/>
               </a:lnSpc>
               <a:buFont typeface="Arial"/>
-              <a:buChar char="⚬"/>
+              <a:buChar char="•"/>
             </a:pPr>
             <a:r>
-              <a:rPr lang="en-US" sz="2599">
+              <a:rPr lang="en-US" sz="2199">
                 <a:solidFill>
-                  <a:srgbClr val="000000"/>
+                  <a:srgbClr val="0D1D29"/>
                 </a:solidFill>
                 <a:latin typeface="Open Sans 1"/>
                 <a:ea typeface="Open Sans 1"/>
                 <a:cs typeface="Open Sans 1"/>
                 <a:sym typeface="Open Sans 1"/>
               </a:rPr>
-              <a:t>Incorporates these habits into the treatment protocol for a holistic approach to the child's well-being.</a:t>
+              <a:t>Integrates all calculations into a personalized treatment protocol for optimized growth and nutrition.</a:t>
             </a:r>
           </a:p>
         </p:txBody>
       </p:sp>
       <p:sp>
         <p:nvSpPr>
-          <p:cNvPr name="Freeform 8" id="8"/>
-          <p:cNvSpPr/>
-          <p:nvPr/>
-        </p:nvSpPr>
-        <p:spPr>
-          <a:xfrm flipH="true" flipV="false" rot="-10800000">
-            <a:off x="-938428" y="5289524"/>
-            <a:ext cx="6157558" cy="6157558"/>
-          </a:xfrm>
-          <a:custGeom>
+          <p:cNvPr name="TextBox 16" id="16"/>
+          <p:cNvSpPr txBox="true"/>
+          <p:nvPr/>
+        </p:nvSpPr>
+        <p:spPr>
+          <a:xfrm rot="0">
+            <a:off x="1570165" y="4351285"/>
+            <a:ext cx="7104606" cy="3887470"/>
+          </a:xfrm>
+          <a:prstGeom prst="rect">
             <a:avLst/>
-            <a:gdLst/>
-            <a:ahLst/>
-            <a:cxnLst/>
-            <a:rect r="r" b="b" t="t" l="l"/>
-            <a:pathLst>
-              <a:path h="6157558" w="6157558">
-                <a:moveTo>
-                  <a:pt x="6157558" y="0"/>
-                </a:moveTo>
-                <a:lnTo>
-                  <a:pt x="0" y="0"/>
-                </a:lnTo>
-                <a:lnTo>
-                  <a:pt x="0" y="6157558"/>
-                </a:lnTo>
-                <a:lnTo>
-                  <a:pt x="6157558" y="6157558"/>
-                </a:lnTo>
-                <a:lnTo>
-                  <a:pt x="6157558" y="0"/>
-                </a:lnTo>
-                <a:close/>
-              </a:path>
-            </a:pathLst>
-          </a:custGeom>
-          <a:blipFill>
-            <a:blip r:embed="rId5">
-              <a:extLst>
-                <a:ext uri="{96DAC541-7B7A-43D3-8B79-37D633B846F1}">
-                  <asvg:svgBlip xmlns:asvg="http://schemas.microsoft.com/office/drawing/2016/SVG/main" r:embed="rId6"/>
-                </a:ext>
-              </a:extLst>
-            </a:blip>
-            <a:stretch>
-              <a:fillRect l="0" t="0" r="0" b="0"/>
-            </a:stretch>
-          </a:blipFill>
-        </p:spPr>
+          </a:prstGeom>
+        </p:spPr>
+        <p:txBody>
+          <a:bodyPr anchor="t" rtlCol="false" tIns="0" lIns="0" bIns="0" rIns="0">
+            <a:spAutoFit/>
+          </a:bodyPr>
+          <a:lstStyle/>
+          <a:p>
+            <a:pPr algn="just" marL="0" indent="0" lvl="0">
+              <a:lnSpc>
+                <a:spcPts val="3079"/>
+              </a:lnSpc>
+              <a:spcBef>
+                <a:spcPct val="0"/>
+              </a:spcBef>
+            </a:pPr>
+            <a:r>
+              <a:rPr lang="en-US" sz="2199">
+                <a:solidFill>
+                  <a:srgbClr val="034383"/>
+                </a:solidFill>
+                <a:latin typeface="Open Sans 1"/>
+                <a:ea typeface="Open Sans 1"/>
+                <a:cs typeface="Open Sans 1"/>
+                <a:sym typeface="Open Sans 1"/>
+              </a:rPr>
+              <a:t>K</a:t>
+            </a:r>
+            <a:r>
+              <a:rPr lang="en-US" sz="2199" strike="noStrike" u="none">
+                <a:solidFill>
+                  <a:srgbClr val="034383"/>
+                </a:solidFill>
+                <a:latin typeface="Open Sans 1"/>
+                <a:ea typeface="Open Sans 1"/>
+                <a:cs typeface="Open Sans 1"/>
+                <a:sym typeface="Open Sans 1"/>
+              </a:rPr>
+              <a:t>ey Steps</a:t>
+            </a:r>
+          </a:p>
+          <a:p>
+            <a:pPr algn="just" marL="474979" indent="-237490" lvl="1">
+              <a:lnSpc>
+                <a:spcPts val="3079"/>
+              </a:lnSpc>
+              <a:spcBef>
+                <a:spcPct val="0"/>
+              </a:spcBef>
+              <a:buFont typeface="Arial"/>
+              <a:buChar char="•"/>
+            </a:pPr>
+            <a:r>
+              <a:rPr lang="en-US" sz="2199" strike="noStrike" u="none">
+                <a:solidFill>
+                  <a:srgbClr val="0D1D29"/>
+                </a:solidFill>
+                <a:latin typeface="Open Sans 1"/>
+                <a:ea typeface="Open Sans 1"/>
+                <a:cs typeface="Open Sans 1"/>
+                <a:sym typeface="Open Sans 1"/>
+              </a:rPr>
+              <a:t>Median Weight Defining: Determines target weight for healthy growth.</a:t>
+            </a:r>
+          </a:p>
+          <a:p>
+            <a:pPr algn="just" marL="474979" indent="-237490" lvl="1">
+              <a:lnSpc>
+                <a:spcPts val="3079"/>
+              </a:lnSpc>
+              <a:spcBef>
+                <a:spcPct val="0"/>
+              </a:spcBef>
+              <a:buFont typeface="Arial"/>
+              <a:buChar char="•"/>
+            </a:pPr>
+            <a:r>
+              <a:rPr lang="en-US" sz="2199" strike="noStrike" u="none">
+                <a:solidFill>
+                  <a:srgbClr val="0D1D29"/>
+                </a:solidFill>
+                <a:latin typeface="Open Sans 1"/>
+                <a:ea typeface="Open Sans 1"/>
+                <a:cs typeface="Open Sans 1"/>
+                <a:sym typeface="Open Sans 1"/>
+              </a:rPr>
+              <a:t>Caloric Value Calculation: Calculates daily caloric needs.</a:t>
+            </a:r>
+          </a:p>
+          <a:p>
+            <a:pPr algn="just" marL="474979" indent="-237490" lvl="1">
+              <a:lnSpc>
+                <a:spcPts val="3079"/>
+              </a:lnSpc>
+              <a:spcBef>
+                <a:spcPct val="0"/>
+              </a:spcBef>
+              <a:buFont typeface="Arial"/>
+              <a:buChar char="•"/>
+            </a:pPr>
+            <a:r>
+              <a:rPr lang="en-US" sz="2199" strike="noStrike" u="none">
+                <a:solidFill>
+                  <a:srgbClr val="0D1D29"/>
+                </a:solidFill>
+                <a:latin typeface="Open Sans 1"/>
+                <a:ea typeface="Open Sans 1"/>
+                <a:cs typeface="Open Sans 1"/>
+                <a:sym typeface="Open Sans 1"/>
+              </a:rPr>
+              <a:t>Calorie Distribution: Balances macronutrients (protein, carbohydrates, fats).</a:t>
+            </a:r>
+          </a:p>
+          <a:p>
+            <a:pPr algn="just" marL="474979" indent="-237490" lvl="1">
+              <a:lnSpc>
+                <a:spcPts val="3079"/>
+              </a:lnSpc>
+              <a:spcBef>
+                <a:spcPct val="0"/>
+              </a:spcBef>
+              <a:buFont typeface="Arial"/>
+              <a:buChar char="•"/>
+            </a:pPr>
+            <a:r>
+              <a:rPr lang="en-US" sz="2199" strike="noStrike" u="none">
+                <a:solidFill>
+                  <a:srgbClr val="0D1D29"/>
+                </a:solidFill>
+                <a:latin typeface="Open Sans 1"/>
+                <a:ea typeface="Open Sans 1"/>
+                <a:cs typeface="Open Sans 1"/>
+                <a:sym typeface="Open Sans 1"/>
+              </a:rPr>
+              <a:t>Supplement Supplying: Determines required vitamins and minerals.</a:t>
+            </a:r>
+          </a:p>
+          <a:p>
+            <a:pPr algn="just" marL="0" indent="0" lvl="0">
+              <a:lnSpc>
+                <a:spcPts val="3079"/>
+              </a:lnSpc>
+              <a:spcBef>
+                <a:spcPct val="0"/>
+              </a:spcBef>
+            </a:pPr>
+          </a:p>
+        </p:txBody>
+      </p:sp>
+      <p:sp>
+        <p:nvSpPr>
+          <p:cNvPr name="TextBox 17" id="17"/>
+          <p:cNvSpPr txBox="true"/>
+          <p:nvPr/>
+        </p:nvSpPr>
+        <p:spPr>
+          <a:xfrm rot="0">
+            <a:off x="17259300" y="9182100"/>
+            <a:ext cx="152400" cy="228600"/>
+          </a:xfrm>
+          <a:prstGeom prst="rect">
+            <a:avLst/>
+          </a:prstGeom>
+        </p:spPr>
+        <p:txBody>
+          <a:bodyPr anchor="t" rtlCol="false" tIns="0" lIns="0" bIns="0" rIns="0" wrap="none">
+            <a:spAutoFit/>
+          </a:bodyPr>
+          <a:lstStyle/>
+          <a:p>
+            <a:pPr algn="ctr">
+              <a:lnSpc>
+                <a:spcPts val="6160"/>
+              </a:lnSpc>
+              <a:spcBef>
+                <a:spcPct val="0"/>
+              </a:spcBef>
+            </a:pPr>
+            <a:r>
+              <a:rPr lang="en-US" sz="4400">
+                <a:solidFill>
+                  <a:srgbClr val="000000"/>
+                </a:solidFill>
+                <a:latin typeface="Suez One"/>
+                <a:ea typeface="Suez One"/>
+                <a:cs typeface="Suez One"/>
+                <a:sym typeface="Suez One"/>
+              </a:rPr>
+              <a:t>10</a:t>
+            </a:r>
+          </a:p>
+        </p:txBody>
       </p:sp>
     </p:spTree>
   </p:cSld>
@@ -4225,8 +4567,8 @@
         </p:nvSpPr>
         <p:spPr>
           <a:xfrm flipH="false" flipV="false" rot="0">
-            <a:off x="0" y="-831070"/>
-            <a:ext cx="9873830" cy="11243492"/>
+            <a:off x="8674771" y="2508670"/>
+            <a:ext cx="9809849" cy="5542364"/>
           </a:xfrm>
           <a:custGeom>
             <a:avLst/>
@@ -4235,18 +4577,813 @@
             <a:cxnLst/>
             <a:rect r="r" b="b" t="t" l="l"/>
             <a:pathLst>
-              <a:path h="11243492" w="9873830">
+              <a:path h="5542364" w="9809849">
                 <a:moveTo>
                   <a:pt x="0" y="0"/>
                 </a:moveTo>
                 <a:lnTo>
-                  <a:pt x="9873830" y="0"/>
-                </a:lnTo>
-                <a:lnTo>
-                  <a:pt x="9873830" y="11243492"/>
-                </a:lnTo>
-                <a:lnTo>
-                  <a:pt x="0" y="11243492"/>
+                  <a:pt x="9809849" y="0"/>
+                </a:lnTo>
+                <a:lnTo>
+                  <a:pt x="9809849" y="5542364"/>
+                </a:lnTo>
+                <a:lnTo>
+                  <a:pt x="0" y="5542364"/>
+                </a:lnTo>
+                <a:lnTo>
+                  <a:pt x="0" y="0"/>
+                </a:lnTo>
+                <a:close/>
+              </a:path>
+            </a:pathLst>
+          </a:custGeom>
+          <a:blipFill>
+            <a:blip r:embed="rId2"/>
+            <a:stretch>
+              <a:fillRect l="0" t="0" r="0" b="0"/>
+            </a:stretch>
+          </a:blipFill>
+        </p:spPr>
+      </p:sp>
+      <p:sp>
+        <p:nvSpPr>
+          <p:cNvPr name="TextBox 3" id="3"/>
+          <p:cNvSpPr txBox="true"/>
+          <p:nvPr/>
+        </p:nvSpPr>
+        <p:spPr>
+          <a:xfrm rot="0">
+            <a:off x="2009775" y="1438299"/>
+            <a:ext cx="15702433" cy="949325"/>
+          </a:xfrm>
+          <a:prstGeom prst="rect">
+            <a:avLst/>
+          </a:prstGeom>
+        </p:spPr>
+        <p:txBody>
+          <a:bodyPr anchor="t" rtlCol="false" tIns="0" lIns="0" bIns="0" rIns="0">
+            <a:spAutoFit/>
+          </a:bodyPr>
+          <a:lstStyle/>
+          <a:p>
+            <a:pPr algn="l">
+              <a:lnSpc>
+                <a:spcPts val="7150"/>
+              </a:lnSpc>
+            </a:pPr>
+            <a:r>
+              <a:rPr lang="en-US" sz="6500" b="true">
+                <a:solidFill>
+                  <a:srgbClr val="034383"/>
+                </a:solidFill>
+                <a:latin typeface="Ubuntu Bold"/>
+                <a:ea typeface="Ubuntu Bold"/>
+                <a:cs typeface="Ubuntu Bold"/>
+                <a:sym typeface="Ubuntu Bold"/>
+              </a:rPr>
+              <a:t>NUTRITION CHANGING</a:t>
+            </a:r>
+          </a:p>
+        </p:txBody>
+      </p:sp>
+      <p:grpSp>
+        <p:nvGrpSpPr>
+          <p:cNvPr name="Group 4" id="4"/>
+          <p:cNvGrpSpPr/>
+          <p:nvPr/>
+        </p:nvGrpSpPr>
+        <p:grpSpPr>
+          <a:xfrm rot="0">
+            <a:off x="2764867" y="-699889"/>
+            <a:ext cx="16931738" cy="1533898"/>
+            <a:chOff x="0" y="0"/>
+            <a:chExt cx="4459388" cy="403990"/>
+          </a:xfrm>
+        </p:grpSpPr>
+        <p:sp>
+          <p:nvSpPr>
+            <p:cNvPr name="Freeform 5" id="5"/>
+            <p:cNvSpPr/>
+            <p:nvPr/>
+          </p:nvSpPr>
+          <p:spPr>
+            <a:xfrm flipH="false" flipV="false" rot="0">
+              <a:off x="0" y="0"/>
+              <a:ext cx="4459388" cy="403990"/>
+            </a:xfrm>
+            <a:custGeom>
+              <a:avLst/>
+              <a:gdLst/>
+              <a:ahLst/>
+              <a:cxnLst/>
+              <a:rect r="r" b="b" t="t" l="l"/>
+              <a:pathLst>
+                <a:path h="403990" w="4459388">
+                  <a:moveTo>
+                    <a:pt x="0" y="0"/>
+                  </a:moveTo>
+                  <a:lnTo>
+                    <a:pt x="4459388" y="0"/>
+                  </a:lnTo>
+                  <a:lnTo>
+                    <a:pt x="4459388" y="403990"/>
+                  </a:lnTo>
+                  <a:lnTo>
+                    <a:pt x="0" y="403990"/>
+                  </a:lnTo>
+                  <a:close/>
+                </a:path>
+              </a:pathLst>
+            </a:custGeom>
+            <a:solidFill>
+              <a:srgbClr val="034383"/>
+            </a:solidFill>
+          </p:spPr>
+        </p:sp>
+        <p:sp>
+          <p:nvSpPr>
+            <p:cNvPr name="TextBox 6" id="6"/>
+            <p:cNvSpPr txBox="true"/>
+            <p:nvPr/>
+          </p:nvSpPr>
+          <p:spPr>
+            <a:xfrm>
+              <a:off x="0" y="-38100"/>
+              <a:ext cx="4459388" cy="442090"/>
+            </a:xfrm>
+            <a:prstGeom prst="rect">
+              <a:avLst/>
+            </a:prstGeom>
+          </p:spPr>
+          <p:txBody>
+            <a:bodyPr anchor="ctr" rtlCol="false" tIns="50800" lIns="50800" bIns="50800" rIns="50800"/>
+            <a:lstStyle/>
+            <a:p>
+              <a:pPr algn="ctr">
+                <a:lnSpc>
+                  <a:spcPts val="3295"/>
+                </a:lnSpc>
+              </a:pPr>
+            </a:p>
+          </p:txBody>
+        </p:sp>
+      </p:grpSp>
+      <p:grpSp>
+        <p:nvGrpSpPr>
+          <p:cNvPr name="Group 7" id="7"/>
+          <p:cNvGrpSpPr/>
+          <p:nvPr/>
+        </p:nvGrpSpPr>
+        <p:grpSpPr>
+          <a:xfrm rot="-5400000">
+            <a:off x="-5015057" y="4582096"/>
+            <a:ext cx="10698089" cy="1533898"/>
+            <a:chOff x="0" y="0"/>
+            <a:chExt cx="2817604" cy="403990"/>
+          </a:xfrm>
+        </p:grpSpPr>
+        <p:sp>
+          <p:nvSpPr>
+            <p:cNvPr name="Freeform 8" id="8"/>
+            <p:cNvSpPr/>
+            <p:nvPr/>
+          </p:nvSpPr>
+          <p:spPr>
+            <a:xfrm flipH="false" flipV="false" rot="0">
+              <a:off x="0" y="0"/>
+              <a:ext cx="2817604" cy="403990"/>
+            </a:xfrm>
+            <a:custGeom>
+              <a:avLst/>
+              <a:gdLst/>
+              <a:ahLst/>
+              <a:cxnLst/>
+              <a:rect r="r" b="b" t="t" l="l"/>
+              <a:pathLst>
+                <a:path h="403990" w="2817604">
+                  <a:moveTo>
+                    <a:pt x="0" y="0"/>
+                  </a:moveTo>
+                  <a:lnTo>
+                    <a:pt x="2817604" y="0"/>
+                  </a:lnTo>
+                  <a:lnTo>
+                    <a:pt x="2817604" y="403990"/>
+                  </a:lnTo>
+                  <a:lnTo>
+                    <a:pt x="0" y="403990"/>
+                  </a:lnTo>
+                  <a:close/>
+                </a:path>
+              </a:pathLst>
+            </a:custGeom>
+            <a:solidFill>
+              <a:srgbClr val="034383"/>
+            </a:solidFill>
+          </p:spPr>
+        </p:sp>
+        <p:sp>
+          <p:nvSpPr>
+            <p:cNvPr name="TextBox 9" id="9"/>
+            <p:cNvSpPr txBox="true"/>
+            <p:nvPr/>
+          </p:nvSpPr>
+          <p:spPr>
+            <a:xfrm>
+              <a:off x="0" y="-38100"/>
+              <a:ext cx="2817604" cy="442090"/>
+            </a:xfrm>
+            <a:prstGeom prst="rect">
+              <a:avLst/>
+            </a:prstGeom>
+          </p:spPr>
+          <p:txBody>
+            <a:bodyPr anchor="ctr" rtlCol="false" tIns="50800" lIns="50800" bIns="50800" rIns="50800"/>
+            <a:lstStyle/>
+            <a:p>
+              <a:pPr algn="ctr">
+                <a:lnSpc>
+                  <a:spcPts val="3295"/>
+                </a:lnSpc>
+              </a:pPr>
+            </a:p>
+          </p:txBody>
+        </p:sp>
+      </p:grpSp>
+      <p:sp>
+        <p:nvSpPr>
+          <p:cNvPr name="Freeform 10" id="10"/>
+          <p:cNvSpPr/>
+          <p:nvPr/>
+        </p:nvSpPr>
+        <p:spPr>
+          <a:xfrm flipH="false" flipV="false" rot="0">
+            <a:off x="-47625" y="-163489"/>
+            <a:ext cx="4114800" cy="4114800"/>
+          </a:xfrm>
+          <a:custGeom>
+            <a:avLst/>
+            <a:gdLst/>
+            <a:ahLst/>
+            <a:cxnLst/>
+            <a:rect r="r" b="b" t="t" l="l"/>
+            <a:pathLst>
+              <a:path h="4114800" w="4114800">
+                <a:moveTo>
+                  <a:pt x="0" y="0"/>
+                </a:moveTo>
+                <a:lnTo>
+                  <a:pt x="4114800" y="0"/>
+                </a:lnTo>
+                <a:lnTo>
+                  <a:pt x="4114800" y="4114800"/>
+                </a:lnTo>
+                <a:lnTo>
+                  <a:pt x="0" y="4114800"/>
+                </a:lnTo>
+                <a:lnTo>
+                  <a:pt x="0" y="0"/>
+                </a:lnTo>
+                <a:close/>
+              </a:path>
+            </a:pathLst>
+          </a:custGeom>
+          <a:blipFill>
+            <a:blip r:embed="rId3">
+              <a:extLst>
+                <a:ext uri="{96DAC541-7B7A-43D3-8B79-37D633B846F1}">
+                  <asvg:svgBlip xmlns:asvg="http://schemas.microsoft.com/office/drawing/2016/SVG/main" r:embed="rId4"/>
+                </a:ext>
+              </a:extLst>
+            </a:blip>
+            <a:stretch>
+              <a:fillRect l="0" t="0" r="0" b="0"/>
+            </a:stretch>
+          </a:blipFill>
+          <a:ln cap="sq">
+            <a:noFill/>
+            <a:prstDash val="solid"/>
+            <a:miter/>
+          </a:ln>
+        </p:spPr>
+      </p:sp>
+      <p:grpSp>
+        <p:nvGrpSpPr>
+          <p:cNvPr name="Group 11" id="11"/>
+          <p:cNvGrpSpPr/>
+          <p:nvPr/>
+        </p:nvGrpSpPr>
+        <p:grpSpPr>
+          <a:xfrm rot="0">
+            <a:off x="17096423" y="4991100"/>
+            <a:ext cx="111442" cy="108585"/>
+            <a:chOff x="0" y="0"/>
+            <a:chExt cx="148590" cy="144780"/>
+          </a:xfrm>
+        </p:grpSpPr>
+        <p:sp>
+          <p:nvSpPr>
+            <p:cNvPr name="Freeform 12" id="12"/>
+            <p:cNvSpPr/>
+            <p:nvPr/>
+          </p:nvSpPr>
+          <p:spPr>
+            <a:xfrm flipH="false" flipV="false" rot="0">
+              <a:off x="46990" y="45720"/>
+              <a:ext cx="49530" cy="52070"/>
+            </a:xfrm>
+            <a:custGeom>
+              <a:avLst/>
+              <a:gdLst/>
+              <a:ahLst/>
+              <a:cxnLst/>
+              <a:rect r="r" b="b" t="t" l="l"/>
+              <a:pathLst>
+                <a:path h="52070" w="49530">
+                  <a:moveTo>
+                    <a:pt x="49530" y="17780"/>
+                  </a:moveTo>
+                  <a:cubicBezTo>
+                    <a:pt x="27940" y="52070"/>
+                    <a:pt x="7620" y="45720"/>
+                    <a:pt x="3810" y="38100"/>
+                  </a:cubicBezTo>
+                  <a:cubicBezTo>
+                    <a:pt x="0" y="31750"/>
+                    <a:pt x="3810" y="10160"/>
+                    <a:pt x="10160" y="5080"/>
+                  </a:cubicBezTo>
+                  <a:cubicBezTo>
+                    <a:pt x="16510" y="0"/>
+                    <a:pt x="43180" y="7620"/>
+                    <a:pt x="43180" y="7620"/>
+                  </a:cubicBezTo>
+                </a:path>
+              </a:pathLst>
+            </a:custGeom>
+            <a:solidFill>
+              <a:srgbClr val="99B9BE"/>
+            </a:solidFill>
+            <a:ln cap="sq">
+              <a:noFill/>
+              <a:prstDash val="solid"/>
+              <a:miter/>
+            </a:ln>
+          </p:spPr>
+        </p:sp>
+      </p:grpSp>
+      <p:sp>
+        <p:nvSpPr>
+          <p:cNvPr name="AutoShape 13" id="13"/>
+          <p:cNvSpPr/>
+          <p:nvPr/>
+        </p:nvSpPr>
+        <p:spPr>
+          <a:xfrm flipV="true">
+            <a:off x="14159408" y="9351248"/>
+            <a:ext cx="2802942" cy="0"/>
+          </a:xfrm>
+          <a:prstGeom prst="line">
+            <a:avLst/>
+          </a:prstGeom>
+          <a:ln cap="rnd" w="19050">
+            <a:solidFill>
+              <a:srgbClr val="000000">
+                <a:alpha val="20784"/>
+              </a:srgbClr>
+            </a:solidFill>
+            <a:prstDash val="solid"/>
+            <a:headEnd type="none" len="sm" w="sm"/>
+            <a:tailEnd type="none" len="sm" w="sm"/>
+          </a:ln>
+        </p:spPr>
+      </p:sp>
+      <p:sp>
+        <p:nvSpPr>
+          <p:cNvPr name="TextBox 14" id="14"/>
+          <p:cNvSpPr txBox="true"/>
+          <p:nvPr/>
+        </p:nvSpPr>
+        <p:spPr>
+          <a:xfrm rot="0">
+            <a:off x="1682146" y="2985400"/>
+            <a:ext cx="6992625" cy="1153795"/>
+          </a:xfrm>
+          <a:prstGeom prst="rect">
+            <a:avLst/>
+          </a:prstGeom>
+        </p:spPr>
+        <p:txBody>
+          <a:bodyPr anchor="t" rtlCol="false" tIns="0" lIns="0" bIns="0" rIns="0">
+            <a:spAutoFit/>
+          </a:bodyPr>
+          <a:lstStyle/>
+          <a:p>
+            <a:pPr algn="just">
+              <a:lnSpc>
+                <a:spcPts val="3079"/>
+              </a:lnSpc>
+            </a:pPr>
+            <a:r>
+              <a:rPr lang="en-US" sz="2199">
+                <a:solidFill>
+                  <a:srgbClr val="034383"/>
+                </a:solidFill>
+                <a:latin typeface="Open Sans 1"/>
+                <a:ea typeface="Open Sans 1"/>
+                <a:cs typeface="Open Sans 1"/>
+                <a:sym typeface="Open Sans 1"/>
+              </a:rPr>
+              <a:t>Purpose</a:t>
+            </a:r>
+          </a:p>
+          <a:p>
+            <a:pPr algn="just" marL="474979" indent="-237490" lvl="1">
+              <a:lnSpc>
+                <a:spcPts val="3079"/>
+              </a:lnSpc>
+              <a:buFont typeface="Arial"/>
+              <a:buChar char="•"/>
+            </a:pPr>
+            <a:r>
+              <a:rPr lang="en-US" sz="2199">
+                <a:solidFill>
+                  <a:srgbClr val="0D1D29"/>
+                </a:solidFill>
+                <a:latin typeface="Open Sans 1"/>
+                <a:ea typeface="Open Sans 1"/>
+                <a:cs typeface="Open Sans 1"/>
+                <a:sym typeface="Open Sans 1"/>
+              </a:rPr>
+              <a:t>Tailors dietary recommendations based on the child's profile (gender, age, weight).</a:t>
+            </a:r>
+          </a:p>
+        </p:txBody>
+      </p:sp>
+      <p:sp>
+        <p:nvSpPr>
+          <p:cNvPr name="TextBox 15" id="15"/>
+          <p:cNvSpPr txBox="true"/>
+          <p:nvPr/>
+        </p:nvSpPr>
+        <p:spPr>
+          <a:xfrm rot="0">
+            <a:off x="1682146" y="8133980"/>
+            <a:ext cx="6992625" cy="1544320"/>
+          </a:xfrm>
+          <a:prstGeom prst="rect">
+            <a:avLst/>
+          </a:prstGeom>
+        </p:spPr>
+        <p:txBody>
+          <a:bodyPr anchor="t" rtlCol="false" tIns="0" lIns="0" bIns="0" rIns="0">
+            <a:spAutoFit/>
+          </a:bodyPr>
+          <a:lstStyle/>
+          <a:p>
+            <a:pPr algn="just">
+              <a:lnSpc>
+                <a:spcPts val="3079"/>
+              </a:lnSpc>
+            </a:pPr>
+            <a:r>
+              <a:rPr lang="en-US" sz="2199">
+                <a:solidFill>
+                  <a:srgbClr val="034383"/>
+                </a:solidFill>
+                <a:latin typeface="Open Sans 1"/>
+                <a:ea typeface="Open Sans 1"/>
+                <a:cs typeface="Open Sans 1"/>
+                <a:sym typeface="Open Sans 1"/>
+              </a:rPr>
+              <a:t>Outcome</a:t>
+            </a:r>
+          </a:p>
+          <a:p>
+            <a:pPr algn="just" marL="474979" indent="-237490" lvl="1">
+              <a:lnSpc>
+                <a:spcPts val="3079"/>
+              </a:lnSpc>
+              <a:buFont typeface="Arial"/>
+              <a:buChar char="•"/>
+            </a:pPr>
+            <a:r>
+              <a:rPr lang="en-US" sz="2199">
+                <a:solidFill>
+                  <a:srgbClr val="0D1D29"/>
+                </a:solidFill>
+                <a:latin typeface="Open Sans 1"/>
+                <a:ea typeface="Open Sans 1"/>
+                <a:cs typeface="Open Sans 1"/>
+                <a:sym typeface="Open Sans 1"/>
+              </a:rPr>
+              <a:t>Integrates all calculations into a personalized treatment protocol for optimized growth and nutrition.</a:t>
+            </a:r>
+          </a:p>
+        </p:txBody>
+      </p:sp>
+      <p:sp>
+        <p:nvSpPr>
+          <p:cNvPr name="TextBox 16" id="16"/>
+          <p:cNvSpPr txBox="true"/>
+          <p:nvPr/>
+        </p:nvSpPr>
+        <p:spPr>
+          <a:xfrm rot="0">
+            <a:off x="1570165" y="4351285"/>
+            <a:ext cx="7104606" cy="3887470"/>
+          </a:xfrm>
+          <a:prstGeom prst="rect">
+            <a:avLst/>
+          </a:prstGeom>
+        </p:spPr>
+        <p:txBody>
+          <a:bodyPr anchor="t" rtlCol="false" tIns="0" lIns="0" bIns="0" rIns="0">
+            <a:spAutoFit/>
+          </a:bodyPr>
+          <a:lstStyle/>
+          <a:p>
+            <a:pPr algn="just" marL="0" indent="0" lvl="0">
+              <a:lnSpc>
+                <a:spcPts val="3079"/>
+              </a:lnSpc>
+              <a:spcBef>
+                <a:spcPct val="0"/>
+              </a:spcBef>
+            </a:pPr>
+            <a:r>
+              <a:rPr lang="en-US" sz="2199">
+                <a:solidFill>
+                  <a:srgbClr val="034383"/>
+                </a:solidFill>
+                <a:latin typeface="Open Sans 1"/>
+                <a:ea typeface="Open Sans 1"/>
+                <a:cs typeface="Open Sans 1"/>
+                <a:sym typeface="Open Sans 1"/>
+              </a:rPr>
+              <a:t>K</a:t>
+            </a:r>
+            <a:r>
+              <a:rPr lang="en-US" sz="2199" strike="noStrike" u="none">
+                <a:solidFill>
+                  <a:srgbClr val="034383"/>
+                </a:solidFill>
+                <a:latin typeface="Open Sans 1"/>
+                <a:ea typeface="Open Sans 1"/>
+                <a:cs typeface="Open Sans 1"/>
+                <a:sym typeface="Open Sans 1"/>
+              </a:rPr>
+              <a:t>ey Steps</a:t>
+            </a:r>
+          </a:p>
+          <a:p>
+            <a:pPr algn="just" marL="474979" indent="-237490" lvl="1">
+              <a:lnSpc>
+                <a:spcPts val="3079"/>
+              </a:lnSpc>
+              <a:spcBef>
+                <a:spcPct val="0"/>
+              </a:spcBef>
+              <a:buFont typeface="Arial"/>
+              <a:buChar char="•"/>
+            </a:pPr>
+            <a:r>
+              <a:rPr lang="en-US" sz="2199" strike="noStrike" u="none">
+                <a:solidFill>
+                  <a:srgbClr val="0D1D29"/>
+                </a:solidFill>
+                <a:latin typeface="Open Sans 1"/>
+                <a:ea typeface="Open Sans 1"/>
+                <a:cs typeface="Open Sans 1"/>
+                <a:sym typeface="Open Sans 1"/>
+              </a:rPr>
+              <a:t>Median Weight Defining: Determines target weight for healthy growth.</a:t>
+            </a:r>
+          </a:p>
+          <a:p>
+            <a:pPr algn="just" marL="474979" indent="-237490" lvl="1">
+              <a:lnSpc>
+                <a:spcPts val="3079"/>
+              </a:lnSpc>
+              <a:spcBef>
+                <a:spcPct val="0"/>
+              </a:spcBef>
+              <a:buFont typeface="Arial"/>
+              <a:buChar char="•"/>
+            </a:pPr>
+            <a:r>
+              <a:rPr lang="en-US" sz="2199" strike="noStrike" u="none">
+                <a:solidFill>
+                  <a:srgbClr val="0D1D29"/>
+                </a:solidFill>
+                <a:latin typeface="Open Sans 1"/>
+                <a:ea typeface="Open Sans 1"/>
+                <a:cs typeface="Open Sans 1"/>
+                <a:sym typeface="Open Sans 1"/>
+              </a:rPr>
+              <a:t>Caloric Value Calculation: Calculates daily caloric needs.</a:t>
+            </a:r>
+          </a:p>
+          <a:p>
+            <a:pPr algn="just" marL="474979" indent="-237490" lvl="1">
+              <a:lnSpc>
+                <a:spcPts val="3079"/>
+              </a:lnSpc>
+              <a:spcBef>
+                <a:spcPct val="0"/>
+              </a:spcBef>
+              <a:buFont typeface="Arial"/>
+              <a:buChar char="•"/>
+            </a:pPr>
+            <a:r>
+              <a:rPr lang="en-US" sz="2199" strike="noStrike" u="none">
+                <a:solidFill>
+                  <a:srgbClr val="0D1D29"/>
+                </a:solidFill>
+                <a:latin typeface="Open Sans 1"/>
+                <a:ea typeface="Open Sans 1"/>
+                <a:cs typeface="Open Sans 1"/>
+                <a:sym typeface="Open Sans 1"/>
+              </a:rPr>
+              <a:t>Calorie Distribution: Balances macronutrients (protein, carbohydrates, fats).</a:t>
+            </a:r>
+          </a:p>
+          <a:p>
+            <a:pPr algn="just" marL="474979" indent="-237490" lvl="1">
+              <a:lnSpc>
+                <a:spcPts val="3079"/>
+              </a:lnSpc>
+              <a:spcBef>
+                <a:spcPct val="0"/>
+              </a:spcBef>
+              <a:buFont typeface="Arial"/>
+              <a:buChar char="•"/>
+            </a:pPr>
+            <a:r>
+              <a:rPr lang="en-US" sz="2199" strike="noStrike" u="none">
+                <a:solidFill>
+                  <a:srgbClr val="0D1D29"/>
+                </a:solidFill>
+                <a:latin typeface="Open Sans 1"/>
+                <a:ea typeface="Open Sans 1"/>
+                <a:cs typeface="Open Sans 1"/>
+                <a:sym typeface="Open Sans 1"/>
+              </a:rPr>
+              <a:t>Supplement Supplying: Determines required vitamins and minerals.</a:t>
+            </a:r>
+          </a:p>
+          <a:p>
+            <a:pPr algn="just" marL="0" indent="0" lvl="0">
+              <a:lnSpc>
+                <a:spcPts val="3079"/>
+              </a:lnSpc>
+              <a:spcBef>
+                <a:spcPct val="0"/>
+              </a:spcBef>
+            </a:pPr>
+          </a:p>
+        </p:txBody>
+      </p:sp>
+      <p:sp>
+        <p:nvSpPr>
+          <p:cNvPr name="TextBox 17" id="17"/>
+          <p:cNvSpPr txBox="true"/>
+          <p:nvPr/>
+        </p:nvSpPr>
+        <p:spPr>
+          <a:xfrm rot="0">
+            <a:off x="17259300" y="9182100"/>
+            <a:ext cx="152400" cy="228600"/>
+          </a:xfrm>
+          <a:prstGeom prst="rect">
+            <a:avLst/>
+          </a:prstGeom>
+        </p:spPr>
+        <p:txBody>
+          <a:bodyPr anchor="t" rtlCol="false" tIns="0" lIns="0" bIns="0" rIns="0" wrap="none">
+            <a:spAutoFit/>
+          </a:bodyPr>
+          <a:lstStyle/>
+          <a:p>
+            <a:pPr algn="ctr">
+              <a:lnSpc>
+                <a:spcPts val="6160"/>
+              </a:lnSpc>
+              <a:spcBef>
+                <a:spcPct val="0"/>
+              </a:spcBef>
+            </a:pPr>
+            <a:r>
+              <a:rPr lang="en-US" sz="4400">
+                <a:solidFill>
+                  <a:srgbClr val="000000"/>
+                </a:solidFill>
+                <a:latin typeface="Suez One"/>
+                <a:ea typeface="Suez One"/>
+                <a:cs typeface="Suez One"/>
+                <a:sym typeface="Suez One"/>
+              </a:rPr>
+              <a:t>11</a:t>
+            </a:r>
+          </a:p>
+        </p:txBody>
+      </p:sp>
+    </p:spTree>
+  </p:cSld>
+  <p:clrMapOvr>
+    <a:masterClrMapping/>
+  </p:clrMapOvr>
+</p:sld>
+</file>
+
+<file path=ppt/slides/slide12.xml><?xml version="1.0" encoding="utf-8"?>
+<p:sld xmlns:p="http://schemas.openxmlformats.org/presentationml/2006/main" xmlns:a="http://schemas.openxmlformats.org/drawingml/2006/main" xmlns:r="http://schemas.openxmlformats.org/officeDocument/2006/relationships">
+  <p:cSld>
+    <p:spTree>
+      <p:nvGrpSpPr>
+        <p:cNvPr id="1" name=""/>
+        <p:cNvGrpSpPr/>
+        <p:nvPr/>
+      </p:nvGrpSpPr>
+      <p:grpSpPr>
+        <a:xfrm>
+          <a:off x="0" y="0"/>
+          <a:ext cx="0" cy="0"/>
+          <a:chOff x="0" y="0"/>
+          <a:chExt cx="0" cy="0"/>
+        </a:xfrm>
+      </p:grpSpPr>
+      <p:sp>
+        <p:nvSpPr>
+          <p:cNvPr name="TextBox 2" id="2"/>
+          <p:cNvSpPr txBox="true"/>
+          <p:nvPr/>
+        </p:nvSpPr>
+        <p:spPr>
+          <a:xfrm rot="0">
+            <a:off x="-2049514" y="573087"/>
+            <a:ext cx="15315831" cy="949325"/>
+          </a:xfrm>
+          <a:prstGeom prst="rect">
+            <a:avLst/>
+          </a:prstGeom>
+        </p:spPr>
+        <p:txBody>
+          <a:bodyPr anchor="t" rtlCol="false" tIns="0" lIns="0" bIns="0" rIns="0">
+            <a:spAutoFit/>
+          </a:bodyPr>
+          <a:lstStyle/>
+          <a:p>
+            <a:pPr algn="ctr">
+              <a:lnSpc>
+                <a:spcPts val="7150"/>
+              </a:lnSpc>
+            </a:pPr>
+            <a:r>
+              <a:rPr lang="en-US" b="true" sz="6500">
+                <a:solidFill>
+                  <a:srgbClr val="034383"/>
+                </a:solidFill>
+                <a:latin typeface="Ubuntu Bold"/>
+                <a:ea typeface="Ubuntu Bold"/>
+                <a:cs typeface="Ubuntu Bold"/>
+                <a:sym typeface="Ubuntu Bold"/>
+              </a:rPr>
+              <a:t>CHANGING DAILY HABITS</a:t>
+            </a:r>
+          </a:p>
+        </p:txBody>
+      </p:sp>
+      <p:sp>
+        <p:nvSpPr>
+          <p:cNvPr name="Freeform 3" id="3"/>
+          <p:cNvSpPr/>
+          <p:nvPr/>
+        </p:nvSpPr>
+        <p:spPr>
+          <a:xfrm flipH="false" flipV="false" rot="5400000">
+            <a:off x="12090482" y="-626645"/>
+            <a:ext cx="6562966" cy="7473357"/>
+          </a:xfrm>
+          <a:custGeom>
+            <a:avLst/>
+            <a:gdLst/>
+            <a:ahLst/>
+            <a:cxnLst/>
+            <a:rect r="r" b="b" t="t" l="l"/>
+            <a:pathLst>
+              <a:path h="7473357" w="6562966">
+                <a:moveTo>
+                  <a:pt x="0" y="0"/>
+                </a:moveTo>
+                <a:lnTo>
+                  <a:pt x="6562967" y="0"/>
+                </a:lnTo>
+                <a:lnTo>
+                  <a:pt x="6562967" y="7473357"/>
+                </a:lnTo>
+                <a:lnTo>
+                  <a:pt x="0" y="7473357"/>
                 </a:lnTo>
                 <a:lnTo>
                   <a:pt x="0" y="0"/>
@@ -4267,17 +5404,430 @@
               <a:fillRect l="0" t="0" r="0" b="0"/>
             </a:stretch>
           </a:blipFill>
-        </p:spPr>
-      </p:sp>
-      <p:sp>
-        <p:nvSpPr>
-          <p:cNvPr name="Freeform 3" id="3"/>
+          <a:ln cap="sq">
+            <a:noFill/>
+            <a:prstDash val="solid"/>
+            <a:miter/>
+          </a:ln>
+        </p:spPr>
+      </p:sp>
+      <p:sp>
+        <p:nvSpPr>
+          <p:cNvPr name="Freeform 4" id="4"/>
           <p:cNvSpPr/>
           <p:nvPr/>
         </p:nvSpPr>
         <p:spPr>
-          <a:xfrm flipH="true" flipV="true" rot="0">
-            <a:off x="8414170" y="0"/>
+          <a:xfrm flipH="false" flipV="false" rot="0">
+            <a:off x="76200" y="2008531"/>
+            <a:ext cx="11359062" cy="5835718"/>
+          </a:xfrm>
+          <a:custGeom>
+            <a:avLst/>
+            <a:gdLst/>
+            <a:ahLst/>
+            <a:cxnLst/>
+            <a:rect r="r" b="b" t="t" l="l"/>
+            <a:pathLst>
+              <a:path h="5835718" w="11359062">
+                <a:moveTo>
+                  <a:pt x="0" y="0"/>
+                </a:moveTo>
+                <a:lnTo>
+                  <a:pt x="11359062" y="0"/>
+                </a:lnTo>
+                <a:lnTo>
+                  <a:pt x="11359062" y="5835718"/>
+                </a:lnTo>
+                <a:lnTo>
+                  <a:pt x="0" y="5835718"/>
+                </a:lnTo>
+                <a:lnTo>
+                  <a:pt x="0" y="0"/>
+                </a:lnTo>
+                <a:close/>
+              </a:path>
+            </a:pathLst>
+          </a:custGeom>
+          <a:blipFill>
+            <a:blip r:embed="rId4"/>
+            <a:stretch>
+              <a:fillRect l="0" t="0" r="0" b="0"/>
+            </a:stretch>
+          </a:blipFill>
+        </p:spPr>
+      </p:sp>
+      <p:sp>
+        <p:nvSpPr>
+          <p:cNvPr name="TextBox 5" id="5"/>
+          <p:cNvSpPr txBox="true"/>
+          <p:nvPr/>
+        </p:nvSpPr>
+        <p:spPr>
+          <a:xfrm rot="0">
+            <a:off x="10814643" y="2123878"/>
+            <a:ext cx="6444657" cy="1362710"/>
+          </a:xfrm>
+          <a:prstGeom prst="rect">
+            <a:avLst/>
+          </a:prstGeom>
+        </p:spPr>
+        <p:txBody>
+          <a:bodyPr anchor="t" rtlCol="false" tIns="0" lIns="0" bIns="0" rIns="0">
+            <a:spAutoFit/>
+          </a:bodyPr>
+          <a:lstStyle/>
+          <a:p>
+            <a:pPr algn="l" marL="561339" indent="-280669" lvl="1">
+              <a:lnSpc>
+                <a:spcPts val="3639"/>
+              </a:lnSpc>
+              <a:buFont typeface="Arial"/>
+              <a:buChar char="•"/>
+            </a:pPr>
+            <a:r>
+              <a:rPr lang="en-US" sz="2599">
+                <a:solidFill>
+                  <a:srgbClr val="034383"/>
+                </a:solidFill>
+                <a:latin typeface="Open Sans 1"/>
+                <a:ea typeface="Open Sans 1"/>
+                <a:cs typeface="Open Sans 1"/>
+                <a:sym typeface="Open Sans 1"/>
+              </a:rPr>
+              <a:t>Purpose</a:t>
+            </a:r>
+          </a:p>
+          <a:p>
+            <a:pPr algn="l" marL="1122678" indent="-374226" lvl="2">
+              <a:lnSpc>
+                <a:spcPts val="3639"/>
+              </a:lnSpc>
+              <a:buFont typeface="Arial"/>
+              <a:buChar char="⚬"/>
+            </a:pPr>
+            <a:r>
+              <a:rPr lang="en-US" sz="2599">
+                <a:solidFill>
+                  <a:srgbClr val="000000"/>
+                </a:solidFill>
+                <a:latin typeface="Open Sans 1"/>
+                <a:ea typeface="Open Sans 1"/>
+                <a:cs typeface="Open Sans 1"/>
+                <a:sym typeface="Open Sans 1"/>
+              </a:rPr>
+              <a:t>Adjusts daily routines to improve overall health and development.</a:t>
+            </a:r>
+          </a:p>
+        </p:txBody>
+      </p:sp>
+      <p:sp>
+        <p:nvSpPr>
+          <p:cNvPr name="TextBox 6" id="6"/>
+          <p:cNvSpPr txBox="true"/>
+          <p:nvPr/>
+        </p:nvSpPr>
+        <p:spPr>
+          <a:xfrm rot="0">
+            <a:off x="10814643" y="3751580"/>
+            <a:ext cx="6444657" cy="4105910"/>
+          </a:xfrm>
+          <a:prstGeom prst="rect">
+            <a:avLst/>
+          </a:prstGeom>
+        </p:spPr>
+        <p:txBody>
+          <a:bodyPr anchor="t" rtlCol="false" tIns="0" lIns="0" bIns="0" rIns="0">
+            <a:spAutoFit/>
+          </a:bodyPr>
+          <a:lstStyle/>
+          <a:p>
+            <a:pPr algn="l" marL="561339" indent="-280669" lvl="1">
+              <a:lnSpc>
+                <a:spcPts val="3639"/>
+              </a:lnSpc>
+              <a:buFont typeface="Arial"/>
+              <a:buChar char="•"/>
+            </a:pPr>
+            <a:r>
+              <a:rPr lang="en-US" sz="2599">
+                <a:solidFill>
+                  <a:srgbClr val="034383"/>
+                </a:solidFill>
+                <a:latin typeface="Open Sans 1"/>
+                <a:ea typeface="Open Sans 1"/>
+                <a:cs typeface="Open Sans 1"/>
+                <a:sym typeface="Open Sans 1"/>
+              </a:rPr>
+              <a:t>Key Steps</a:t>
+            </a:r>
+          </a:p>
+          <a:p>
+            <a:pPr algn="l" marL="1122678" indent="-374226" lvl="2">
+              <a:lnSpc>
+                <a:spcPts val="3639"/>
+              </a:lnSpc>
+              <a:buFont typeface="Arial"/>
+              <a:buChar char="⚬"/>
+            </a:pPr>
+            <a:r>
+              <a:rPr lang="en-US" sz="2599">
+                <a:solidFill>
+                  <a:srgbClr val="000000"/>
+                </a:solidFill>
+                <a:latin typeface="Open Sans 1"/>
+                <a:ea typeface="Open Sans 1"/>
+                <a:cs typeface="Open Sans 1"/>
+                <a:sym typeface="Open Sans 1"/>
+              </a:rPr>
+              <a:t>Sleep Calculation: Ensures sufficient rest based on age.</a:t>
+            </a:r>
+          </a:p>
+          <a:p>
+            <a:pPr algn="l" marL="1122678" indent="-374226" lvl="2">
+              <a:lnSpc>
+                <a:spcPts val="3639"/>
+              </a:lnSpc>
+              <a:buFont typeface="Arial"/>
+              <a:buChar char="⚬"/>
+            </a:pPr>
+            <a:r>
+              <a:rPr lang="en-US" sz="2599">
+                <a:solidFill>
+                  <a:srgbClr val="000000"/>
+                </a:solidFill>
+                <a:latin typeface="Open Sans 1"/>
+                <a:ea typeface="Open Sans 1"/>
+                <a:cs typeface="Open Sans 1"/>
+                <a:sym typeface="Open Sans 1"/>
+              </a:rPr>
+              <a:t>Physical Activity Planning: Promotes regular and active movement.</a:t>
+            </a:r>
+          </a:p>
+          <a:p>
+            <a:pPr algn="l" marL="1122678" indent="-374226" lvl="2">
+              <a:lnSpc>
+                <a:spcPts val="3639"/>
+              </a:lnSpc>
+              <a:buFont typeface="Arial"/>
+              <a:buChar char="⚬"/>
+            </a:pPr>
+            <a:r>
+              <a:rPr lang="en-US" sz="2599">
+                <a:solidFill>
+                  <a:srgbClr val="000000"/>
+                </a:solidFill>
+                <a:latin typeface="Open Sans 1"/>
+                <a:ea typeface="Open Sans 1"/>
+                <a:cs typeface="Open Sans 1"/>
+                <a:sym typeface="Open Sans 1"/>
+              </a:rPr>
+              <a:t>Hydration Goals: Recommends proper daily water intake.</a:t>
+            </a:r>
+          </a:p>
+          <a:p>
+            <a:pPr algn="l">
+              <a:lnSpc>
+                <a:spcPts val="3639"/>
+              </a:lnSpc>
+            </a:pPr>
+          </a:p>
+        </p:txBody>
+      </p:sp>
+      <p:sp>
+        <p:nvSpPr>
+          <p:cNvPr name="TextBox 7" id="7"/>
+          <p:cNvSpPr txBox="true"/>
+          <p:nvPr/>
+        </p:nvSpPr>
+        <p:spPr>
+          <a:xfrm rot="0">
+            <a:off x="10814643" y="7653749"/>
+            <a:ext cx="6734435" cy="1819910"/>
+          </a:xfrm>
+          <a:prstGeom prst="rect">
+            <a:avLst/>
+          </a:prstGeom>
+        </p:spPr>
+        <p:txBody>
+          <a:bodyPr anchor="t" rtlCol="false" tIns="0" lIns="0" bIns="0" rIns="0">
+            <a:spAutoFit/>
+          </a:bodyPr>
+          <a:lstStyle/>
+          <a:p>
+            <a:pPr algn="l" marL="561339" indent="-280669" lvl="1">
+              <a:lnSpc>
+                <a:spcPts val="3639"/>
+              </a:lnSpc>
+              <a:buFont typeface="Arial"/>
+              <a:buChar char="•"/>
+            </a:pPr>
+            <a:r>
+              <a:rPr lang="en-US" sz="2599">
+                <a:solidFill>
+                  <a:srgbClr val="034383"/>
+                </a:solidFill>
+                <a:latin typeface="Open Sans 1"/>
+                <a:ea typeface="Open Sans 1"/>
+                <a:cs typeface="Open Sans 1"/>
+                <a:sym typeface="Open Sans 1"/>
+              </a:rPr>
+              <a:t>Outcome</a:t>
+            </a:r>
+          </a:p>
+          <a:p>
+            <a:pPr algn="l" marL="1122678" indent="-374226" lvl="2">
+              <a:lnSpc>
+                <a:spcPts val="3639"/>
+              </a:lnSpc>
+              <a:buFont typeface="Arial"/>
+              <a:buChar char="⚬"/>
+            </a:pPr>
+            <a:r>
+              <a:rPr lang="en-US" sz="2599">
+                <a:solidFill>
+                  <a:srgbClr val="000000"/>
+                </a:solidFill>
+                <a:latin typeface="Open Sans 1"/>
+                <a:ea typeface="Open Sans 1"/>
+                <a:cs typeface="Open Sans 1"/>
+                <a:sym typeface="Open Sans 1"/>
+              </a:rPr>
+              <a:t>Incorporates these habits into the treatment protocol for a holistic approach to the child's well-being.</a:t>
+            </a:r>
+          </a:p>
+        </p:txBody>
+      </p:sp>
+      <p:sp>
+        <p:nvSpPr>
+          <p:cNvPr name="Freeform 8" id="8"/>
+          <p:cNvSpPr/>
+          <p:nvPr/>
+        </p:nvSpPr>
+        <p:spPr>
+          <a:xfrm flipH="true" flipV="false" rot="-10800000">
+            <a:off x="-938428" y="5289524"/>
+            <a:ext cx="6157558" cy="6157558"/>
+          </a:xfrm>
+          <a:custGeom>
+            <a:avLst/>
+            <a:gdLst/>
+            <a:ahLst/>
+            <a:cxnLst/>
+            <a:rect r="r" b="b" t="t" l="l"/>
+            <a:pathLst>
+              <a:path h="6157558" w="6157558">
+                <a:moveTo>
+                  <a:pt x="6157558" y="0"/>
+                </a:moveTo>
+                <a:lnTo>
+                  <a:pt x="0" y="0"/>
+                </a:lnTo>
+                <a:lnTo>
+                  <a:pt x="0" y="6157558"/>
+                </a:lnTo>
+                <a:lnTo>
+                  <a:pt x="6157558" y="6157558"/>
+                </a:lnTo>
+                <a:lnTo>
+                  <a:pt x="6157558" y="0"/>
+                </a:lnTo>
+                <a:close/>
+              </a:path>
+            </a:pathLst>
+          </a:custGeom>
+          <a:blipFill>
+            <a:blip r:embed="rId5">
+              <a:extLst>
+                <a:ext uri="{96DAC541-7B7A-43D3-8B79-37D633B846F1}">
+                  <asvg:svgBlip xmlns:asvg="http://schemas.microsoft.com/office/drawing/2016/SVG/main" r:embed="rId6"/>
+                </a:ext>
+              </a:extLst>
+            </a:blip>
+            <a:stretch>
+              <a:fillRect l="0" t="0" r="0" b="0"/>
+            </a:stretch>
+          </a:blipFill>
+        </p:spPr>
+      </p:sp>
+      <p:sp>
+        <p:nvSpPr>
+          <p:cNvPr name="TextBox 9" id="9"/>
+          <p:cNvSpPr txBox="true"/>
+          <p:nvPr/>
+        </p:nvSpPr>
+        <p:spPr>
+          <a:xfrm rot="0">
+            <a:off x="17259300" y="9182100"/>
+            <a:ext cx="152400" cy="228600"/>
+          </a:xfrm>
+          <a:prstGeom prst="rect">
+            <a:avLst/>
+          </a:prstGeom>
+        </p:spPr>
+        <p:txBody>
+          <a:bodyPr anchor="t" rtlCol="false" tIns="0" lIns="0" bIns="0" rIns="0" wrap="none">
+            <a:spAutoFit/>
+          </a:bodyPr>
+          <a:lstStyle/>
+          <a:p>
+            <a:pPr algn="ctr">
+              <a:lnSpc>
+                <a:spcPts val="6160"/>
+              </a:lnSpc>
+              <a:spcBef>
+                <a:spcPct val="0"/>
+              </a:spcBef>
+            </a:pPr>
+            <a:r>
+              <a:rPr lang="en-US" sz="4400">
+                <a:solidFill>
+                  <a:srgbClr val="000000"/>
+                </a:solidFill>
+                <a:latin typeface="Suez One"/>
+                <a:ea typeface="Suez One"/>
+                <a:cs typeface="Suez One"/>
+                <a:sym typeface="Suez One"/>
+              </a:rPr>
+              <a:t>12</a:t>
+            </a:r>
+          </a:p>
+        </p:txBody>
+      </p:sp>
+    </p:spTree>
+  </p:cSld>
+  <p:clrMapOvr>
+    <a:masterClrMapping/>
+  </p:clrMapOvr>
+</p:sld>
+</file>
+
+<file path=ppt/slides/slide13.xml><?xml version="1.0" encoding="utf-8"?>
+<p:sld xmlns:p="http://schemas.openxmlformats.org/presentationml/2006/main" xmlns:a="http://schemas.openxmlformats.org/drawingml/2006/main" xmlns:r="http://schemas.openxmlformats.org/officeDocument/2006/relationships">
+  <p:cSld>
+    <p:spTree>
+      <p:nvGrpSpPr>
+        <p:cNvPr id="1" name=""/>
+        <p:cNvGrpSpPr/>
+        <p:nvPr/>
+      </p:nvGrpSpPr>
+      <p:grpSpPr>
+        <a:xfrm>
+          <a:off x="0" y="0"/>
+          <a:ext cx="0" cy="0"/>
+          <a:chOff x="0" y="0"/>
+          <a:chExt cx="0" cy="0"/>
+        </a:xfrm>
+      </p:grpSpPr>
+      <p:sp>
+        <p:nvSpPr>
+          <p:cNvPr name="Freeform 2" id="2"/>
+          <p:cNvSpPr/>
+          <p:nvPr/>
+        </p:nvSpPr>
+        <p:spPr>
+          <a:xfrm flipH="false" flipV="false" rot="0">
+            <a:off x="0" y="-831070"/>
             <a:ext cx="9873830" cy="11243492"/>
           </a:xfrm>
           <a:custGeom>
@@ -4289,19 +5839,19 @@
             <a:pathLst>
               <a:path h="11243492" w="9873830">
                 <a:moveTo>
+                  <a:pt x="0" y="0"/>
+                </a:moveTo>
+                <a:lnTo>
+                  <a:pt x="9873830" y="0"/>
+                </a:lnTo>
+                <a:lnTo>
                   <a:pt x="9873830" y="11243492"/>
-                </a:moveTo>
+                </a:lnTo>
                 <a:lnTo>
                   <a:pt x="0" y="11243492"/>
                 </a:lnTo>
                 <a:lnTo>
                   <a:pt x="0" y="0"/>
-                </a:lnTo>
-                <a:lnTo>
-                  <a:pt x="9873830" y="0"/>
-                </a:lnTo>
-                <a:lnTo>
-                  <a:pt x="9873830" y="11243492"/>
                 </a:lnTo>
                 <a:close/>
               </a:path>
@@ -4323,6 +5873,58 @@
       </p:sp>
       <p:sp>
         <p:nvSpPr>
+          <p:cNvPr name="Freeform 3" id="3"/>
+          <p:cNvSpPr/>
+          <p:nvPr/>
+        </p:nvSpPr>
+        <p:spPr>
+          <a:xfrm flipH="true" flipV="true" rot="0">
+            <a:off x="8414170" y="0"/>
+            <a:ext cx="9873830" cy="11243492"/>
+          </a:xfrm>
+          <a:custGeom>
+            <a:avLst/>
+            <a:gdLst/>
+            <a:ahLst/>
+            <a:cxnLst/>
+            <a:rect r="r" b="b" t="t" l="l"/>
+            <a:pathLst>
+              <a:path h="11243492" w="9873830">
+                <a:moveTo>
+                  <a:pt x="9873830" y="11243492"/>
+                </a:moveTo>
+                <a:lnTo>
+                  <a:pt x="0" y="11243492"/>
+                </a:lnTo>
+                <a:lnTo>
+                  <a:pt x="0" y="0"/>
+                </a:lnTo>
+                <a:lnTo>
+                  <a:pt x="9873830" y="0"/>
+                </a:lnTo>
+                <a:lnTo>
+                  <a:pt x="9873830" y="11243492"/>
+                </a:lnTo>
+                <a:close/>
+              </a:path>
+            </a:pathLst>
+          </a:custGeom>
+          <a:blipFill>
+            <a:blip r:embed="rId2">
+              <a:extLst>
+                <a:ext uri="{96DAC541-7B7A-43D3-8B79-37D633B846F1}">
+                  <asvg:svgBlip xmlns:asvg="http://schemas.microsoft.com/office/drawing/2016/SVG/main" r:embed="rId3"/>
+                </a:ext>
+              </a:extLst>
+            </a:blip>
+            <a:stretch>
+              <a:fillRect l="0" t="0" r="0" b="0"/>
+            </a:stretch>
+          </a:blipFill>
+        </p:spPr>
+      </p:sp>
+      <p:sp>
+        <p:nvSpPr>
           <p:cNvPr name="TextBox 4" id="4"/>
           <p:cNvSpPr txBox="true"/>
           <p:nvPr/>
@@ -4362,6 +5964,50 @@
           </a:p>
         </p:txBody>
       </p:sp>
+      <p:sp>
+        <p:nvSpPr>
+          <p:cNvPr name="TextBox 5" id="5"/>
+          <p:cNvSpPr txBox="true"/>
+          <p:nvPr/>
+        </p:nvSpPr>
+        <p:spPr>
+          <a:xfrm rot="0">
+            <a:off x="17259300" y="9182100"/>
+            <a:ext cx="152400" cy="228600"/>
+          </a:xfrm>
+          <a:prstGeom prst="rect">
+            <a:avLst/>
+          </a:prstGeom>
+        </p:spPr>
+        <p:txBody>
+          <a:bodyPr anchor="t" rtlCol="false" tIns="0" lIns="0" bIns="0" rIns="0" wrap="none">
+            <a:spAutoFit/>
+          </a:bodyPr>
+          <a:lstStyle/>
+          <a:p>
+            <a:pPr algn="ctr">
+              <a:lnSpc>
+                <a:spcPts val="6160"/>
+              </a:lnSpc>
+              <a:spcBef>
+                <a:spcPct val="0"/>
+              </a:spcBef>
+            </a:pPr>
+            <a:r>
+              <a:rPr lang="en-US" sz="4400">
+                <a:solidFill>
+                  <a:srgbClr val="000000"/>
+                </a:solidFill>
+                <a:latin typeface="Suez One"/>
+                <a:ea typeface="Suez One"/>
+                <a:cs typeface="Suez One"/>
+                <a:sym typeface="Suez One"/>
+              </a:rPr>
+              <a:t>13</a:t>
+            </a:r>
+          </a:p>
+        </p:txBody>
+      </p:sp>
     </p:spTree>
   </p:cSld>
   <p:clrMapOvr>
@@ -4370,7 +6016,7 @@
 </p:sld>
 </file>
 
-<file path=ppt/slides/slide12.xml><?xml version="1.0" encoding="utf-8"?>
+<file path=ppt/slides/slide14.xml><?xml version="1.0" encoding="utf-8"?>
 <p:sld xmlns:p="http://schemas.openxmlformats.org/presentationml/2006/main" xmlns:a="http://schemas.openxmlformats.org/drawingml/2006/main" xmlns:r="http://schemas.openxmlformats.org/officeDocument/2006/relationships">
   <p:cSld>
     <p:spTree>
@@ -4793,6 +6439,50 @@
           </a:blipFill>
         </p:spPr>
       </p:sp>
+      <p:sp>
+        <p:nvSpPr>
+          <p:cNvPr name="TextBox 13" id="13"/>
+          <p:cNvSpPr txBox="true"/>
+          <p:nvPr/>
+        </p:nvSpPr>
+        <p:spPr>
+          <a:xfrm rot="0">
+            <a:off x="17259300" y="9182100"/>
+            <a:ext cx="152400" cy="228600"/>
+          </a:xfrm>
+          <a:prstGeom prst="rect">
+            <a:avLst/>
+          </a:prstGeom>
+        </p:spPr>
+        <p:txBody>
+          <a:bodyPr anchor="t" rtlCol="false" tIns="0" lIns="0" bIns="0" rIns="0" wrap="none">
+            <a:spAutoFit/>
+          </a:bodyPr>
+          <a:lstStyle/>
+          <a:p>
+            <a:pPr algn="ctr">
+              <a:lnSpc>
+                <a:spcPts val="6160"/>
+              </a:lnSpc>
+              <a:spcBef>
+                <a:spcPct val="0"/>
+              </a:spcBef>
+            </a:pPr>
+            <a:r>
+              <a:rPr lang="en-US" sz="4400">
+                <a:solidFill>
+                  <a:srgbClr val="000000"/>
+                </a:solidFill>
+                <a:latin typeface="Suez One"/>
+                <a:ea typeface="Suez One"/>
+                <a:cs typeface="Suez One"/>
+                <a:sym typeface="Suez One"/>
+              </a:rPr>
+              <a:t>14</a:t>
+            </a:r>
+          </a:p>
+        </p:txBody>
+      </p:sp>
     </p:spTree>
   </p:cSld>
   <p:clrMapOvr>
@@ -4801,7 +6491,7 @@
 </p:sld>
 </file>
 
-<file path=ppt/slides/slide13.xml><?xml version="1.0" encoding="utf-8"?>
+<file path=ppt/slides/slide15.xml><?xml version="1.0" encoding="utf-8"?>
 <p:sld xmlns:p="http://schemas.openxmlformats.org/presentationml/2006/main" xmlns:a="http://schemas.openxmlformats.org/drawingml/2006/main" xmlns:r="http://schemas.openxmlformats.org/officeDocument/2006/relationships">
   <p:cSld>
     <p:spTree>
@@ -5338,6 +7028,50 @@
           </a:ln>
         </p:spPr>
       </p:sp>
+      <p:sp>
+        <p:nvSpPr>
+          <p:cNvPr name="TextBox 15" id="15"/>
+          <p:cNvSpPr txBox="true"/>
+          <p:nvPr/>
+        </p:nvSpPr>
+        <p:spPr>
+          <a:xfrm rot="0">
+            <a:off x="17259300" y="9182100"/>
+            <a:ext cx="152400" cy="228600"/>
+          </a:xfrm>
+          <a:prstGeom prst="rect">
+            <a:avLst/>
+          </a:prstGeom>
+        </p:spPr>
+        <p:txBody>
+          <a:bodyPr anchor="t" rtlCol="false" tIns="0" lIns="0" bIns="0" rIns="0" wrap="none">
+            <a:spAutoFit/>
+          </a:bodyPr>
+          <a:lstStyle/>
+          <a:p>
+            <a:pPr algn="ctr">
+              <a:lnSpc>
+                <a:spcPts val="6160"/>
+              </a:lnSpc>
+              <a:spcBef>
+                <a:spcPct val="0"/>
+              </a:spcBef>
+            </a:pPr>
+            <a:r>
+              <a:rPr lang="en-US" sz="4400">
+                <a:solidFill>
+                  <a:srgbClr val="000000"/>
+                </a:solidFill>
+                <a:latin typeface="Suez One"/>
+                <a:ea typeface="Suez One"/>
+                <a:cs typeface="Suez One"/>
+                <a:sym typeface="Suez One"/>
+              </a:rPr>
+              <a:t>15</a:t>
+            </a:r>
+          </a:p>
+        </p:txBody>
+      </p:sp>
     </p:spTree>
   </p:cSld>
   <p:clrMapOvr>
@@ -5346,7 +7080,7 @@
 </p:sld>
 </file>
 
-<file path=ppt/slides/slide14.xml><?xml version="1.0" encoding="utf-8"?>
+<file path=ppt/slides/slide16.xml><?xml version="1.0" encoding="utf-8"?>
 <p:sld xmlns:p="http://schemas.openxmlformats.org/presentationml/2006/main" xmlns:a="http://schemas.openxmlformats.org/drawingml/2006/main" xmlns:r="http://schemas.openxmlformats.org/officeDocument/2006/relationships">
   <p:cSld>
     <p:spTree>
@@ -5813,6 +7547,50 @@
           </a:p>
         </p:txBody>
       </p:sp>
+      <p:sp>
+        <p:nvSpPr>
+          <p:cNvPr name="TextBox 14" id="14"/>
+          <p:cNvSpPr txBox="true"/>
+          <p:nvPr/>
+        </p:nvSpPr>
+        <p:spPr>
+          <a:xfrm rot="0">
+            <a:off x="17259300" y="9182100"/>
+            <a:ext cx="152400" cy="228600"/>
+          </a:xfrm>
+          <a:prstGeom prst="rect">
+            <a:avLst/>
+          </a:prstGeom>
+        </p:spPr>
+        <p:txBody>
+          <a:bodyPr anchor="t" rtlCol="false" tIns="0" lIns="0" bIns="0" rIns="0" wrap="none">
+            <a:spAutoFit/>
+          </a:bodyPr>
+          <a:lstStyle/>
+          <a:p>
+            <a:pPr algn="ctr">
+              <a:lnSpc>
+                <a:spcPts val="6160"/>
+              </a:lnSpc>
+              <a:spcBef>
+                <a:spcPct val="0"/>
+              </a:spcBef>
+            </a:pPr>
+            <a:r>
+              <a:rPr lang="en-US" sz="4400">
+                <a:solidFill>
+                  <a:srgbClr val="000000"/>
+                </a:solidFill>
+                <a:latin typeface="Suez One"/>
+                <a:ea typeface="Suez One"/>
+                <a:cs typeface="Suez One"/>
+                <a:sym typeface="Suez One"/>
+              </a:rPr>
+              <a:t>16</a:t>
+            </a:r>
+          </a:p>
+        </p:txBody>
+      </p:sp>
     </p:spTree>
   </p:cSld>
   <p:clrMapOvr>
@@ -5821,7 +7599,7 @@
 </p:sld>
 </file>
 
-<file path=ppt/slides/slide15.xml><?xml version="1.0" encoding="utf-8"?>
+<file path=ppt/slides/slide17.xml><?xml version="1.0" encoding="utf-8"?>
 <p:sld xmlns:p="http://schemas.openxmlformats.org/presentationml/2006/main" xmlns:a="http://schemas.openxmlformats.org/drawingml/2006/main" xmlns:r="http://schemas.openxmlformats.org/officeDocument/2006/relationships">
   <p:cSld>
     <p:spTree>
@@ -6299,6 +8077,50 @@
           </p:txBody>
         </p:sp>
       </p:grpSp>
+      <p:sp>
+        <p:nvSpPr>
+          <p:cNvPr name="TextBox 11" id="11"/>
+          <p:cNvSpPr txBox="true"/>
+          <p:nvPr/>
+        </p:nvSpPr>
+        <p:spPr>
+          <a:xfrm rot="0">
+            <a:off x="17259300" y="9182100"/>
+            <a:ext cx="152400" cy="228600"/>
+          </a:xfrm>
+          <a:prstGeom prst="rect">
+            <a:avLst/>
+          </a:prstGeom>
+        </p:spPr>
+        <p:txBody>
+          <a:bodyPr anchor="t" rtlCol="false" tIns="0" lIns="0" bIns="0" rIns="0" wrap="none">
+            <a:spAutoFit/>
+          </a:bodyPr>
+          <a:lstStyle/>
+          <a:p>
+            <a:pPr algn="ctr">
+              <a:lnSpc>
+                <a:spcPts val="6160"/>
+              </a:lnSpc>
+              <a:spcBef>
+                <a:spcPct val="0"/>
+              </a:spcBef>
+            </a:pPr>
+            <a:r>
+              <a:rPr lang="en-US" sz="4400">
+                <a:solidFill>
+                  <a:srgbClr val="000000"/>
+                </a:solidFill>
+                <a:latin typeface="Suez One"/>
+                <a:ea typeface="Suez One"/>
+                <a:cs typeface="Suez One"/>
+                <a:sym typeface="Suez One"/>
+              </a:rPr>
+              <a:t>17</a:t>
+            </a:r>
+          </a:p>
+        </p:txBody>
+      </p:sp>
     </p:spTree>
   </p:cSld>
   <p:clrMapOvr>
@@ -6307,7 +8129,7 @@
 </p:sld>
 </file>
 
-<file path=ppt/slides/slide16.xml><?xml version="1.0" encoding="utf-8"?>
+<file path=ppt/slides/slide18.xml><?xml version="1.0" encoding="utf-8"?>
 <p:sld xmlns:p="http://schemas.openxmlformats.org/presentationml/2006/main" xmlns:a="http://schemas.openxmlformats.org/drawingml/2006/main" xmlns:r="http://schemas.openxmlformats.org/officeDocument/2006/relationships">
   <p:cSld>
     <p:spTree>
@@ -6798,6 +8620,50 @@
           </p:txBody>
         </p:sp>
       </p:grpSp>
+      <p:sp>
+        <p:nvSpPr>
+          <p:cNvPr name="TextBox 11" id="11"/>
+          <p:cNvSpPr txBox="true"/>
+          <p:nvPr/>
+        </p:nvSpPr>
+        <p:spPr>
+          <a:xfrm rot="0">
+            <a:off x="17259300" y="9182100"/>
+            <a:ext cx="152400" cy="228600"/>
+          </a:xfrm>
+          <a:prstGeom prst="rect">
+            <a:avLst/>
+          </a:prstGeom>
+        </p:spPr>
+        <p:txBody>
+          <a:bodyPr anchor="t" rtlCol="false" tIns="0" lIns="0" bIns="0" rIns="0" wrap="none">
+            <a:spAutoFit/>
+          </a:bodyPr>
+          <a:lstStyle/>
+          <a:p>
+            <a:pPr algn="ctr">
+              <a:lnSpc>
+                <a:spcPts val="6160"/>
+              </a:lnSpc>
+              <a:spcBef>
+                <a:spcPct val="0"/>
+              </a:spcBef>
+            </a:pPr>
+            <a:r>
+              <a:rPr lang="en-US" sz="4400">
+                <a:solidFill>
+                  <a:srgbClr val="000000"/>
+                </a:solidFill>
+                <a:latin typeface="Suez One"/>
+                <a:ea typeface="Suez One"/>
+                <a:cs typeface="Suez One"/>
+                <a:sym typeface="Suez One"/>
+              </a:rPr>
+              <a:t>18</a:t>
+            </a:r>
+          </a:p>
+        </p:txBody>
+      </p:sp>
     </p:spTree>
   </p:cSld>
   <p:clrMapOvr>
@@ -6806,7 +8672,7 @@
 </p:sld>
 </file>
 
-<file path=ppt/slides/slide17.xml><?xml version="1.0" encoding="utf-8"?>
+<file path=ppt/slides/slide19.xml><?xml version="1.0" encoding="utf-8"?>
 <p:sld xmlns:p="http://schemas.openxmlformats.org/presentationml/2006/main" xmlns:a="http://schemas.openxmlformats.org/drawingml/2006/main" xmlns:r="http://schemas.openxmlformats.org/officeDocument/2006/relationships">
   <p:cSld>
     <p:spTree>
@@ -6968,6 +8834,50 @@
           </a:p>
         </p:txBody>
       </p:sp>
+      <p:sp>
+        <p:nvSpPr>
+          <p:cNvPr name="TextBox 5" id="5"/>
+          <p:cNvSpPr txBox="true"/>
+          <p:nvPr/>
+        </p:nvSpPr>
+        <p:spPr>
+          <a:xfrm rot="0">
+            <a:off x="17259300" y="9182100"/>
+            <a:ext cx="152400" cy="228600"/>
+          </a:xfrm>
+          <a:prstGeom prst="rect">
+            <a:avLst/>
+          </a:prstGeom>
+        </p:spPr>
+        <p:txBody>
+          <a:bodyPr anchor="t" rtlCol="false" tIns="0" lIns="0" bIns="0" rIns="0" wrap="none">
+            <a:spAutoFit/>
+          </a:bodyPr>
+          <a:lstStyle/>
+          <a:p>
+            <a:pPr algn="ctr">
+              <a:lnSpc>
+                <a:spcPts val="6160"/>
+              </a:lnSpc>
+              <a:spcBef>
+                <a:spcPct val="0"/>
+              </a:spcBef>
+            </a:pPr>
+            <a:r>
+              <a:rPr lang="en-US" sz="4400">
+                <a:solidFill>
+                  <a:srgbClr val="000000"/>
+                </a:solidFill>
+                <a:latin typeface="Suez One"/>
+                <a:ea typeface="Suez One"/>
+                <a:cs typeface="Suez One"/>
+                <a:sym typeface="Suez One"/>
+              </a:rPr>
+              <a:t>19</a:t>
+            </a:r>
+          </a:p>
+        </p:txBody>
+      </p:sp>
     </p:spTree>
   </p:cSld>
   <p:clrMapOvr>
@@ -6976,7 +8886,7 @@
 </p:sld>
 </file>
 
-<file path=ppt/slides/slide18.xml><?xml version="1.0" encoding="utf-8"?>
+<file path=ppt/slides/slide2.xml><?xml version="1.0" encoding="utf-8"?>
 <p:sld xmlns:p="http://schemas.openxmlformats.org/presentationml/2006/main" xmlns:a="http://schemas.openxmlformats.org/drawingml/2006/main" xmlns:r="http://schemas.openxmlformats.org/officeDocument/2006/relationships">
   <p:cSld>
     <p:spTree>
@@ -7443,8 +9353,8 @@
         </p:nvSpPr>
         <p:spPr>
           <a:xfrm flipH="false" flipV="false" rot="0">
-            <a:off x="1209665" y="3391431"/>
-            <a:ext cx="7934335" cy="4142415"/>
+            <a:off x="14360886" y="3957913"/>
+            <a:ext cx="2704966" cy="3224997"/>
           </a:xfrm>
           <a:custGeom>
             <a:avLst/>
@@ -7453,18 +9363,18 @@
             <a:cxnLst/>
             <a:rect r="r" b="b" t="t" l="l"/>
             <a:pathLst>
-              <a:path h="4142415" w="7934335">
+              <a:path h="3224997" w="2704966">
                 <a:moveTo>
                   <a:pt x="0" y="0"/>
                 </a:moveTo>
                 <a:lnTo>
-                  <a:pt x="7934335" y="0"/>
-                </a:lnTo>
-                <a:lnTo>
-                  <a:pt x="7934335" y="4142414"/>
-                </a:lnTo>
-                <a:lnTo>
-                  <a:pt x="0" y="4142414"/>
+                  <a:pt x="2704966" y="0"/>
+                </a:lnTo>
+                <a:lnTo>
+                  <a:pt x="2704966" y="3224996"/>
+                </a:lnTo>
+                <a:lnTo>
+                  <a:pt x="0" y="3224996"/>
                 </a:lnTo>
                 <a:lnTo>
                   <a:pt x="0" y="0"/>
@@ -7476,52 +9386,6 @@
           <a:blipFill>
             <a:blip r:embed="rId4"/>
             <a:stretch>
-              <a:fillRect l="0" t="0" r="0" b="-10374"/>
-            </a:stretch>
-          </a:blipFill>
-        </p:spPr>
-      </p:sp>
-      <p:sp>
-        <p:nvSpPr>
-          <p:cNvPr name="Freeform 17" id="17"/>
-          <p:cNvSpPr/>
-          <p:nvPr/>
-        </p:nvSpPr>
-        <p:spPr>
-          <a:xfrm flipH="false" flipV="false" rot="0">
-            <a:off x="9388613" y="3464668"/>
-            <a:ext cx="7623751" cy="4069177"/>
-          </a:xfrm>
-          <a:custGeom>
-            <a:avLst/>
-            <a:gdLst/>
-            <a:ahLst/>
-            <a:cxnLst/>
-            <a:rect r="r" b="b" t="t" l="l"/>
-            <a:pathLst>
-              <a:path h="4069177" w="7623751">
-                <a:moveTo>
-                  <a:pt x="0" y="0"/>
-                </a:moveTo>
-                <a:lnTo>
-                  <a:pt x="7623751" y="0"/>
-                </a:lnTo>
-                <a:lnTo>
-                  <a:pt x="7623751" y="4069177"/>
-                </a:lnTo>
-                <a:lnTo>
-                  <a:pt x="0" y="4069177"/>
-                </a:lnTo>
-                <a:lnTo>
-                  <a:pt x="0" y="0"/>
-                </a:lnTo>
-                <a:close/>
-              </a:path>
-            </a:pathLst>
-          </a:custGeom>
-          <a:blipFill>
-            <a:blip r:embed="rId5"/>
-            <a:stretch>
               <a:fillRect l="0" t="0" r="0" b="0"/>
             </a:stretch>
           </a:blipFill>
@@ -7529,14 +9393,14 @@
       </p:sp>
       <p:sp>
         <p:nvSpPr>
-          <p:cNvPr name="TextBox 18" id="18"/>
+          <p:cNvPr name="TextBox 17" id="17"/>
           <p:cNvSpPr txBox="true"/>
           <p:nvPr/>
         </p:nvSpPr>
         <p:spPr>
           <a:xfrm rot="0">
-            <a:off x="1943469" y="1575329"/>
-            <a:ext cx="15315831" cy="949325"/>
+            <a:off x="2448600" y="1585240"/>
+            <a:ext cx="7035864" cy="949325"/>
           </a:xfrm>
           <a:prstGeom prst="rect">
             <a:avLst/>
@@ -7548,13 +9412,13 @@
           </a:bodyPr>
           <a:lstStyle/>
           <a:p>
-            <a:pPr algn="ctr">
+            <a:pPr algn="l">
               <a:lnSpc>
                 <a:spcPts val="7150"/>
               </a:lnSpc>
             </a:pPr>
             <a:r>
-              <a:rPr lang="en-US" b="true" sz="6500">
+              <a:rPr lang="en-US" sz="6500" b="true">
                 <a:solidFill>
                   <a:srgbClr val="034383"/>
                 </a:solidFill>
@@ -7563,7 +9427,150 @@
                 <a:cs typeface="Ubuntu Bold"/>
                 <a:sym typeface="Ubuntu Bold"/>
               </a:rPr>
-              <a:t>LOGIN &amp; CHILD SELECTION</a:t>
+              <a:t>INTRODUCTION</a:t>
+            </a:r>
+          </a:p>
+        </p:txBody>
+      </p:sp>
+      <p:sp>
+        <p:nvSpPr>
+          <p:cNvPr name="TextBox 18" id="18"/>
+          <p:cNvSpPr txBox="true"/>
+          <p:nvPr/>
+        </p:nvSpPr>
+        <p:spPr>
+          <a:xfrm rot="0">
+            <a:off x="2019102" y="3080265"/>
+            <a:ext cx="13444539" cy="4562973"/>
+          </a:xfrm>
+          <a:prstGeom prst="rect">
+            <a:avLst/>
+          </a:prstGeom>
+        </p:spPr>
+        <p:txBody>
+          <a:bodyPr anchor="t" rtlCol="false" tIns="0" lIns="0" bIns="0" rIns="0">
+            <a:spAutoFit/>
+          </a:bodyPr>
+          <a:lstStyle/>
+          <a:p>
+            <a:pPr algn="l" marL="562506" indent="-281253" lvl="1">
+              <a:lnSpc>
+                <a:spcPts val="3647"/>
+              </a:lnSpc>
+              <a:buFont typeface="Arial"/>
+              <a:buChar char="•"/>
+            </a:pPr>
+            <a:r>
+              <a:rPr lang="en-US" sz="2605">
+                <a:solidFill>
+                  <a:srgbClr val="0D1D29"/>
+                </a:solidFill>
+                <a:latin typeface="Open Sans 1"/>
+                <a:ea typeface="Open Sans 1"/>
+                <a:cs typeface="Open Sans 1"/>
+                <a:sym typeface="Open Sans 1"/>
+              </a:rPr>
+              <a:t>Failure to Thrive (FTT) is a pediatric health issue affecting growth and development, requiring multifaceted care. Current solutions often lack integration, creating challenges for families and professionals.</a:t>
+            </a:r>
+          </a:p>
+          <a:p>
+            <a:pPr algn="l">
+              <a:lnSpc>
+                <a:spcPts val="3647"/>
+              </a:lnSpc>
+            </a:pPr>
+          </a:p>
+          <a:p>
+            <a:pPr algn="l" marL="562506" indent="-281253" lvl="1">
+              <a:lnSpc>
+                <a:spcPts val="3647"/>
+              </a:lnSpc>
+              <a:buFont typeface="Arial"/>
+              <a:buChar char="•"/>
+            </a:pPr>
+            <a:r>
+              <a:rPr lang="en-US" sz="2605">
+                <a:solidFill>
+                  <a:srgbClr val="0D1D29"/>
+                </a:solidFill>
+                <a:latin typeface="Open Sans 1"/>
+                <a:ea typeface="Open Sans 1"/>
+                <a:cs typeface="Open Sans 1"/>
+                <a:sym typeface="Open Sans 1"/>
+              </a:rPr>
+              <a:t>We propose a website that analyzes diagnostic data to provide personalized recommendations like meal plans and supplements, bridging gaps between diagnosis and care.</a:t>
+            </a:r>
+          </a:p>
+          <a:p>
+            <a:pPr algn="l">
+              <a:lnSpc>
+                <a:spcPts val="3647"/>
+              </a:lnSpc>
+            </a:pPr>
+          </a:p>
+          <a:p>
+            <a:pPr algn="l" marL="562506" indent="-281253" lvl="1">
+              <a:lnSpc>
+                <a:spcPts val="3647"/>
+              </a:lnSpc>
+              <a:buFont typeface="Arial"/>
+              <a:buChar char="•"/>
+            </a:pPr>
+            <a:r>
+              <a:rPr lang="en-US" sz="2605">
+                <a:solidFill>
+                  <a:srgbClr val="0D1D29"/>
+                </a:solidFill>
+                <a:latin typeface="Open Sans 1"/>
+                <a:ea typeface="Open Sans 1"/>
+                <a:cs typeface="Open Sans 1"/>
+                <a:sym typeface="Open Sans 1"/>
+              </a:rPr>
+              <a:t>Parents, caregivers, and professionals gain actionable insights, while children with FTT receive timely, tailored support for improved outcomes.</a:t>
+            </a:r>
+          </a:p>
+        </p:txBody>
+      </p:sp>
+      <p:sp>
+        <p:nvSpPr>
+          <p:cNvPr name="TextBox 19" id="19"/>
+          <p:cNvSpPr txBox="true"/>
+          <p:nvPr/>
+        </p:nvSpPr>
+        <p:spPr>
+          <a:xfrm rot="0">
+            <a:off x="17259300" y="9182100"/>
+            <a:ext cx="152400" cy="228600"/>
+          </a:xfrm>
+          <a:prstGeom prst="rect">
+            <a:avLst/>
+          </a:prstGeom>
+        </p:spPr>
+        <p:txBody>
+          <a:bodyPr anchor="t" rtlCol="false" tIns="0" lIns="0" bIns="0" rIns="0" wrap="none">
+            <a:spAutoFit/>
+          </a:bodyPr>
+          <a:lstStyle/>
+          <a:p>
+            <a:pPr algn="ctr">
+              <a:lnSpc>
+                <a:spcPts val="6160"/>
+              </a:lnSpc>
+              <a:spcBef>
+                <a:spcPct val="0"/>
+              </a:spcBef>
+            </a:pPr>
+            <a:r>
+              <a:rPr lang="en-US" sz="4400">
+                <a:solidFill>
+                  <a:srgbClr val="000000"/>
+                </a:solidFill>
+                <a:latin typeface="Suez One"/>
+                <a:ea typeface="Suez One"/>
+                <a:cs typeface="Suez One"/>
+                <a:sym typeface="Suez One"/>
+              </a:rPr>
+              <a:t>2</a:t>
             </a:r>
           </a:p>
         </p:txBody>
@@ -7576,7 +9583,7 @@
 </p:sld>
 </file>
 
-<file path=ppt/slides/slide19.xml><?xml version="1.0" encoding="utf-8"?>
+<file path=ppt/slides/slide20.xml><?xml version="1.0" encoding="utf-8"?>
 <p:sld xmlns:p="http://schemas.openxmlformats.org/presentationml/2006/main" xmlns:a="http://schemas.openxmlformats.org/drawingml/2006/main" xmlns:r="http://schemas.openxmlformats.org/officeDocument/2006/relationships">
   <p:cSld>
     <p:spTree>
@@ -8043,8 +10050,8 @@
         </p:nvSpPr>
         <p:spPr>
           <a:xfrm flipH="false" flipV="false" rot="0">
-            <a:off x="1028700" y="3272780"/>
-            <a:ext cx="7779361" cy="4225301"/>
+            <a:off x="1209665" y="3391431"/>
+            <a:ext cx="7934335" cy="4142415"/>
           </a:xfrm>
           <a:custGeom>
             <a:avLst/>
@@ -8053,18 +10060,18 @@
             <a:cxnLst/>
             <a:rect r="r" b="b" t="t" l="l"/>
             <a:pathLst>
-              <a:path h="4225301" w="7779361">
+              <a:path h="4142415" w="7934335">
                 <a:moveTo>
                   <a:pt x="0" y="0"/>
                 </a:moveTo>
                 <a:lnTo>
-                  <a:pt x="7779361" y="0"/>
-                </a:lnTo>
-                <a:lnTo>
-                  <a:pt x="7779361" y="4225301"/>
-                </a:lnTo>
-                <a:lnTo>
-                  <a:pt x="0" y="4225301"/>
+                  <a:pt x="7934335" y="0"/>
+                </a:lnTo>
+                <a:lnTo>
+                  <a:pt x="7934335" y="4142414"/>
+                </a:lnTo>
+                <a:lnTo>
+                  <a:pt x="0" y="4142414"/>
                 </a:lnTo>
                 <a:lnTo>
                   <a:pt x="0" y="0"/>
@@ -8076,7 +10083,7 @@
           <a:blipFill>
             <a:blip r:embed="rId4"/>
             <a:stretch>
-              <a:fillRect l="0" t="0" r="-1759" b="0"/>
+              <a:fillRect l="0" t="0" r="0" b="-10374"/>
             </a:stretch>
           </a:blipFill>
         </p:spPr>
@@ -8089,8 +10096,8 @@
         </p:nvSpPr>
         <p:spPr>
           <a:xfrm flipH="false" flipV="false" rot="0">
-            <a:off x="9144000" y="3097107"/>
-            <a:ext cx="7880299" cy="4301519"/>
+            <a:off x="9388613" y="3464668"/>
+            <a:ext cx="7623751" cy="4069177"/>
           </a:xfrm>
           <a:custGeom>
             <a:avLst/>
@@ -8099,18 +10106,18 @@
             <a:cxnLst/>
             <a:rect r="r" b="b" t="t" l="l"/>
             <a:pathLst>
-              <a:path h="4301519" w="7880299">
+              <a:path h="4069177" w="7623751">
                 <a:moveTo>
                   <a:pt x="0" y="0"/>
                 </a:moveTo>
                 <a:lnTo>
-                  <a:pt x="7880299" y="0"/>
-                </a:lnTo>
-                <a:lnTo>
-                  <a:pt x="7880299" y="4301518"/>
-                </a:lnTo>
-                <a:lnTo>
-                  <a:pt x="0" y="4301518"/>
+                  <a:pt x="7623751" y="0"/>
+                </a:lnTo>
+                <a:lnTo>
+                  <a:pt x="7623751" y="4069177"/>
+                </a:lnTo>
+                <a:lnTo>
+                  <a:pt x="0" y="4069177"/>
                 </a:lnTo>
                 <a:lnTo>
                   <a:pt x="0" y="0"/>
@@ -8122,7 +10129,7 @@
           <a:blipFill>
             <a:blip r:embed="rId5"/>
             <a:stretch>
-              <a:fillRect l="0" t="0" r="-2268" b="0"/>
+              <a:fillRect l="0" t="0" r="0" b="0"/>
             </a:stretch>
           </a:blipFill>
         </p:spPr>
@@ -8163,7 +10170,51 @@
                 <a:cs typeface="Ubuntu Bold"/>
                 <a:sym typeface="Ubuntu Bold"/>
               </a:rPr>
-              <a:t>ADD NEW CHILD </a:t>
+              <a:t>LOGIN &amp; CHILD SELECTION</a:t>
+            </a:r>
+          </a:p>
+        </p:txBody>
+      </p:sp>
+      <p:sp>
+        <p:nvSpPr>
+          <p:cNvPr name="TextBox 19" id="19"/>
+          <p:cNvSpPr txBox="true"/>
+          <p:nvPr/>
+        </p:nvSpPr>
+        <p:spPr>
+          <a:xfrm rot="0">
+            <a:off x="17259300" y="9182100"/>
+            <a:ext cx="152400" cy="228600"/>
+          </a:xfrm>
+          <a:prstGeom prst="rect">
+            <a:avLst/>
+          </a:prstGeom>
+        </p:spPr>
+        <p:txBody>
+          <a:bodyPr anchor="t" rtlCol="false" tIns="0" lIns="0" bIns="0" rIns="0" wrap="none">
+            <a:spAutoFit/>
+          </a:bodyPr>
+          <a:lstStyle/>
+          <a:p>
+            <a:pPr algn="ctr">
+              <a:lnSpc>
+                <a:spcPts val="6160"/>
+              </a:lnSpc>
+              <a:spcBef>
+                <a:spcPct val="0"/>
+              </a:spcBef>
+            </a:pPr>
+            <a:r>
+              <a:rPr lang="en-US" sz="4400">
+                <a:solidFill>
+                  <a:srgbClr val="000000"/>
+                </a:solidFill>
+                <a:latin typeface="Suez One"/>
+                <a:ea typeface="Suez One"/>
+                <a:cs typeface="Suez One"/>
+                <a:sym typeface="Suez One"/>
+              </a:rPr>
+              <a:t>20</a:t>
             </a:r>
           </a:p>
         </p:txBody>
@@ -8176,7 +10227,7 @@
 </p:sld>
 </file>
 
-<file path=ppt/slides/slide2.xml><?xml version="1.0" encoding="utf-8"?>
+<file path=ppt/slides/slide21.xml><?xml version="1.0" encoding="utf-8"?>
 <p:sld xmlns:p="http://schemas.openxmlformats.org/presentationml/2006/main" xmlns:a="http://schemas.openxmlformats.org/drawingml/2006/main" xmlns:r="http://schemas.openxmlformats.org/officeDocument/2006/relationships">
   <p:cSld>
     <p:spTree>
@@ -8643,8 +10694,8 @@
         </p:nvSpPr>
         <p:spPr>
           <a:xfrm flipH="false" flipV="false" rot="0">
-            <a:off x="14360886" y="3957913"/>
-            <a:ext cx="2704966" cy="3224997"/>
+            <a:off x="1028700" y="3272780"/>
+            <a:ext cx="7779361" cy="4225301"/>
           </a:xfrm>
           <a:custGeom>
             <a:avLst/>
@@ -8653,18 +10704,18 @@
             <a:cxnLst/>
             <a:rect r="r" b="b" t="t" l="l"/>
             <a:pathLst>
-              <a:path h="3224997" w="2704966">
+              <a:path h="4225301" w="7779361">
                 <a:moveTo>
                   <a:pt x="0" y="0"/>
                 </a:moveTo>
                 <a:lnTo>
-                  <a:pt x="2704966" y="0"/>
-                </a:lnTo>
-                <a:lnTo>
-                  <a:pt x="2704966" y="3224996"/>
-                </a:lnTo>
-                <a:lnTo>
-                  <a:pt x="0" y="3224996"/>
+                  <a:pt x="7779361" y="0"/>
+                </a:lnTo>
+                <a:lnTo>
+                  <a:pt x="7779361" y="4225301"/>
+                </a:lnTo>
+                <a:lnTo>
+                  <a:pt x="0" y="4225301"/>
                 </a:lnTo>
                 <a:lnTo>
                   <a:pt x="0" y="0"/>
@@ -8676,21 +10727,67 @@
           <a:blipFill>
             <a:blip r:embed="rId4"/>
             <a:stretch>
-              <a:fillRect l="0" t="0" r="0" b="0"/>
+              <a:fillRect l="0" t="0" r="-1759" b="0"/>
             </a:stretch>
           </a:blipFill>
         </p:spPr>
       </p:sp>
       <p:sp>
         <p:nvSpPr>
-          <p:cNvPr name="TextBox 17" id="17"/>
+          <p:cNvPr name="Freeform 17" id="17"/>
+          <p:cNvSpPr/>
+          <p:nvPr/>
+        </p:nvSpPr>
+        <p:spPr>
+          <a:xfrm flipH="false" flipV="false" rot="0">
+            <a:off x="9144000" y="3097107"/>
+            <a:ext cx="7880299" cy="4301519"/>
+          </a:xfrm>
+          <a:custGeom>
+            <a:avLst/>
+            <a:gdLst/>
+            <a:ahLst/>
+            <a:cxnLst/>
+            <a:rect r="r" b="b" t="t" l="l"/>
+            <a:pathLst>
+              <a:path h="4301519" w="7880299">
+                <a:moveTo>
+                  <a:pt x="0" y="0"/>
+                </a:moveTo>
+                <a:lnTo>
+                  <a:pt x="7880299" y="0"/>
+                </a:lnTo>
+                <a:lnTo>
+                  <a:pt x="7880299" y="4301518"/>
+                </a:lnTo>
+                <a:lnTo>
+                  <a:pt x="0" y="4301518"/>
+                </a:lnTo>
+                <a:lnTo>
+                  <a:pt x="0" y="0"/>
+                </a:lnTo>
+                <a:close/>
+              </a:path>
+            </a:pathLst>
+          </a:custGeom>
+          <a:blipFill>
+            <a:blip r:embed="rId5"/>
+            <a:stretch>
+              <a:fillRect l="0" t="0" r="-2268" b="0"/>
+            </a:stretch>
+          </a:blipFill>
+        </p:spPr>
+      </p:sp>
+      <p:sp>
+        <p:nvSpPr>
+          <p:cNvPr name="TextBox 18" id="18"/>
           <p:cNvSpPr txBox="true"/>
           <p:nvPr/>
         </p:nvSpPr>
         <p:spPr>
           <a:xfrm rot="0">
-            <a:off x="2448600" y="1585240"/>
-            <a:ext cx="7035864" cy="949325"/>
+            <a:off x="1943469" y="1575329"/>
+            <a:ext cx="15315831" cy="949325"/>
           </a:xfrm>
           <a:prstGeom prst="rect">
             <a:avLst/>
@@ -8702,13 +10799,13 @@
           </a:bodyPr>
           <a:lstStyle/>
           <a:p>
-            <a:pPr algn="l">
+            <a:pPr algn="ctr">
               <a:lnSpc>
                 <a:spcPts val="7150"/>
               </a:lnSpc>
             </a:pPr>
             <a:r>
-              <a:rPr lang="en-US" sz="6500" b="true">
+              <a:rPr lang="en-US" b="true" sz="6500">
                 <a:solidFill>
                   <a:srgbClr val="034383"/>
                 </a:solidFill>
@@ -8717,106 +10814,51 @@
                 <a:cs typeface="Ubuntu Bold"/>
                 <a:sym typeface="Ubuntu Bold"/>
               </a:rPr>
-              <a:t>INTRODUCTION</a:t>
+              <a:t>ADD NEW CHILD </a:t>
             </a:r>
           </a:p>
         </p:txBody>
       </p:sp>
       <p:sp>
         <p:nvSpPr>
-          <p:cNvPr name="TextBox 18" id="18"/>
+          <p:cNvPr name="TextBox 19" id="19"/>
           <p:cNvSpPr txBox="true"/>
           <p:nvPr/>
         </p:nvSpPr>
         <p:spPr>
           <a:xfrm rot="0">
-            <a:off x="2019102" y="3080265"/>
-            <a:ext cx="13444539" cy="4562973"/>
+            <a:off x="17259300" y="9182100"/>
+            <a:ext cx="152400" cy="228600"/>
           </a:xfrm>
           <a:prstGeom prst="rect">
             <a:avLst/>
           </a:prstGeom>
         </p:spPr>
         <p:txBody>
-          <a:bodyPr anchor="t" rtlCol="false" tIns="0" lIns="0" bIns="0" rIns="0">
+          <a:bodyPr anchor="t" rtlCol="false" tIns="0" lIns="0" bIns="0" rIns="0" wrap="none">
             <a:spAutoFit/>
           </a:bodyPr>
           <a:lstStyle/>
           <a:p>
-            <a:pPr algn="l" marL="562506" indent="-281253" lvl="1">
+            <a:pPr algn="ctr">
               <a:lnSpc>
-                <a:spcPts val="3647"/>
+                <a:spcPts val="6160"/>
               </a:lnSpc>
-              <a:buFont typeface="Arial"/>
-              <a:buChar char="•"/>
+              <a:spcBef>
+                <a:spcPct val="0"/>
+              </a:spcBef>
             </a:pPr>
             <a:r>
-              <a:rPr lang="en-US" sz="2605">
+              <a:rPr lang="en-US" sz="4400">
                 <a:solidFill>
-                  <a:srgbClr val="0D1D29"/>
+                  <a:srgbClr val="000000"/>
                 </a:solidFill>
-                <a:latin typeface="Open Sans 1"/>
-                <a:ea typeface="Open Sans 1"/>
-                <a:cs typeface="Open Sans 1"/>
-                <a:sym typeface="Open Sans 1"/>
+                <a:latin typeface="Suez One"/>
+                <a:ea typeface="Suez One"/>
+                <a:cs typeface="Suez One"/>
+                <a:sym typeface="Suez One"/>
               </a:rPr>
-              <a:t>Failure to Thrive (FTT) is a pediatric health issue affecting growth and development, requiring multifaceted care. Current solutions often lack integration, creating challenges for families and professionals.</a:t>
-            </a:r>
-          </a:p>
-          <a:p>
-            <a:pPr algn="l">
-              <a:lnSpc>
-                <a:spcPts val="3647"/>
-              </a:lnSpc>
-            </a:pPr>
-          </a:p>
-          <a:p>
-            <a:pPr algn="l" marL="562506" indent="-281253" lvl="1">
-              <a:lnSpc>
-                <a:spcPts val="3647"/>
-              </a:lnSpc>
-              <a:buFont typeface="Arial"/>
-              <a:buChar char="•"/>
-            </a:pPr>
-            <a:r>
-              <a:rPr lang="en-US" sz="2605">
-                <a:solidFill>
-                  <a:srgbClr val="0D1D29"/>
-                </a:solidFill>
-                <a:latin typeface="Open Sans 1"/>
-                <a:ea typeface="Open Sans 1"/>
-                <a:cs typeface="Open Sans 1"/>
-                <a:sym typeface="Open Sans 1"/>
-              </a:rPr>
-              <a:t>We propose a website that analyzes diagnostic data to provide personalized recommendations like meal plans and supplements, bridging gaps between diagnosis and care.</a:t>
-            </a:r>
-          </a:p>
-          <a:p>
-            <a:pPr algn="l">
-              <a:lnSpc>
-                <a:spcPts val="3647"/>
-              </a:lnSpc>
-            </a:pPr>
-          </a:p>
-          <a:p>
-            <a:pPr algn="l" marL="562506" indent="-281253" lvl="1">
-              <a:lnSpc>
-                <a:spcPts val="3647"/>
-              </a:lnSpc>
-              <a:buFont typeface="Arial"/>
-              <a:buChar char="•"/>
-            </a:pPr>
-            <a:r>
-              <a:rPr lang="en-US" sz="2605">
-                <a:solidFill>
-                  <a:srgbClr val="0D1D29"/>
-                </a:solidFill>
-                <a:latin typeface="Open Sans 1"/>
-                <a:ea typeface="Open Sans 1"/>
-                <a:cs typeface="Open Sans 1"/>
-                <a:sym typeface="Open Sans 1"/>
-              </a:rPr>
-              <a:t>Parents, caregivers, and professionals gain actionable insights, while children with FTT receive timely, tailored support for improved outcomes.</a:t>
+              <a:t>21</a:t>
             </a:r>
           </a:p>
         </p:txBody>
@@ -8829,7 +10871,7 @@
 </p:sld>
 </file>
 
-<file path=ppt/slides/slide20.xml><?xml version="1.0" encoding="utf-8"?>
+<file path=ppt/slides/slide22.xml><?xml version="1.0" encoding="utf-8"?>
 <p:sld xmlns:p="http://schemas.openxmlformats.org/presentationml/2006/main" xmlns:a="http://schemas.openxmlformats.org/drawingml/2006/main" xmlns:r="http://schemas.openxmlformats.org/officeDocument/2006/relationships">
   <p:cSld>
     <p:spTree>
@@ -9421,6 +11463,50 @@
           </a:blipFill>
         </p:spPr>
       </p:sp>
+      <p:sp>
+        <p:nvSpPr>
+          <p:cNvPr name="TextBox 19" id="19"/>
+          <p:cNvSpPr txBox="true"/>
+          <p:nvPr/>
+        </p:nvSpPr>
+        <p:spPr>
+          <a:xfrm rot="0">
+            <a:off x="17259300" y="9182100"/>
+            <a:ext cx="152400" cy="228600"/>
+          </a:xfrm>
+          <a:prstGeom prst="rect">
+            <a:avLst/>
+          </a:prstGeom>
+        </p:spPr>
+        <p:txBody>
+          <a:bodyPr anchor="t" rtlCol="false" tIns="0" lIns="0" bIns="0" rIns="0" wrap="none">
+            <a:spAutoFit/>
+          </a:bodyPr>
+          <a:lstStyle/>
+          <a:p>
+            <a:pPr algn="ctr">
+              <a:lnSpc>
+                <a:spcPts val="6160"/>
+              </a:lnSpc>
+              <a:spcBef>
+                <a:spcPct val="0"/>
+              </a:spcBef>
+            </a:pPr>
+            <a:r>
+              <a:rPr lang="en-US" sz="4400">
+                <a:solidFill>
+                  <a:srgbClr val="000000"/>
+                </a:solidFill>
+                <a:latin typeface="Suez One"/>
+                <a:ea typeface="Suez One"/>
+                <a:cs typeface="Suez One"/>
+                <a:sym typeface="Suez One"/>
+              </a:rPr>
+              <a:t>22</a:t>
+            </a:r>
+          </a:p>
+        </p:txBody>
+      </p:sp>
     </p:spTree>
   </p:cSld>
   <p:clrMapOvr>
@@ -9429,7 +11515,7 @@
 </p:sld>
 </file>
 
-<file path=ppt/slides/slide21.xml><?xml version="1.0" encoding="utf-8"?>
+<file path=ppt/slides/slide23.xml><?xml version="1.0" encoding="utf-8"?>
 <p:sld xmlns:p="http://schemas.openxmlformats.org/presentationml/2006/main" xmlns:a="http://schemas.openxmlformats.org/drawingml/2006/main" xmlns:r="http://schemas.openxmlformats.org/officeDocument/2006/relationships">
   <p:cSld>
     <p:spTree>
@@ -9601,7 +11687,7 @@
         </p:nvGraphicFramePr>
         <p:xfrm>
           <a:off x="2465933" y="1279079"/>
-          <a:ext cx="14312792" cy="8667750"/>
+          <a:ext cx="14312792" cy="8661193"/>
         </p:xfrm>
         <a:graphic>
           <a:graphicData uri="http://schemas.openxmlformats.org/drawingml/2006/table">
@@ -9612,7 +11698,7 @@
                 <a:gridCol w="2605182"/>
                 <a:gridCol w="10415268"/>
               </a:tblGrid>
-              <a:tr h="1109778">
+              <a:tr h="1109782">
                 <a:tc>
                   <a:txBody>
                     <a:bodyPr anchor="t" rtlCol="false"/>
@@ -9823,7 +11909,7 @@
                   </a:tcPr>
                 </a:tc>
               </a:tr>
-              <a:tr h="1148046">
+              <a:tr h="1148050">
                 <a:tc>
                   <a:txBody>
                     <a:bodyPr anchor="t" rtlCol="false"/>
@@ -9975,28 +12061,9 @@
                           <a:cs typeface="Arimo"/>
                           <a:sym typeface="Arimo"/>
                         </a:rPr>
-                        <a:t>  An error</a:t>
+                        <a:t>  An error message should appear, informing the user of incorrect username or password.</a:t>
                       </a:r>
                       <a:endParaRPr lang="en-US" sz="1100"/>
-                    </a:p>
-                    <a:p>
-                      <a:pPr algn="l">
-                        <a:lnSpc>
-                          <a:spcPts val="2659"/>
-                        </a:lnSpc>
-                      </a:pPr>
-                      <a:r>
-                        <a:rPr lang="en-US" sz="1899">
-                          <a:solidFill>
-                            <a:srgbClr val="000000"/>
-                          </a:solidFill>
-                          <a:latin typeface="Arimo"/>
-                          <a:ea typeface="Arimo"/>
-                          <a:cs typeface="Arimo"/>
-                          <a:sym typeface="Arimo"/>
-                        </a:rPr>
-                        <a:t>  message should appear, informing the user of incorrect username or password.</a:t>
-                      </a:r>
                     </a:p>
                   </a:txBody>
                   <a:tcPr marL="190500" marR="190500" marT="190500" marB="190500" anchor="ctr">
@@ -10039,7 +12106,7 @@
                   </a:tcPr>
                 </a:tc>
               </a:tr>
-              <a:tr h="1482893">
+              <a:tr h="1482898">
                 <a:tc>
                   <a:txBody>
                     <a:bodyPr anchor="t" rtlCol="false"/>
@@ -10191,28 +12258,9 @@
                           <a:cs typeface="Arimo"/>
                           <a:sym typeface="Arimo"/>
                         </a:rPr>
-                        <a:t>An error</a:t>
+                        <a:t>An error message should appear, specifying the required fields or validation errors.</a:t>
                       </a:r>
                       <a:endParaRPr lang="en-US" sz="1100"/>
-                    </a:p>
-                    <a:p>
-                      <a:pPr algn="just">
-                        <a:lnSpc>
-                          <a:spcPts val="2659"/>
-                        </a:lnSpc>
-                      </a:pPr>
-                      <a:r>
-                        <a:rPr lang="en-US" sz="1899">
-                          <a:solidFill>
-                            <a:srgbClr val="000000"/>
-                          </a:solidFill>
-                          <a:latin typeface="Arimo"/>
-                          <a:ea typeface="Arimo"/>
-                          <a:cs typeface="Arimo"/>
-                          <a:sym typeface="Arimo"/>
-                        </a:rPr>
-                        <a:t>message should appear, specifying the required fields or validation errors.</a:t>
-                      </a:r>
                     </a:p>
                   </a:txBody>
                   <a:tcPr marL="190500" marR="190500" marT="190500" marB="190500" anchor="ctr">
@@ -10255,7 +12303,7 @@
                   </a:tcPr>
                 </a:tc>
               </a:tr>
-              <a:tr h="1148046">
+              <a:tr h="1148050">
                 <a:tc>
                   <a:txBody>
                     <a:bodyPr anchor="t" rtlCol="false"/>
@@ -10471,7 +12519,7 @@
                   </a:tcPr>
                 </a:tc>
               </a:tr>
-              <a:tr h="1148046">
+              <a:tr h="1148050">
                 <a:tc>
                   <a:txBody>
                     <a:bodyPr anchor="t" rtlCol="false"/>
@@ -10668,7 +12716,7 @@
                   </a:tcPr>
                 </a:tc>
               </a:tr>
-              <a:tr h="1148046">
+              <a:tr h="1148050">
                 <a:tc>
                   <a:txBody>
                     <a:bodyPr anchor="t" rtlCol="false"/>
@@ -10865,7 +12913,7 @@
                   </a:tcPr>
                 </a:tc>
               </a:tr>
-              <a:tr h="1482893">
+              <a:tr h="1476312">
                 <a:tc>
                   <a:txBody>
                     <a:bodyPr anchor="t" rtlCol="false"/>
@@ -11017,28 +13065,9 @@
                           <a:cs typeface="Arimo"/>
                           <a:sym typeface="Arimo"/>
                         </a:rPr>
-                        <a:t>The system should allow the user to input updated measurements, and the graphs should refresh to reflect the</a:t>
+                        <a:t>The system should allow the user to input updated measurements, and the graphs should refresh to reflect the new data.</a:t>
                       </a:r>
                       <a:endParaRPr lang="en-US" sz="1100"/>
-                    </a:p>
-                    <a:p>
-                      <a:pPr algn="l">
-                        <a:lnSpc>
-                          <a:spcPts val="2659"/>
-                        </a:lnSpc>
-                      </a:pPr>
-                      <a:r>
-                        <a:rPr lang="en-US" sz="1899">
-                          <a:solidFill>
-                            <a:srgbClr val="000000"/>
-                          </a:solidFill>
-                          <a:latin typeface="Arimo"/>
-                          <a:ea typeface="Arimo"/>
-                          <a:cs typeface="Arimo"/>
-                          <a:sym typeface="Arimo"/>
-                        </a:rPr>
-                        <a:t>  new data.</a:t>
-                      </a:r>
                     </a:p>
                   </a:txBody>
                   <a:tcPr marL="190500" marR="190500" marT="190500" marB="190500" anchor="ctr">
@@ -11085,6 +13114,50 @@
           </a:graphicData>
         </a:graphic>
       </p:graphicFrame>
+      <p:sp>
+        <p:nvSpPr>
+          <p:cNvPr name="TextBox 6" id="6"/>
+          <p:cNvSpPr txBox="true"/>
+          <p:nvPr/>
+        </p:nvSpPr>
+        <p:spPr>
+          <a:xfrm rot="0">
+            <a:off x="17259300" y="9182100"/>
+            <a:ext cx="152400" cy="228600"/>
+          </a:xfrm>
+          <a:prstGeom prst="rect">
+            <a:avLst/>
+          </a:prstGeom>
+        </p:spPr>
+        <p:txBody>
+          <a:bodyPr anchor="t" rtlCol="false" tIns="0" lIns="0" bIns="0" rIns="0" wrap="none">
+            <a:spAutoFit/>
+          </a:bodyPr>
+          <a:lstStyle/>
+          <a:p>
+            <a:pPr algn="ctr">
+              <a:lnSpc>
+                <a:spcPts val="6160"/>
+              </a:lnSpc>
+              <a:spcBef>
+                <a:spcPct val="0"/>
+              </a:spcBef>
+            </a:pPr>
+            <a:r>
+              <a:rPr lang="en-US" sz="4400">
+                <a:solidFill>
+                  <a:srgbClr val="000000"/>
+                </a:solidFill>
+                <a:latin typeface="Suez One"/>
+                <a:ea typeface="Suez One"/>
+                <a:cs typeface="Suez One"/>
+                <a:sym typeface="Suez One"/>
+              </a:rPr>
+              <a:t>23</a:t>
+            </a:r>
+          </a:p>
+        </p:txBody>
+      </p:sp>
     </p:spTree>
   </p:cSld>
   <p:clrMapOvr>
@@ -11093,7 +13166,7 @@
 </p:sld>
 </file>
 
-<file path=ppt/slides/slide22.xml><?xml version="1.0" encoding="utf-8"?>
+<file path=ppt/slides/slide24.xml><?xml version="1.0" encoding="utf-8"?>
 <p:sld xmlns:p="http://schemas.openxmlformats.org/presentationml/2006/main" xmlns:a="http://schemas.openxmlformats.org/drawingml/2006/main" xmlns:r="http://schemas.openxmlformats.org/officeDocument/2006/relationships">
   <p:cSld>
     <p:spTree>
@@ -11851,6 +13924,50 @@
           </a:p>
         </p:txBody>
       </p:sp>
+      <p:sp>
+        <p:nvSpPr>
+          <p:cNvPr name="TextBox 20" id="20"/>
+          <p:cNvSpPr txBox="true"/>
+          <p:nvPr/>
+        </p:nvSpPr>
+        <p:spPr>
+          <a:xfrm rot="0">
+            <a:off x="17259300" y="9182100"/>
+            <a:ext cx="152400" cy="228600"/>
+          </a:xfrm>
+          <a:prstGeom prst="rect">
+            <a:avLst/>
+          </a:prstGeom>
+        </p:spPr>
+        <p:txBody>
+          <a:bodyPr anchor="t" rtlCol="false" tIns="0" lIns="0" bIns="0" rIns="0" wrap="none">
+            <a:spAutoFit/>
+          </a:bodyPr>
+          <a:lstStyle/>
+          <a:p>
+            <a:pPr algn="ctr">
+              <a:lnSpc>
+                <a:spcPts val="6160"/>
+              </a:lnSpc>
+              <a:spcBef>
+                <a:spcPct val="0"/>
+              </a:spcBef>
+            </a:pPr>
+            <a:r>
+              <a:rPr lang="en-US" sz="4400">
+                <a:solidFill>
+                  <a:srgbClr val="000000"/>
+                </a:solidFill>
+                <a:latin typeface="Suez One"/>
+                <a:ea typeface="Suez One"/>
+                <a:cs typeface="Suez One"/>
+                <a:sym typeface="Suez One"/>
+              </a:rPr>
+              <a:t>24</a:t>
+            </a:r>
+          </a:p>
+        </p:txBody>
+      </p:sp>
     </p:spTree>
   </p:cSld>
   <p:clrMapOvr>
@@ -11859,7 +13976,7 @@
 </p:sld>
 </file>
 
-<file path=ppt/slides/slide23.xml><?xml version="1.0" encoding="utf-8"?>
+<file path=ppt/slides/slide25.xml><?xml version="1.0" encoding="utf-8"?>
 <p:sld xmlns:p="http://schemas.openxmlformats.org/presentationml/2006/main" xmlns:a="http://schemas.openxmlformats.org/drawingml/2006/main" xmlns:r="http://schemas.openxmlformats.org/officeDocument/2006/relationships">
   <p:cSld>
     <p:spTree>
@@ -13559,6 +15676,50 @@
           </a:ln>
         </p:spPr>
       </p:sp>
+      <p:sp>
+        <p:nvSpPr>
+          <p:cNvPr name="TextBox 49" id="49"/>
+          <p:cNvSpPr txBox="true"/>
+          <p:nvPr/>
+        </p:nvSpPr>
+        <p:spPr>
+          <a:xfrm rot="0">
+            <a:off x="17259300" y="9182100"/>
+            <a:ext cx="152400" cy="228600"/>
+          </a:xfrm>
+          <a:prstGeom prst="rect">
+            <a:avLst/>
+          </a:prstGeom>
+        </p:spPr>
+        <p:txBody>
+          <a:bodyPr anchor="t" rtlCol="false" tIns="0" lIns="0" bIns="0" rIns="0" wrap="none">
+            <a:spAutoFit/>
+          </a:bodyPr>
+          <a:lstStyle/>
+          <a:p>
+            <a:pPr algn="ctr">
+              <a:lnSpc>
+                <a:spcPts val="6160"/>
+              </a:lnSpc>
+              <a:spcBef>
+                <a:spcPct val="0"/>
+              </a:spcBef>
+            </a:pPr>
+            <a:r>
+              <a:rPr lang="en-US" sz="4400">
+                <a:solidFill>
+                  <a:srgbClr val="000000"/>
+                </a:solidFill>
+                <a:latin typeface="Suez One"/>
+                <a:ea typeface="Suez One"/>
+                <a:cs typeface="Suez One"/>
+                <a:sym typeface="Suez One"/>
+              </a:rPr>
+              <a:t>25</a:t>
+            </a:r>
+          </a:p>
+        </p:txBody>
+      </p:sp>
     </p:spTree>
   </p:cSld>
   <p:clrMapOvr>
@@ -13567,7 +15728,7 @@
 </p:sld>
 </file>
 
-<file path=ppt/slides/slide24.xml><?xml version="1.0" encoding="utf-8"?>
+<file path=ppt/slides/slide26.xml><?xml version="1.0" encoding="utf-8"?>
 <p:sld xmlns:p="http://schemas.openxmlformats.org/presentationml/2006/main" xmlns:a="http://schemas.openxmlformats.org/drawingml/2006/main" xmlns:r="http://schemas.openxmlformats.org/officeDocument/2006/relationships">
   <p:cSld>
     <p:spTree>
@@ -13725,6 +15886,50 @@
                 <a:sym typeface="Ubuntu Bold"/>
               </a:rPr>
               <a:t>THANK YOU</a:t>
+            </a:r>
+          </a:p>
+        </p:txBody>
+      </p:sp>
+      <p:sp>
+        <p:nvSpPr>
+          <p:cNvPr name="TextBox 5" id="5"/>
+          <p:cNvSpPr txBox="true"/>
+          <p:nvPr/>
+        </p:nvSpPr>
+        <p:spPr>
+          <a:xfrm rot="0">
+            <a:off x="17259300" y="9182100"/>
+            <a:ext cx="152400" cy="228600"/>
+          </a:xfrm>
+          <a:prstGeom prst="rect">
+            <a:avLst/>
+          </a:prstGeom>
+        </p:spPr>
+        <p:txBody>
+          <a:bodyPr anchor="t" rtlCol="false" tIns="0" lIns="0" bIns="0" rIns="0" wrap="none">
+            <a:spAutoFit/>
+          </a:bodyPr>
+          <a:lstStyle/>
+          <a:p>
+            <a:pPr algn="ctr">
+              <a:lnSpc>
+                <a:spcPts val="6160"/>
+              </a:lnSpc>
+              <a:spcBef>
+                <a:spcPct val="0"/>
+              </a:spcBef>
+            </a:pPr>
+            <a:r>
+              <a:rPr lang="en-US" sz="4400">
+                <a:solidFill>
+                  <a:srgbClr val="000000"/>
+                </a:solidFill>
+                <a:latin typeface="Suez One"/>
+                <a:ea typeface="Suez One"/>
+                <a:cs typeface="Suez One"/>
+                <a:sym typeface="Suez One"/>
+              </a:rPr>
+              <a:t>26</a:t>
             </a:r>
           </a:p>
         </p:txBody>
@@ -14303,7 +16508,7 @@
         </p:nvSpPr>
         <p:spPr>
           <a:xfrm rot="0">
-            <a:off x="8281844" y="9782591"/>
+            <a:off x="7532318" y="9792116"/>
             <a:ext cx="9707932" cy="387876"/>
           </a:xfrm>
           <a:prstGeom prst="rect">
@@ -14335,6 +16540,50 @@
                 <a:sym typeface="Open Sans 1 Bold"/>
               </a:rPr>
               <a:t>*Failure to Thrive: An Update, Cole, S. Z., &amp; Lanham, J. S. (2011)</a:t>
+            </a:r>
+          </a:p>
+        </p:txBody>
+      </p:sp>
+      <p:sp>
+        <p:nvSpPr>
+          <p:cNvPr name="TextBox 15" id="15"/>
+          <p:cNvSpPr txBox="true"/>
+          <p:nvPr/>
+        </p:nvSpPr>
+        <p:spPr>
+          <a:xfrm rot="0">
+            <a:off x="17259300" y="9182100"/>
+            <a:ext cx="152400" cy="228600"/>
+          </a:xfrm>
+          <a:prstGeom prst="rect">
+            <a:avLst/>
+          </a:prstGeom>
+        </p:spPr>
+        <p:txBody>
+          <a:bodyPr anchor="t" rtlCol="false" tIns="0" lIns="0" bIns="0" rIns="0" wrap="none">
+            <a:spAutoFit/>
+          </a:bodyPr>
+          <a:lstStyle/>
+          <a:p>
+            <a:pPr algn="ctr">
+              <a:lnSpc>
+                <a:spcPts val="6160"/>
+              </a:lnSpc>
+              <a:spcBef>
+                <a:spcPct val="0"/>
+              </a:spcBef>
+            </a:pPr>
+            <a:r>
+              <a:rPr lang="en-US" sz="4400">
+                <a:solidFill>
+                  <a:srgbClr val="000000"/>
+                </a:solidFill>
+                <a:latin typeface="Suez One"/>
+                <a:ea typeface="Suez One"/>
+                <a:cs typeface="Suez One"/>
+                <a:sym typeface="Suez One"/>
+              </a:rPr>
+              <a:t>3</a:t>
             </a:r>
           </a:p>
         </p:txBody>
@@ -14918,6 +17167,50 @@
           </a:p>
         </p:txBody>
       </p:sp>
+      <p:sp>
+        <p:nvSpPr>
+          <p:cNvPr name="TextBox 14" id="14"/>
+          <p:cNvSpPr txBox="true"/>
+          <p:nvPr/>
+        </p:nvSpPr>
+        <p:spPr>
+          <a:xfrm rot="0">
+            <a:off x="17259300" y="9182100"/>
+            <a:ext cx="152400" cy="228600"/>
+          </a:xfrm>
+          <a:prstGeom prst="rect">
+            <a:avLst/>
+          </a:prstGeom>
+        </p:spPr>
+        <p:txBody>
+          <a:bodyPr anchor="t" rtlCol="false" tIns="0" lIns="0" bIns="0" rIns="0" wrap="none">
+            <a:spAutoFit/>
+          </a:bodyPr>
+          <a:lstStyle/>
+          <a:p>
+            <a:pPr algn="ctr">
+              <a:lnSpc>
+                <a:spcPts val="6160"/>
+              </a:lnSpc>
+              <a:spcBef>
+                <a:spcPct val="0"/>
+              </a:spcBef>
+            </a:pPr>
+            <a:r>
+              <a:rPr lang="en-US" sz="4400">
+                <a:solidFill>
+                  <a:srgbClr val="000000"/>
+                </a:solidFill>
+                <a:latin typeface="Suez One"/>
+                <a:ea typeface="Suez One"/>
+                <a:cs typeface="Suez One"/>
+                <a:sym typeface="Suez One"/>
+              </a:rPr>
+              <a:t>4</a:t>
+            </a:r>
+          </a:p>
+        </p:txBody>
+      </p:sp>
     </p:spTree>
   </p:cSld>
   <p:clrMapOvr>
@@ -14951,7 +17244,7 @@
         </p:nvSpPr>
         <p:spPr>
           <a:xfrm rot="0">
-            <a:off x="0" y="1234012"/>
+            <a:off x="1351607" y="531870"/>
             <a:ext cx="15584786" cy="980440"/>
           </a:xfrm>
           <a:prstGeom prst="rect">
@@ -15044,7 +17337,7 @@
         </p:nvSpPr>
         <p:spPr>
           <a:xfrm flipH="false" flipV="true" rot="-5400000">
-            <a:off x="12814394" y="6970349"/>
+            <a:off x="12927794" y="6970349"/>
             <a:ext cx="6157558" cy="6157558"/>
           </a:xfrm>
           <a:custGeom>
@@ -15059,10 +17352,10 @@
                   <a:pt x="0" y="6157558"/>
                 </a:moveTo>
                 <a:lnTo>
-                  <a:pt x="6157558" y="6157558"/>
-                </a:lnTo>
-                <a:lnTo>
-                  <a:pt x="6157558" y="0"/>
+                  <a:pt x="6157557" y="6157558"/>
+                </a:lnTo>
+                <a:lnTo>
+                  <a:pt x="6157557" y="0"/>
                 </a:lnTo>
                 <a:lnTo>
                   <a:pt x="0" y="0"/>
@@ -15096,8 +17389,8 @@
         </p:nvSpPr>
         <p:spPr>
           <a:xfrm flipH="false" flipV="false" rot="0">
-            <a:off x="14579146" y="285413"/>
-            <a:ext cx="3455662" cy="3373590"/>
+            <a:off x="7414788" y="4626356"/>
+            <a:ext cx="2530217" cy="2470125"/>
           </a:xfrm>
           <a:custGeom>
             <a:avLst/>
@@ -15106,18 +17399,18 @@
             <a:cxnLst/>
             <a:rect r="r" b="b" t="t" l="l"/>
             <a:pathLst>
-              <a:path h="3373590" w="3455662">
+              <a:path h="2470125" w="2530217">
                 <a:moveTo>
                   <a:pt x="0" y="0"/>
                 </a:moveTo>
                 <a:lnTo>
-                  <a:pt x="3455663" y="0"/>
-                </a:lnTo>
-                <a:lnTo>
-                  <a:pt x="3455663" y="3373591"/>
-                </a:lnTo>
-                <a:lnTo>
-                  <a:pt x="0" y="3373591"/>
+                  <a:pt x="2530217" y="0"/>
+                </a:lnTo>
+                <a:lnTo>
+                  <a:pt x="2530217" y="2470125"/>
+                </a:lnTo>
+                <a:lnTo>
+                  <a:pt x="0" y="2470125"/>
                 </a:lnTo>
                 <a:lnTo>
                   <a:pt x="0" y="0"/>
@@ -15142,13 +17435,371 @@
       </p:sp>
       <p:sp>
         <p:nvSpPr>
-          <p:cNvPr name="TextBox 6" id="6"/>
+          <p:cNvPr name="Freeform 6" id="6"/>
+          <p:cNvSpPr/>
+          <p:nvPr/>
+        </p:nvSpPr>
+        <p:spPr>
+          <a:xfrm flipH="false" flipV="false" rot="0">
+            <a:off x="3562846" y="4878719"/>
+            <a:ext cx="2057400" cy="2057400"/>
+          </a:xfrm>
+          <a:custGeom>
+            <a:avLst/>
+            <a:gdLst/>
+            <a:ahLst/>
+            <a:cxnLst/>
+            <a:rect r="r" b="b" t="t" l="l"/>
+            <a:pathLst>
+              <a:path h="2057400" w="2057400">
+                <a:moveTo>
+                  <a:pt x="0" y="0"/>
+                </a:moveTo>
+                <a:lnTo>
+                  <a:pt x="2057400" y="0"/>
+                </a:lnTo>
+                <a:lnTo>
+                  <a:pt x="2057400" y="2057400"/>
+                </a:lnTo>
+                <a:lnTo>
+                  <a:pt x="0" y="2057400"/>
+                </a:lnTo>
+                <a:lnTo>
+                  <a:pt x="0" y="0"/>
+                </a:lnTo>
+                <a:close/>
+              </a:path>
+            </a:pathLst>
+          </a:custGeom>
+          <a:blipFill>
+            <a:blip r:embed="rId6">
+              <a:extLst>
+                <a:ext uri="{96DAC541-7B7A-43D3-8B79-37D633B846F1}">
+                  <asvg:svgBlip xmlns:asvg="http://schemas.microsoft.com/office/drawing/2016/SVG/main" r:embed="rId7"/>
+                </a:ext>
+              </a:extLst>
+            </a:blip>
+            <a:stretch>
+              <a:fillRect l="0" t="0" r="0" b="0"/>
+            </a:stretch>
+          </a:blipFill>
+        </p:spPr>
+      </p:sp>
+      <p:sp>
+        <p:nvSpPr>
+          <p:cNvPr name="Freeform 7" id="7"/>
+          <p:cNvSpPr/>
+          <p:nvPr/>
+        </p:nvSpPr>
+        <p:spPr>
+          <a:xfrm flipH="false" flipV="false" rot="0">
+            <a:off x="12058966" y="5143500"/>
+            <a:ext cx="2710680" cy="1527838"/>
+          </a:xfrm>
+          <a:custGeom>
+            <a:avLst/>
+            <a:gdLst/>
+            <a:ahLst/>
+            <a:cxnLst/>
+            <a:rect r="r" b="b" t="t" l="l"/>
+            <a:pathLst>
+              <a:path h="1527838" w="2710680">
+                <a:moveTo>
+                  <a:pt x="0" y="0"/>
+                </a:moveTo>
+                <a:lnTo>
+                  <a:pt x="2710680" y="0"/>
+                </a:lnTo>
+                <a:lnTo>
+                  <a:pt x="2710680" y="1527838"/>
+                </a:lnTo>
+                <a:lnTo>
+                  <a:pt x="0" y="1527838"/>
+                </a:lnTo>
+                <a:lnTo>
+                  <a:pt x="0" y="0"/>
+                </a:lnTo>
+                <a:close/>
+              </a:path>
+            </a:pathLst>
+          </a:custGeom>
+          <a:blipFill>
+            <a:blip r:embed="rId8">
+              <a:extLst>
+                <a:ext uri="{96DAC541-7B7A-43D3-8B79-37D633B846F1}">
+                  <asvg:svgBlip xmlns:asvg="http://schemas.microsoft.com/office/drawing/2016/SVG/main" r:embed="rId9"/>
+                </a:ext>
+              </a:extLst>
+            </a:blip>
+            <a:stretch>
+              <a:fillRect l="0" t="0" r="0" b="0"/>
+            </a:stretch>
+          </a:blipFill>
+        </p:spPr>
+      </p:sp>
+      <p:sp>
+        <p:nvSpPr>
+          <p:cNvPr name="Freeform 8" id="8"/>
+          <p:cNvSpPr/>
+          <p:nvPr/>
+        </p:nvSpPr>
+        <p:spPr>
+          <a:xfrm flipH="false" flipV="false" rot="0">
+            <a:off x="4797499" y="8232294"/>
+            <a:ext cx="2307492" cy="1376104"/>
+          </a:xfrm>
+          <a:custGeom>
+            <a:avLst/>
+            <a:gdLst/>
+            <a:ahLst/>
+            <a:cxnLst/>
+            <a:rect r="r" b="b" t="t" l="l"/>
+            <a:pathLst>
+              <a:path h="1376104" w="2307492">
+                <a:moveTo>
+                  <a:pt x="0" y="0"/>
+                </a:moveTo>
+                <a:lnTo>
+                  <a:pt x="2307492" y="0"/>
+                </a:lnTo>
+                <a:lnTo>
+                  <a:pt x="2307492" y="1376104"/>
+                </a:lnTo>
+                <a:lnTo>
+                  <a:pt x="0" y="1376104"/>
+                </a:lnTo>
+                <a:lnTo>
+                  <a:pt x="0" y="0"/>
+                </a:lnTo>
+                <a:close/>
+              </a:path>
+            </a:pathLst>
+          </a:custGeom>
+          <a:blipFill>
+            <a:blip r:embed="rId10">
+              <a:extLst>
+                <a:ext uri="{96DAC541-7B7A-43D3-8B79-37D633B846F1}">
+                  <asvg:svgBlip xmlns:asvg="http://schemas.microsoft.com/office/drawing/2016/SVG/main" r:embed="rId11"/>
+                </a:ext>
+              </a:extLst>
+            </a:blip>
+            <a:stretch>
+              <a:fillRect l="0" t="0" r="0" b="0"/>
+            </a:stretch>
+          </a:blipFill>
+        </p:spPr>
+      </p:sp>
+      <p:sp>
+        <p:nvSpPr>
+          <p:cNvPr name="Freeform 9" id="9"/>
+          <p:cNvSpPr/>
+          <p:nvPr/>
+        </p:nvSpPr>
+        <p:spPr>
+          <a:xfrm flipH="false" flipV="false" rot="0">
+            <a:off x="10093093" y="5758596"/>
+            <a:ext cx="1587060" cy="347169"/>
+          </a:xfrm>
+          <a:custGeom>
+            <a:avLst/>
+            <a:gdLst/>
+            <a:ahLst/>
+            <a:cxnLst/>
+            <a:rect r="r" b="b" t="t" l="l"/>
+            <a:pathLst>
+              <a:path h="347169" w="1587060">
+                <a:moveTo>
+                  <a:pt x="0" y="0"/>
+                </a:moveTo>
+                <a:lnTo>
+                  <a:pt x="1587060" y="0"/>
+                </a:lnTo>
+                <a:lnTo>
+                  <a:pt x="1587060" y="347170"/>
+                </a:lnTo>
+                <a:lnTo>
+                  <a:pt x="0" y="347170"/>
+                </a:lnTo>
+                <a:lnTo>
+                  <a:pt x="0" y="0"/>
+                </a:lnTo>
+                <a:close/>
+              </a:path>
+            </a:pathLst>
+          </a:custGeom>
+          <a:blipFill>
+            <a:blip r:embed="rId12">
+              <a:extLst>
+                <a:ext uri="{96DAC541-7B7A-43D3-8B79-37D633B846F1}">
+                  <asvg:svgBlip xmlns:asvg="http://schemas.microsoft.com/office/drawing/2016/SVG/main" r:embed="rId13"/>
+                </a:ext>
+              </a:extLst>
+            </a:blip>
+            <a:stretch>
+              <a:fillRect l="0" t="0" r="0" b="0"/>
+            </a:stretch>
+          </a:blipFill>
+        </p:spPr>
+      </p:sp>
+      <p:sp>
+        <p:nvSpPr>
+          <p:cNvPr name="Freeform 10" id="10"/>
+          <p:cNvSpPr/>
+          <p:nvPr/>
+        </p:nvSpPr>
+        <p:spPr>
+          <a:xfrm flipH="false" flipV="false" rot="7476010">
+            <a:off x="6765994" y="7363109"/>
+            <a:ext cx="1490754" cy="326102"/>
+          </a:xfrm>
+          <a:custGeom>
+            <a:avLst/>
+            <a:gdLst/>
+            <a:ahLst/>
+            <a:cxnLst/>
+            <a:rect r="r" b="b" t="t" l="l"/>
+            <a:pathLst>
+              <a:path h="326102" w="1490754">
+                <a:moveTo>
+                  <a:pt x="0" y="0"/>
+                </a:moveTo>
+                <a:lnTo>
+                  <a:pt x="1490754" y="0"/>
+                </a:lnTo>
+                <a:lnTo>
+                  <a:pt x="1490754" y="326103"/>
+                </a:lnTo>
+                <a:lnTo>
+                  <a:pt x="0" y="326103"/>
+                </a:lnTo>
+                <a:lnTo>
+                  <a:pt x="0" y="0"/>
+                </a:lnTo>
+                <a:close/>
+              </a:path>
+            </a:pathLst>
+          </a:custGeom>
+          <a:blipFill>
+            <a:blip r:embed="rId12">
+              <a:extLst>
+                <a:ext uri="{96DAC541-7B7A-43D3-8B79-37D633B846F1}">
+                  <asvg:svgBlip xmlns:asvg="http://schemas.microsoft.com/office/drawing/2016/SVG/main" r:embed="rId13"/>
+                </a:ext>
+              </a:extLst>
+            </a:blip>
+            <a:stretch>
+              <a:fillRect l="0" t="0" r="0" b="0"/>
+            </a:stretch>
+          </a:blipFill>
+        </p:spPr>
+      </p:sp>
+      <p:sp>
+        <p:nvSpPr>
+          <p:cNvPr name="Freeform 11" id="11"/>
+          <p:cNvSpPr/>
+          <p:nvPr/>
+        </p:nvSpPr>
+        <p:spPr>
+          <a:xfrm flipH="false" flipV="false" rot="-10680934">
+            <a:off x="5704937" y="5712172"/>
+            <a:ext cx="1587060" cy="347169"/>
+          </a:xfrm>
+          <a:custGeom>
+            <a:avLst/>
+            <a:gdLst/>
+            <a:ahLst/>
+            <a:cxnLst/>
+            <a:rect r="r" b="b" t="t" l="l"/>
+            <a:pathLst>
+              <a:path h="347169" w="1587060">
+                <a:moveTo>
+                  <a:pt x="0" y="0"/>
+                </a:moveTo>
+                <a:lnTo>
+                  <a:pt x="1587060" y="0"/>
+                </a:lnTo>
+                <a:lnTo>
+                  <a:pt x="1587060" y="347170"/>
+                </a:lnTo>
+                <a:lnTo>
+                  <a:pt x="0" y="347170"/>
+                </a:lnTo>
+                <a:lnTo>
+                  <a:pt x="0" y="0"/>
+                </a:lnTo>
+                <a:close/>
+              </a:path>
+            </a:pathLst>
+          </a:custGeom>
+          <a:blipFill>
+            <a:blip r:embed="rId12">
+              <a:extLst>
+                <a:ext uri="{96DAC541-7B7A-43D3-8B79-37D633B846F1}">
+                  <asvg:svgBlip xmlns:asvg="http://schemas.microsoft.com/office/drawing/2016/SVG/main" r:embed="rId13"/>
+                </a:ext>
+              </a:extLst>
+            </a:blip>
+            <a:stretch>
+              <a:fillRect l="0" t="0" r="0" b="0"/>
+            </a:stretch>
+          </a:blipFill>
+        </p:spPr>
+      </p:sp>
+      <p:sp>
+        <p:nvSpPr>
+          <p:cNvPr name="Freeform 12" id="12"/>
+          <p:cNvSpPr/>
+          <p:nvPr/>
+        </p:nvSpPr>
+        <p:spPr>
+          <a:xfrm flipH="false" flipV="false" rot="0">
+            <a:off x="9904439" y="8184669"/>
+            <a:ext cx="2154527" cy="1255012"/>
+          </a:xfrm>
+          <a:custGeom>
+            <a:avLst/>
+            <a:gdLst/>
+            <a:ahLst/>
+            <a:cxnLst/>
+            <a:rect r="r" b="b" t="t" l="l"/>
+            <a:pathLst>
+              <a:path h="1255012" w="2154527">
+                <a:moveTo>
+                  <a:pt x="0" y="0"/>
+                </a:moveTo>
+                <a:lnTo>
+                  <a:pt x="2154527" y="0"/>
+                </a:lnTo>
+                <a:lnTo>
+                  <a:pt x="2154527" y="1255012"/>
+                </a:lnTo>
+                <a:lnTo>
+                  <a:pt x="0" y="1255012"/>
+                </a:lnTo>
+                <a:lnTo>
+                  <a:pt x="0" y="0"/>
+                </a:lnTo>
+                <a:close/>
+              </a:path>
+            </a:pathLst>
+          </a:custGeom>
+          <a:blipFill>
+            <a:blip r:embed="rId14"/>
+            <a:stretch>
+              <a:fillRect l="0" t="0" r="0" b="0"/>
+            </a:stretch>
+          </a:blipFill>
+        </p:spPr>
+      </p:sp>
+      <p:sp>
+        <p:nvSpPr>
+          <p:cNvPr name="TextBox 13" id="13"/>
           <p:cNvSpPr txBox="true"/>
           <p:nvPr/>
         </p:nvSpPr>
         <p:spPr>
           <a:xfrm rot="0">
-            <a:off x="932590" y="2977690"/>
+            <a:off x="932590" y="2398135"/>
             <a:ext cx="14960583" cy="1653777"/>
           </a:xfrm>
           <a:prstGeom prst="rect">
@@ -15199,33 +17850,73 @@
                 <a:cs typeface="Ubuntu"/>
                 <a:sym typeface="Ubuntu"/>
               </a:rPr>
-              <a:t> </a:t>
-            </a:r>
-            <a:r>
-              <a:rPr lang="en-US" sz="3140">
-                <a:solidFill>
-                  <a:srgbClr val="0D1D29"/>
-                </a:solidFill>
-                <a:latin typeface="Ubuntu"/>
-                <a:ea typeface="Ubuntu"/>
-                <a:cs typeface="Ubuntu"/>
-                <a:sym typeface="Ubuntu"/>
-              </a:rPr>
-              <a:t>A centralized website to address Failure to Thrive (FTT) in children by bridging diagnosis and tailored intervention.</a:t>
+              <a:t> A centralized website to address Failure to Thrive (FTT) in children by bridging diagnosis and customized intervention.</a:t>
             </a:r>
           </a:p>
         </p:txBody>
       </p:sp>
       <p:sp>
         <p:nvSpPr>
-          <p:cNvPr name="TextBox 7" id="7"/>
+          <p:cNvPr name="Freeform 14" id="14"/>
+          <p:cNvSpPr/>
+          <p:nvPr/>
+        </p:nvSpPr>
+        <p:spPr>
+          <a:xfrm flipH="false" flipV="false" rot="3073549">
+            <a:off x="9173250" y="7475368"/>
+            <a:ext cx="1587060" cy="347169"/>
+          </a:xfrm>
+          <a:custGeom>
+            <a:avLst/>
+            <a:gdLst/>
+            <a:ahLst/>
+            <a:cxnLst/>
+            <a:rect r="r" b="b" t="t" l="l"/>
+            <a:pathLst>
+              <a:path h="347169" w="1587060">
+                <a:moveTo>
+                  <a:pt x="0" y="0"/>
+                </a:moveTo>
+                <a:lnTo>
+                  <a:pt x="1587060" y="0"/>
+                </a:lnTo>
+                <a:lnTo>
+                  <a:pt x="1587060" y="347170"/>
+                </a:lnTo>
+                <a:lnTo>
+                  <a:pt x="0" y="347170"/>
+                </a:lnTo>
+                <a:lnTo>
+                  <a:pt x="0" y="0"/>
+                </a:lnTo>
+                <a:close/>
+              </a:path>
+            </a:pathLst>
+          </a:custGeom>
+          <a:blipFill>
+            <a:blip r:embed="rId12">
+              <a:extLst>
+                <a:ext uri="{96DAC541-7B7A-43D3-8B79-37D633B846F1}">
+                  <asvg:svgBlip xmlns:asvg="http://schemas.microsoft.com/office/drawing/2016/SVG/main" r:embed="rId13"/>
+                </a:ext>
+              </a:extLst>
+            </a:blip>
+            <a:stretch>
+              <a:fillRect l="0" t="0" r="0" b="0"/>
+            </a:stretch>
+          </a:blipFill>
+        </p:spPr>
+      </p:sp>
+      <p:sp>
+        <p:nvSpPr>
+          <p:cNvPr name="TextBox 15" id="15"/>
           <p:cNvSpPr txBox="true"/>
           <p:nvPr/>
         </p:nvSpPr>
         <p:spPr>
           <a:xfrm rot="0">
-            <a:off x="1028700" y="5394706"/>
-            <a:ext cx="15439207" cy="4416044"/>
+            <a:off x="2716345" y="6883493"/>
+            <a:ext cx="3285054" cy="387876"/>
           </a:xfrm>
           <a:prstGeom prst="rect">
             <a:avLst/>
@@ -15237,144 +17928,275 @@
           </a:bodyPr>
           <a:lstStyle/>
           <a:p>
-            <a:pPr algn="l" marL="677925" indent="-338962" lvl="1">
+            <a:pPr algn="ctr">
               <a:lnSpc>
-                <a:spcPts val="4395"/>
-              </a:lnSpc>
-              <a:buFont typeface="Arial"/>
-              <a:buChar char="•"/>
-            </a:pPr>
-            <a:r>
-              <a:rPr lang="en-US" sz="3139">
-                <a:solidFill>
-                  <a:srgbClr val="034383"/>
-                </a:solidFill>
-                <a:latin typeface="Ubuntu"/>
-                <a:ea typeface="Ubuntu"/>
-                <a:cs typeface="Ubuntu"/>
-                <a:sym typeface="Ubuntu"/>
-              </a:rPr>
-              <a:t>Key Features</a:t>
-            </a:r>
-          </a:p>
-          <a:p>
-            <a:pPr algn="l" marL="1355850" indent="-451950" lvl="2">
-              <a:lnSpc>
-                <a:spcPts val="4395"/>
-              </a:lnSpc>
-              <a:buFont typeface="Arial"/>
-              <a:buChar char="⚬"/>
-            </a:pPr>
-            <a:r>
-              <a:rPr lang="en-US" sz="3139">
-                <a:solidFill>
-                  <a:srgbClr val="0D1D29"/>
-                </a:solidFill>
-                <a:latin typeface="Ubuntu"/>
-                <a:ea typeface="Ubuntu"/>
-                <a:cs typeface="Ubuntu"/>
-                <a:sym typeface="Ubuntu"/>
-              </a:rPr>
-              <a:t>Personalized recommendations: Custom</a:t>
-            </a:r>
-            <a:r>
-              <a:rPr lang="en-US" sz="3139">
-                <a:solidFill>
-                  <a:srgbClr val="0D1D29"/>
-                </a:solidFill>
-                <a:latin typeface="Ubuntu"/>
-                <a:ea typeface="Ubuntu"/>
-                <a:cs typeface="Ubuntu"/>
-                <a:sym typeface="Ubuntu"/>
-              </a:rPr>
-              <a:t> meal plans, supplements, and developmental activities.</a:t>
-            </a:r>
-          </a:p>
-          <a:p>
-            <a:pPr algn="l" marL="1355850" indent="-451950" lvl="2">
-              <a:lnSpc>
-                <a:spcPts val="4395"/>
-              </a:lnSpc>
-              <a:buFont typeface="Arial"/>
-              <a:buChar char="⚬"/>
-            </a:pPr>
-            <a:r>
-              <a:rPr lang="en-US" sz="3139">
-                <a:solidFill>
-                  <a:srgbClr val="0D1D29"/>
-                </a:solidFill>
-                <a:latin typeface="Ubuntu"/>
-                <a:ea typeface="Ubuntu"/>
-                <a:cs typeface="Ubuntu"/>
-                <a:sym typeface="Ubuntu"/>
-              </a:rPr>
-              <a:t>Diagnostic </a:t>
-            </a:r>
-            <a:r>
-              <a:rPr lang="en-US" sz="3139">
-                <a:solidFill>
-                  <a:srgbClr val="0D1D29"/>
-                </a:solidFill>
-                <a:latin typeface="Ubuntu"/>
-                <a:ea typeface="Ubuntu"/>
-                <a:cs typeface="Ubuntu"/>
-                <a:sym typeface="Ubuntu"/>
-              </a:rPr>
-              <a:t>integration</a:t>
-            </a:r>
-            <a:r>
-              <a:rPr lang="en-US" sz="3139">
-                <a:solidFill>
-                  <a:srgbClr val="0D1D29"/>
-                </a:solidFill>
-                <a:latin typeface="Ubuntu"/>
-                <a:ea typeface="Ubuntu"/>
-                <a:cs typeface="Ubuntu"/>
-                <a:sym typeface="Ubuntu"/>
-              </a:rPr>
-              <a:t>: Upload reports for precise analysis and actionable solutions.</a:t>
-            </a:r>
-          </a:p>
-          <a:p>
-            <a:pPr algn="l" marL="1355850" indent="-451950" lvl="2">
-              <a:lnSpc>
-                <a:spcPts val="4395"/>
-              </a:lnSpc>
-              <a:buFont typeface="Arial"/>
-              <a:buChar char="⚬"/>
-            </a:pPr>
-            <a:r>
-              <a:rPr lang="en-US" sz="3139">
-                <a:solidFill>
-                  <a:srgbClr val="0D1D29"/>
-                </a:solidFill>
-                <a:latin typeface="Ubuntu"/>
-                <a:ea typeface="Ubuntu"/>
-                <a:cs typeface="Ubuntu"/>
-                <a:sym typeface="Ubuntu"/>
-              </a:rPr>
-              <a:t>Growth tracking: Monitor progress over time with visual insights.</a:t>
-            </a:r>
-          </a:p>
-          <a:p>
-            <a:pPr algn="l">
-              <a:lnSpc>
-                <a:spcPts val="4395"/>
+                <a:spcPts val="3295"/>
               </a:lnSpc>
               <a:spcBef>
                 <a:spcPct val="0"/>
               </a:spcBef>
             </a:pPr>
-          </a:p>
-          <a:p>
-            <a:pPr algn="l">
+            <a:r>
+              <a:rPr lang="en-US" b="true" sz="2354">
+                <a:solidFill>
+                  <a:srgbClr val="000000"/>
+                </a:solidFill>
+                <a:latin typeface="Open Sans 1 Bold"/>
+                <a:ea typeface="Open Sans 1 Bold"/>
+                <a:cs typeface="Open Sans 1 Bold"/>
+                <a:sym typeface="Open Sans 1 Bold"/>
+              </a:rPr>
+              <a:t>Nutrition &amp; Hydration</a:t>
+            </a:r>
+          </a:p>
+        </p:txBody>
+      </p:sp>
+      <p:sp>
+        <p:nvSpPr>
+          <p:cNvPr name="TextBox 16" id="16"/>
+          <p:cNvSpPr txBox="true"/>
+          <p:nvPr/>
+        </p:nvSpPr>
+        <p:spPr>
+          <a:xfrm rot="0">
+            <a:off x="4501332" y="9661252"/>
+            <a:ext cx="2649736" cy="387876"/>
+          </a:xfrm>
+          <a:prstGeom prst="rect">
+            <a:avLst/>
+          </a:prstGeom>
+        </p:spPr>
+        <p:txBody>
+          <a:bodyPr anchor="t" rtlCol="false" tIns="0" lIns="0" bIns="0" rIns="0">
+            <a:spAutoFit/>
+          </a:bodyPr>
+          <a:lstStyle/>
+          <a:p>
+            <a:pPr algn="ctr">
               <a:lnSpc>
-                <a:spcPts val="4395"/>
+                <a:spcPts val="3295"/>
               </a:lnSpc>
               <a:spcBef>
                 <a:spcPct val="0"/>
               </a:spcBef>
             </a:pPr>
+            <a:r>
+              <a:rPr lang="en-US" b="true" sz="2354">
+                <a:solidFill>
+                  <a:srgbClr val="000000"/>
+                </a:solidFill>
+                <a:latin typeface="Open Sans 1 Bold"/>
+                <a:ea typeface="Open Sans 1 Bold"/>
+                <a:cs typeface="Open Sans 1 Bold"/>
+                <a:sym typeface="Open Sans 1 Bold"/>
+              </a:rPr>
+              <a:t>Tracking Progress</a:t>
+            </a:r>
+          </a:p>
+        </p:txBody>
+      </p:sp>
+      <p:sp>
+        <p:nvSpPr>
+          <p:cNvPr name="TextBox 17" id="17"/>
+          <p:cNvSpPr txBox="true"/>
+          <p:nvPr/>
+        </p:nvSpPr>
+        <p:spPr>
+          <a:xfrm rot="0">
+            <a:off x="9840741" y="9620656"/>
+            <a:ext cx="2677478" cy="387876"/>
+          </a:xfrm>
+          <a:prstGeom prst="rect">
+            <a:avLst/>
+          </a:prstGeom>
+        </p:spPr>
+        <p:txBody>
+          <a:bodyPr anchor="t" rtlCol="false" tIns="0" lIns="0" bIns="0" rIns="0">
+            <a:spAutoFit/>
+          </a:bodyPr>
+          <a:lstStyle/>
+          <a:p>
+            <a:pPr algn="ctr">
+              <a:lnSpc>
+                <a:spcPts val="3295"/>
+              </a:lnSpc>
+              <a:spcBef>
+                <a:spcPct val="0"/>
+              </a:spcBef>
+            </a:pPr>
+            <a:r>
+              <a:rPr lang="en-US" b="true" sz="2354">
+                <a:solidFill>
+                  <a:srgbClr val="000000"/>
+                </a:solidFill>
+                <a:latin typeface="Open Sans 1 Bold"/>
+                <a:ea typeface="Open Sans 1 Bold"/>
+                <a:cs typeface="Open Sans 1 Bold"/>
+                <a:sym typeface="Open Sans 1 Bold"/>
+              </a:rPr>
+              <a:t>Sleeping Schedule</a:t>
+            </a:r>
+          </a:p>
+        </p:txBody>
+      </p:sp>
+      <p:sp>
+        <p:nvSpPr>
+          <p:cNvPr name="TextBox 18" id="18"/>
+          <p:cNvSpPr txBox="true"/>
+          <p:nvPr/>
+        </p:nvSpPr>
+        <p:spPr>
+          <a:xfrm rot="0">
+            <a:off x="11623003" y="6888494"/>
+            <a:ext cx="3376725" cy="1449615"/>
+          </a:xfrm>
+          <a:prstGeom prst="rect">
+            <a:avLst/>
+          </a:prstGeom>
+        </p:spPr>
+        <p:txBody>
+          <a:bodyPr anchor="t" rtlCol="false" tIns="0" lIns="0" bIns="0" rIns="0">
+            <a:spAutoFit/>
+          </a:bodyPr>
+          <a:lstStyle/>
+          <a:p>
+            <a:pPr algn="ctr">
+              <a:lnSpc>
+                <a:spcPts val="3289"/>
+              </a:lnSpc>
+            </a:pPr>
+            <a:r>
+              <a:rPr lang="en-US" b="true" sz="2349">
+                <a:solidFill>
+                  <a:srgbClr val="000000"/>
+                </a:solidFill>
+                <a:latin typeface="Open Sans 1 Bold"/>
+                <a:ea typeface="Open Sans 1 Bold"/>
+                <a:cs typeface="Open Sans 1 Bold"/>
+                <a:sym typeface="Open Sans 1 Bold"/>
+              </a:rPr>
+              <a:t>Physical Activity</a:t>
+            </a:r>
+          </a:p>
+          <a:p>
+            <a:pPr algn="ctr" rtl="true">
+              <a:lnSpc>
+                <a:spcPts val="2809"/>
+              </a:lnSpc>
+            </a:pPr>
+          </a:p>
+          <a:p>
+            <a:pPr algn="ctr" rtl="true">
+              <a:lnSpc>
+                <a:spcPts val="2809"/>
+              </a:lnSpc>
+            </a:pPr>
+          </a:p>
+          <a:p>
+            <a:pPr algn="ctr" rtl="true">
+              <a:lnSpc>
+                <a:spcPts val="2809"/>
+              </a:lnSpc>
+              <a:spcBef>
+                <a:spcPct val="0"/>
+              </a:spcBef>
+            </a:pPr>
+          </a:p>
+        </p:txBody>
+      </p:sp>
+      <p:sp>
+        <p:nvSpPr>
+          <p:cNvPr name="Freeform 19" id="19"/>
+          <p:cNvSpPr/>
+          <p:nvPr/>
+        </p:nvSpPr>
+        <p:spPr>
+          <a:xfrm flipH="false" flipV="true" rot="10530646">
+            <a:off x="14924982" y="-456912"/>
+            <a:ext cx="6157558" cy="6157558"/>
+          </a:xfrm>
+          <a:custGeom>
+            <a:avLst/>
+            <a:gdLst/>
+            <a:ahLst/>
+            <a:cxnLst/>
+            <a:rect r="r" b="b" t="t" l="l"/>
+            <a:pathLst>
+              <a:path h="6157558" w="6157558">
+                <a:moveTo>
+                  <a:pt x="0" y="6157558"/>
+                </a:moveTo>
+                <a:lnTo>
+                  <a:pt x="6157558" y="6157558"/>
+                </a:lnTo>
+                <a:lnTo>
+                  <a:pt x="6157558" y="0"/>
+                </a:lnTo>
+                <a:lnTo>
+                  <a:pt x="0" y="0"/>
+                </a:lnTo>
+                <a:lnTo>
+                  <a:pt x="0" y="6157558"/>
+                </a:lnTo>
+                <a:close/>
+              </a:path>
+            </a:pathLst>
+          </a:custGeom>
+          <a:blipFill>
+            <a:blip r:embed="rId2">
+              <a:extLst>
+                <a:ext uri="{96DAC541-7B7A-43D3-8B79-37D633B846F1}">
+                  <asvg:svgBlip xmlns:asvg="http://schemas.microsoft.com/office/drawing/2016/SVG/main" r:embed="rId3"/>
+                </a:ext>
+              </a:extLst>
+            </a:blip>
+            <a:stretch>
+              <a:fillRect l="0" t="0" r="0" b="0"/>
+            </a:stretch>
+          </a:blipFill>
+        </p:spPr>
+      </p:sp>
+      <p:sp>
+        <p:nvSpPr>
+          <p:cNvPr name="TextBox 20" id="20"/>
+          <p:cNvSpPr txBox="true"/>
+          <p:nvPr/>
+        </p:nvSpPr>
+        <p:spPr>
+          <a:xfrm rot="0">
+            <a:off x="17259300" y="9182100"/>
+            <a:ext cx="152400" cy="228600"/>
+          </a:xfrm>
+          <a:prstGeom prst="rect">
+            <a:avLst/>
+          </a:prstGeom>
+        </p:spPr>
+        <p:txBody>
+          <a:bodyPr anchor="t" rtlCol="false" tIns="0" lIns="0" bIns="0" rIns="0" wrap="none">
+            <a:spAutoFit/>
+          </a:bodyPr>
+          <a:lstStyle/>
+          <a:p>
+            <a:pPr algn="ctr">
+              <a:lnSpc>
+                <a:spcPts val="6160"/>
+              </a:lnSpc>
+              <a:spcBef>
+                <a:spcPct val="0"/>
+              </a:spcBef>
+            </a:pPr>
+            <a:r>
+              <a:rPr lang="en-US" sz="4400">
+                <a:solidFill>
+                  <a:srgbClr val="000000"/>
+                </a:solidFill>
+                <a:latin typeface="Suez One"/>
+                <a:ea typeface="Suez One"/>
+                <a:cs typeface="Suez One"/>
+                <a:sym typeface="Suez One"/>
+              </a:rPr>
+              <a:t>5</a:t>
+            </a:r>
           </a:p>
         </p:txBody>
       </p:sp>
@@ -15509,7 +18331,7 @@
         </p:nvSpPr>
         <p:spPr>
           <a:xfrm flipH="false" flipV="false" rot="0">
-            <a:off x="14201863" y="4816404"/>
+            <a:off x="14420938" y="5153025"/>
             <a:ext cx="2308947" cy="2650154"/>
           </a:xfrm>
           <a:custGeom>
@@ -15623,8 +18445,8 @@
         </p:nvSpPr>
         <p:spPr>
           <a:xfrm rot="0">
-            <a:off x="1028700" y="4902129"/>
-            <a:ext cx="13173163" cy="1725930"/>
+            <a:off x="787218" y="4902129"/>
+            <a:ext cx="14066645" cy="1725930"/>
           </a:xfrm>
           <a:prstGeom prst="rect">
             <a:avLst/>
@@ -15657,7 +18479,7 @@
             </a:r>
           </a:p>
           <a:p>
-            <a:pPr algn="just">
+            <a:pPr algn="l">
               <a:lnSpc>
                 <a:spcPts val="4619"/>
               </a:lnSpc>
@@ -15672,7 +18494,7 @@
                 <a:cs typeface="Open Sans 1"/>
                 <a:sym typeface="Open Sans 1"/>
               </a:rPr>
-              <a:t>Reviewed current tools and found they lack personalized, cohesive care, leading to the development of a unified platform.</a:t>
+              <a:t>Reviewed current tools and found they lack personalized, comprehensive care, leading to the development of a unified platform.</a:t>
             </a:r>
           </a:p>
         </p:txBody>
@@ -15686,7 +18508,7 @@
         <p:spPr>
           <a:xfrm rot="0">
             <a:off x="1028700" y="7057716"/>
-            <a:ext cx="13173163" cy="1725930"/>
+            <a:ext cx="13462941" cy="1725930"/>
           </a:xfrm>
           <a:prstGeom prst="rect">
             <a:avLst/>
@@ -15719,7 +18541,7 @@
             </a:r>
           </a:p>
           <a:p>
-            <a:pPr algn="just">
+            <a:pPr algn="l">
               <a:lnSpc>
                 <a:spcPts val="4619"/>
               </a:lnSpc>
@@ -15734,7 +18556,51 @@
                 <a:cs typeface="Open Sans 1"/>
                 <a:sym typeface="Open Sans 1"/>
               </a:rPr>
-              <a:t>Designed a solution emphasizing simplicity, accessibility, and tailored recommendations to empower families and caregivers.</a:t>
+              <a:t>Designed a solution emphasizing simplicity, accessibility, and personalized recommendations to empower families and caregivers.</a:t>
+            </a:r>
+          </a:p>
+        </p:txBody>
+      </p:sp>
+      <p:sp>
+        <p:nvSpPr>
+          <p:cNvPr name="TextBox 8" id="8"/>
+          <p:cNvSpPr txBox="true"/>
+          <p:nvPr/>
+        </p:nvSpPr>
+        <p:spPr>
+          <a:xfrm rot="0">
+            <a:off x="17259300" y="9182100"/>
+            <a:ext cx="152400" cy="228600"/>
+          </a:xfrm>
+          <a:prstGeom prst="rect">
+            <a:avLst/>
+          </a:prstGeom>
+        </p:spPr>
+        <p:txBody>
+          <a:bodyPr anchor="t" rtlCol="false" tIns="0" lIns="0" bIns="0" rIns="0" wrap="none">
+            <a:spAutoFit/>
+          </a:bodyPr>
+          <a:lstStyle/>
+          <a:p>
+            <a:pPr algn="ctr">
+              <a:lnSpc>
+                <a:spcPts val="6160"/>
+              </a:lnSpc>
+              <a:spcBef>
+                <a:spcPct val="0"/>
+              </a:spcBef>
+            </a:pPr>
+            <a:r>
+              <a:rPr lang="en-US" sz="4400">
+                <a:solidFill>
+                  <a:srgbClr val="000000"/>
+                </a:solidFill>
+                <a:latin typeface="Suez One"/>
+                <a:ea typeface="Suez One"/>
+                <a:cs typeface="Suez One"/>
+                <a:sym typeface="Suez One"/>
+              </a:rPr>
+              <a:t>6</a:t>
             </a:r>
           </a:p>
         </p:txBody>
@@ -15748,6 +18614,860 @@
 </file>
 
 <file path=ppt/slides/slide7.xml><?xml version="1.0" encoding="utf-8"?>
+<p:sld xmlns:p="http://schemas.openxmlformats.org/presentationml/2006/main" xmlns:a="http://schemas.openxmlformats.org/drawingml/2006/main" xmlns:r="http://schemas.openxmlformats.org/officeDocument/2006/relationships">
+  <p:cSld>
+    <p:spTree>
+      <p:nvGrpSpPr>
+        <p:cNvPr id="1" name=""/>
+        <p:cNvGrpSpPr/>
+        <p:nvPr/>
+      </p:nvGrpSpPr>
+      <p:grpSpPr>
+        <a:xfrm>
+          <a:off x="0" y="0"/>
+          <a:ext cx="0" cy="0"/>
+          <a:chOff x="0" y="0"/>
+          <a:chExt cx="0" cy="0"/>
+        </a:xfrm>
+      </p:grpSpPr>
+      <p:grpSp>
+        <p:nvGrpSpPr>
+          <p:cNvPr name="Group 2" id="2"/>
+          <p:cNvGrpSpPr/>
+          <p:nvPr/>
+        </p:nvGrpSpPr>
+        <p:grpSpPr>
+          <a:xfrm rot="0">
+            <a:off x="2764867" y="-699889"/>
+            <a:ext cx="16931738" cy="1533898"/>
+            <a:chOff x="0" y="0"/>
+            <a:chExt cx="4459388" cy="403990"/>
+          </a:xfrm>
+        </p:grpSpPr>
+        <p:sp>
+          <p:nvSpPr>
+            <p:cNvPr name="Freeform 3" id="3"/>
+            <p:cNvSpPr/>
+            <p:nvPr/>
+          </p:nvSpPr>
+          <p:spPr>
+            <a:xfrm flipH="false" flipV="false" rot="0">
+              <a:off x="0" y="0"/>
+              <a:ext cx="4459388" cy="403990"/>
+            </a:xfrm>
+            <a:custGeom>
+              <a:avLst/>
+              <a:gdLst/>
+              <a:ahLst/>
+              <a:cxnLst/>
+              <a:rect r="r" b="b" t="t" l="l"/>
+              <a:pathLst>
+                <a:path h="403990" w="4459388">
+                  <a:moveTo>
+                    <a:pt x="0" y="0"/>
+                  </a:moveTo>
+                  <a:lnTo>
+                    <a:pt x="4459388" y="0"/>
+                  </a:lnTo>
+                  <a:lnTo>
+                    <a:pt x="4459388" y="403990"/>
+                  </a:lnTo>
+                  <a:lnTo>
+                    <a:pt x="0" y="403990"/>
+                  </a:lnTo>
+                  <a:close/>
+                </a:path>
+              </a:pathLst>
+            </a:custGeom>
+            <a:solidFill>
+              <a:srgbClr val="034383"/>
+            </a:solidFill>
+          </p:spPr>
+        </p:sp>
+        <p:sp>
+          <p:nvSpPr>
+            <p:cNvPr name="TextBox 4" id="4"/>
+            <p:cNvSpPr txBox="true"/>
+            <p:nvPr/>
+          </p:nvSpPr>
+          <p:spPr>
+            <a:xfrm>
+              <a:off x="0" y="-38100"/>
+              <a:ext cx="4459388" cy="442090"/>
+            </a:xfrm>
+            <a:prstGeom prst="rect">
+              <a:avLst/>
+            </a:prstGeom>
+          </p:spPr>
+          <p:txBody>
+            <a:bodyPr anchor="ctr" rtlCol="false" tIns="50800" lIns="50800" bIns="50800" rIns="50800"/>
+            <a:lstStyle/>
+            <a:p>
+              <a:pPr algn="ctr">
+                <a:lnSpc>
+                  <a:spcPts val="3295"/>
+                </a:lnSpc>
+              </a:pPr>
+            </a:p>
+          </p:txBody>
+        </p:sp>
+      </p:grpSp>
+      <p:grpSp>
+        <p:nvGrpSpPr>
+          <p:cNvPr name="Group 5" id="5"/>
+          <p:cNvGrpSpPr/>
+          <p:nvPr/>
+        </p:nvGrpSpPr>
+        <p:grpSpPr>
+          <a:xfrm rot="-5400000">
+            <a:off x="-5015057" y="4582096"/>
+            <a:ext cx="10698089" cy="1533898"/>
+            <a:chOff x="0" y="0"/>
+            <a:chExt cx="2817604" cy="403990"/>
+          </a:xfrm>
+        </p:grpSpPr>
+        <p:sp>
+          <p:nvSpPr>
+            <p:cNvPr name="Freeform 6" id="6"/>
+            <p:cNvSpPr/>
+            <p:nvPr/>
+          </p:nvSpPr>
+          <p:spPr>
+            <a:xfrm flipH="false" flipV="false" rot="0">
+              <a:off x="0" y="0"/>
+              <a:ext cx="2817604" cy="403990"/>
+            </a:xfrm>
+            <a:custGeom>
+              <a:avLst/>
+              <a:gdLst/>
+              <a:ahLst/>
+              <a:cxnLst/>
+              <a:rect r="r" b="b" t="t" l="l"/>
+              <a:pathLst>
+                <a:path h="403990" w="2817604">
+                  <a:moveTo>
+                    <a:pt x="0" y="0"/>
+                  </a:moveTo>
+                  <a:lnTo>
+                    <a:pt x="2817604" y="0"/>
+                  </a:lnTo>
+                  <a:lnTo>
+                    <a:pt x="2817604" y="403990"/>
+                  </a:lnTo>
+                  <a:lnTo>
+                    <a:pt x="0" y="403990"/>
+                  </a:lnTo>
+                  <a:close/>
+                </a:path>
+              </a:pathLst>
+            </a:custGeom>
+            <a:solidFill>
+              <a:srgbClr val="034383"/>
+            </a:solidFill>
+          </p:spPr>
+        </p:sp>
+        <p:sp>
+          <p:nvSpPr>
+            <p:cNvPr name="TextBox 7" id="7"/>
+            <p:cNvSpPr txBox="true"/>
+            <p:nvPr/>
+          </p:nvSpPr>
+          <p:spPr>
+            <a:xfrm>
+              <a:off x="0" y="-38100"/>
+              <a:ext cx="2817604" cy="442090"/>
+            </a:xfrm>
+            <a:prstGeom prst="rect">
+              <a:avLst/>
+            </a:prstGeom>
+          </p:spPr>
+          <p:txBody>
+            <a:bodyPr anchor="ctr" rtlCol="false" tIns="50800" lIns="50800" bIns="50800" rIns="50800"/>
+            <a:lstStyle/>
+            <a:p>
+              <a:pPr algn="ctr">
+                <a:lnSpc>
+                  <a:spcPts val="3295"/>
+                </a:lnSpc>
+              </a:pPr>
+            </a:p>
+          </p:txBody>
+        </p:sp>
+      </p:grpSp>
+      <p:sp>
+        <p:nvSpPr>
+          <p:cNvPr name="Freeform 8" id="8"/>
+          <p:cNvSpPr/>
+          <p:nvPr/>
+        </p:nvSpPr>
+        <p:spPr>
+          <a:xfrm flipH="false" flipV="false" rot="0">
+            <a:off x="-47625" y="-163489"/>
+            <a:ext cx="4114800" cy="4114800"/>
+          </a:xfrm>
+          <a:custGeom>
+            <a:avLst/>
+            <a:gdLst/>
+            <a:ahLst/>
+            <a:cxnLst/>
+            <a:rect r="r" b="b" t="t" l="l"/>
+            <a:pathLst>
+              <a:path h="4114800" w="4114800">
+                <a:moveTo>
+                  <a:pt x="0" y="0"/>
+                </a:moveTo>
+                <a:lnTo>
+                  <a:pt x="4114800" y="0"/>
+                </a:lnTo>
+                <a:lnTo>
+                  <a:pt x="4114800" y="4114800"/>
+                </a:lnTo>
+                <a:lnTo>
+                  <a:pt x="0" y="4114800"/>
+                </a:lnTo>
+                <a:lnTo>
+                  <a:pt x="0" y="0"/>
+                </a:lnTo>
+                <a:close/>
+              </a:path>
+            </a:pathLst>
+          </a:custGeom>
+          <a:blipFill>
+            <a:blip r:embed="rId2">
+              <a:extLst>
+                <a:ext uri="{96DAC541-7B7A-43D3-8B79-37D633B846F1}">
+                  <asvg:svgBlip xmlns:asvg="http://schemas.microsoft.com/office/drawing/2016/SVG/main" r:embed="rId3"/>
+                </a:ext>
+              </a:extLst>
+            </a:blip>
+            <a:stretch>
+              <a:fillRect l="0" t="0" r="0" b="0"/>
+            </a:stretch>
+          </a:blipFill>
+          <a:ln cap="sq">
+            <a:noFill/>
+            <a:prstDash val="solid"/>
+            <a:miter/>
+          </a:ln>
+        </p:spPr>
+      </p:sp>
+      <p:sp>
+        <p:nvSpPr>
+          <p:cNvPr name="Freeform 9" id="9"/>
+          <p:cNvSpPr/>
+          <p:nvPr/>
+        </p:nvSpPr>
+        <p:spPr>
+          <a:xfrm flipH="false" flipV="false" rot="-10800000">
+            <a:off x="15306675" y="6583289"/>
+            <a:ext cx="4114800" cy="4114800"/>
+          </a:xfrm>
+          <a:custGeom>
+            <a:avLst/>
+            <a:gdLst/>
+            <a:ahLst/>
+            <a:cxnLst/>
+            <a:rect r="r" b="b" t="t" l="l"/>
+            <a:pathLst>
+              <a:path h="4114800" w="4114800">
+                <a:moveTo>
+                  <a:pt x="0" y="0"/>
+                </a:moveTo>
+                <a:lnTo>
+                  <a:pt x="4114800" y="0"/>
+                </a:lnTo>
+                <a:lnTo>
+                  <a:pt x="4114800" y="4114800"/>
+                </a:lnTo>
+                <a:lnTo>
+                  <a:pt x="0" y="4114800"/>
+                </a:lnTo>
+                <a:lnTo>
+                  <a:pt x="0" y="0"/>
+                </a:lnTo>
+                <a:close/>
+              </a:path>
+            </a:pathLst>
+          </a:custGeom>
+          <a:blipFill>
+            <a:blip r:embed="rId2">
+              <a:extLst>
+                <a:ext uri="{96DAC541-7B7A-43D3-8B79-37D633B846F1}">
+                  <asvg:svgBlip xmlns:asvg="http://schemas.microsoft.com/office/drawing/2016/SVG/main" r:embed="rId3"/>
+                </a:ext>
+              </a:extLst>
+            </a:blip>
+            <a:stretch>
+              <a:fillRect l="0" t="0" r="0" b="0"/>
+            </a:stretch>
+          </a:blipFill>
+          <a:ln cap="sq">
+            <a:noFill/>
+            <a:prstDash val="solid"/>
+            <a:miter/>
+          </a:ln>
+        </p:spPr>
+      </p:sp>
+      <p:sp>
+        <p:nvSpPr>
+          <p:cNvPr name="Freeform 10" id="10"/>
+          <p:cNvSpPr/>
+          <p:nvPr/>
+        </p:nvSpPr>
+        <p:spPr>
+          <a:xfrm flipH="false" flipV="false" rot="0">
+            <a:off x="13727978" y="3029091"/>
+            <a:ext cx="4243973" cy="2986696"/>
+          </a:xfrm>
+          <a:custGeom>
+            <a:avLst/>
+            <a:gdLst/>
+            <a:ahLst/>
+            <a:cxnLst/>
+            <a:rect r="r" b="b" t="t" l="l"/>
+            <a:pathLst>
+              <a:path h="2986696" w="4243973">
+                <a:moveTo>
+                  <a:pt x="0" y="0"/>
+                </a:moveTo>
+                <a:lnTo>
+                  <a:pt x="4243973" y="0"/>
+                </a:lnTo>
+                <a:lnTo>
+                  <a:pt x="4243973" y="2986696"/>
+                </a:lnTo>
+                <a:lnTo>
+                  <a:pt x="0" y="2986696"/>
+                </a:lnTo>
+                <a:lnTo>
+                  <a:pt x="0" y="0"/>
+                </a:lnTo>
+                <a:close/>
+              </a:path>
+            </a:pathLst>
+          </a:custGeom>
+          <a:blipFill>
+            <a:blip r:embed="rId4">
+              <a:extLst>
+                <a:ext uri="{96DAC541-7B7A-43D3-8B79-37D633B846F1}">
+                  <asvg:svgBlip xmlns:asvg="http://schemas.microsoft.com/office/drawing/2016/SVG/main" r:embed="rId5"/>
+                </a:ext>
+              </a:extLst>
+            </a:blip>
+            <a:stretch>
+              <a:fillRect l="0" t="0" r="0" b="0"/>
+            </a:stretch>
+          </a:blipFill>
+        </p:spPr>
+      </p:sp>
+      <p:sp>
+        <p:nvSpPr>
+          <p:cNvPr name="TextBox 11" id="11"/>
+          <p:cNvSpPr txBox="true"/>
+          <p:nvPr/>
+        </p:nvSpPr>
+        <p:spPr>
+          <a:xfrm rot="0">
+            <a:off x="6380591" y="1107773"/>
+            <a:ext cx="15584786" cy="949325"/>
+          </a:xfrm>
+          <a:prstGeom prst="rect">
+            <a:avLst/>
+          </a:prstGeom>
+        </p:spPr>
+        <p:txBody>
+          <a:bodyPr anchor="t" rtlCol="false" tIns="0" lIns="0" bIns="0" rIns="0">
+            <a:spAutoFit/>
+          </a:bodyPr>
+          <a:lstStyle/>
+          <a:p>
+            <a:pPr algn="l">
+              <a:lnSpc>
+                <a:spcPts val="7150"/>
+              </a:lnSpc>
+            </a:pPr>
+            <a:r>
+              <a:rPr lang="en-US" b="true" sz="6500">
+                <a:solidFill>
+                  <a:srgbClr val="034383"/>
+                </a:solidFill>
+                <a:latin typeface="Ubuntu Bold"/>
+                <a:ea typeface="Ubuntu Bold"/>
+                <a:cs typeface="Ubuntu Bold"/>
+                <a:sym typeface="Ubuntu Bold"/>
+              </a:rPr>
+              <a:t>INTERVIEW </a:t>
+            </a:r>
+          </a:p>
+        </p:txBody>
+      </p:sp>
+      <p:sp>
+        <p:nvSpPr>
+          <p:cNvPr name="TextBox 12" id="12"/>
+          <p:cNvSpPr txBox="true"/>
+          <p:nvPr/>
+        </p:nvSpPr>
+        <p:spPr>
+          <a:xfrm rot="0">
+            <a:off x="2168051" y="5733880"/>
+            <a:ext cx="6561880" cy="311876"/>
+          </a:xfrm>
+          <a:prstGeom prst="rect">
+            <a:avLst/>
+          </a:prstGeom>
+        </p:spPr>
+        <p:txBody>
+          <a:bodyPr anchor="t" rtlCol="false" tIns="0" lIns="0" bIns="0" rIns="0">
+            <a:spAutoFit/>
+          </a:bodyPr>
+          <a:lstStyle/>
+          <a:p>
+            <a:pPr algn="l" marL="458791" indent="-229396" lvl="1">
+              <a:lnSpc>
+                <a:spcPts val="2337"/>
+              </a:lnSpc>
+              <a:buFont typeface="Arial"/>
+              <a:buChar char="•"/>
+            </a:pPr>
+            <a:r>
+              <a:rPr lang="en-US" b="true" sz="2125">
+                <a:solidFill>
+                  <a:srgbClr val="FFFFFF"/>
+                </a:solidFill>
+                <a:latin typeface="Ubuntu Bold"/>
+                <a:ea typeface="Ubuntu Bold"/>
+                <a:cs typeface="Ubuntu Bold"/>
+                <a:sym typeface="Ubuntu Bold"/>
+              </a:rPr>
+              <a:t>AI INTEGRATION</a:t>
+            </a:r>
+          </a:p>
+        </p:txBody>
+      </p:sp>
+      <p:sp>
+        <p:nvSpPr>
+          <p:cNvPr name="TextBox 13" id="13"/>
+          <p:cNvSpPr txBox="true"/>
+          <p:nvPr/>
+        </p:nvSpPr>
+        <p:spPr>
+          <a:xfrm rot="0">
+            <a:off x="1417419" y="3362023"/>
+            <a:ext cx="7002661" cy="797451"/>
+          </a:xfrm>
+          <a:prstGeom prst="rect">
+            <a:avLst/>
+          </a:prstGeom>
+        </p:spPr>
+        <p:txBody>
+          <a:bodyPr anchor="t" rtlCol="false" tIns="0" lIns="0" bIns="0" rIns="0">
+            <a:spAutoFit/>
+          </a:bodyPr>
+          <a:lstStyle/>
+          <a:p>
+            <a:pPr algn="l" marL="508289" indent="-254145" lvl="1">
+              <a:lnSpc>
+                <a:spcPts val="3295"/>
+              </a:lnSpc>
+              <a:buFont typeface="Arial"/>
+              <a:buChar char="•"/>
+            </a:pPr>
+            <a:r>
+              <a:rPr lang="en-US" sz="2354">
+                <a:solidFill>
+                  <a:srgbClr val="034383"/>
+                </a:solidFill>
+                <a:latin typeface="Open Sans 1"/>
+                <a:ea typeface="Open Sans 1"/>
+                <a:cs typeface="Open Sans 1"/>
+                <a:sym typeface="Open Sans 1"/>
+              </a:rPr>
+              <a:t>What types of treatments were offered to you?</a:t>
+            </a:r>
+          </a:p>
+          <a:p>
+            <a:pPr algn="l" marL="1016578" indent="-338859" lvl="2">
+              <a:lnSpc>
+                <a:spcPts val="3295"/>
+              </a:lnSpc>
+              <a:buFont typeface="Arial"/>
+              <a:buChar char="⚬"/>
+            </a:pPr>
+            <a:r>
+              <a:rPr lang="en-US" sz="2354">
+                <a:solidFill>
+                  <a:srgbClr val="000000"/>
+                </a:solidFill>
+                <a:latin typeface="Open Sans 1"/>
+                <a:ea typeface="Open Sans 1"/>
+                <a:cs typeface="Open Sans 1"/>
+                <a:sym typeface="Open Sans 1"/>
+              </a:rPr>
+              <a:t>A nutritionist and antacid medication.</a:t>
+            </a:r>
+          </a:p>
+        </p:txBody>
+      </p:sp>
+      <p:sp>
+        <p:nvSpPr>
+          <p:cNvPr name="TextBox 14" id="14"/>
+          <p:cNvSpPr txBox="true"/>
+          <p:nvPr/>
+        </p:nvSpPr>
+        <p:spPr>
+          <a:xfrm rot="0">
+            <a:off x="1417419" y="4730974"/>
+            <a:ext cx="11403926" cy="797451"/>
+          </a:xfrm>
+          <a:prstGeom prst="rect">
+            <a:avLst/>
+          </a:prstGeom>
+        </p:spPr>
+        <p:txBody>
+          <a:bodyPr anchor="t" rtlCol="false" tIns="0" lIns="0" bIns="0" rIns="0">
+            <a:spAutoFit/>
+          </a:bodyPr>
+          <a:lstStyle/>
+          <a:p>
+            <a:pPr algn="l" marL="508289" indent="-254145" lvl="1">
+              <a:lnSpc>
+                <a:spcPts val="3295"/>
+              </a:lnSpc>
+              <a:buFont typeface="Arial"/>
+              <a:buChar char="•"/>
+            </a:pPr>
+            <a:r>
+              <a:rPr lang="en-US" sz="2354">
+                <a:solidFill>
+                  <a:srgbClr val="034383"/>
+                </a:solidFill>
+                <a:latin typeface="Open Sans 1"/>
+                <a:ea typeface="Open Sans 1"/>
+                <a:cs typeface="Open Sans 1"/>
+                <a:sym typeface="Open Sans 1"/>
+              </a:rPr>
+              <a:t>Were there any dietary changes following the diagnosis? If so, what were they?</a:t>
+            </a:r>
+          </a:p>
+          <a:p>
+            <a:pPr algn="l" marL="1016578" indent="-338859" lvl="2">
+              <a:lnSpc>
+                <a:spcPts val="3295"/>
+              </a:lnSpc>
+              <a:buFont typeface="Arial"/>
+              <a:buChar char="⚬"/>
+            </a:pPr>
+            <a:r>
+              <a:rPr lang="en-US" sz="2354">
+                <a:solidFill>
+                  <a:srgbClr val="000000"/>
+                </a:solidFill>
+                <a:latin typeface="Open Sans 1"/>
+                <a:ea typeface="Open Sans 1"/>
+                <a:cs typeface="Open Sans 1"/>
+                <a:sym typeface="Open Sans 1"/>
+              </a:rPr>
+              <a:t>I tried to create a high-calorie, high-protein meal plan for him.</a:t>
+            </a:r>
+          </a:p>
+        </p:txBody>
+      </p:sp>
+      <p:sp>
+        <p:nvSpPr>
+          <p:cNvPr name="TextBox 15" id="15"/>
+          <p:cNvSpPr txBox="true"/>
+          <p:nvPr/>
+        </p:nvSpPr>
+        <p:spPr>
+          <a:xfrm rot="0">
+            <a:off x="1417419" y="6031076"/>
+            <a:ext cx="12554099" cy="797451"/>
+          </a:xfrm>
+          <a:prstGeom prst="rect">
+            <a:avLst/>
+          </a:prstGeom>
+        </p:spPr>
+        <p:txBody>
+          <a:bodyPr anchor="t" rtlCol="false" tIns="0" lIns="0" bIns="0" rIns="0">
+            <a:spAutoFit/>
+          </a:bodyPr>
+          <a:lstStyle/>
+          <a:p>
+            <a:pPr algn="l" marL="508289" indent="-254145" lvl="1">
+              <a:lnSpc>
+                <a:spcPts val="3295"/>
+              </a:lnSpc>
+              <a:buFont typeface="Arial"/>
+              <a:buChar char="•"/>
+            </a:pPr>
+            <a:r>
+              <a:rPr lang="en-US" sz="2354">
+                <a:solidFill>
+                  <a:srgbClr val="034383"/>
+                </a:solidFill>
+                <a:latin typeface="Open Sans 1"/>
+                <a:ea typeface="Open Sans 1"/>
+                <a:cs typeface="Open Sans 1"/>
+                <a:sym typeface="Open Sans 1"/>
+              </a:rPr>
+              <a:t>Does the child engage in physical activity? If so, what types of sports is he willing to do?</a:t>
+            </a:r>
+          </a:p>
+          <a:p>
+            <a:pPr algn="l" marL="1016578" indent="-338859" lvl="2">
+              <a:lnSpc>
+                <a:spcPts val="3295"/>
+              </a:lnSpc>
+              <a:buFont typeface="Arial"/>
+              <a:buChar char="⚬"/>
+            </a:pPr>
+            <a:r>
+              <a:rPr lang="en-US" sz="2354">
+                <a:solidFill>
+                  <a:srgbClr val="000000"/>
+                </a:solidFill>
+                <a:latin typeface="Open Sans 1"/>
+                <a:ea typeface="Open Sans 1"/>
+                <a:cs typeface="Open Sans 1"/>
+                <a:sym typeface="Open Sans 1"/>
+              </a:rPr>
+              <a:t>Fitness training. He does not want to do activities that are too difficult.</a:t>
+            </a:r>
+          </a:p>
+        </p:txBody>
+      </p:sp>
+      <p:sp>
+        <p:nvSpPr>
+          <p:cNvPr name="TextBox 16" id="16"/>
+          <p:cNvSpPr txBox="true"/>
+          <p:nvPr/>
+        </p:nvSpPr>
+        <p:spPr>
+          <a:xfrm rot="0">
+            <a:off x="1417419" y="7400027"/>
+            <a:ext cx="14789705" cy="797451"/>
+          </a:xfrm>
+          <a:prstGeom prst="rect">
+            <a:avLst/>
+          </a:prstGeom>
+        </p:spPr>
+        <p:txBody>
+          <a:bodyPr anchor="t" rtlCol="false" tIns="0" lIns="0" bIns="0" rIns="0">
+            <a:spAutoFit/>
+          </a:bodyPr>
+          <a:lstStyle/>
+          <a:p>
+            <a:pPr algn="l" marL="508289" indent="-254145" lvl="1">
+              <a:lnSpc>
+                <a:spcPts val="3295"/>
+              </a:lnSpc>
+              <a:buFont typeface="Arial"/>
+              <a:buChar char="•"/>
+            </a:pPr>
+            <a:r>
+              <a:rPr lang="en-US" sz="2354">
+                <a:solidFill>
+                  <a:srgbClr val="034383"/>
+                </a:solidFill>
+                <a:latin typeface="Open Sans 1"/>
+                <a:ea typeface="Open Sans 1"/>
+                <a:cs typeface="Open Sans 1"/>
+                <a:sym typeface="Open Sans 1"/>
+              </a:rPr>
+              <a:t>What functions or features would you expect to find in a digital system that assists with FTT treatment?</a:t>
+            </a:r>
+          </a:p>
+          <a:p>
+            <a:pPr algn="l" marL="1016578" indent="-338859" lvl="2">
+              <a:lnSpc>
+                <a:spcPts val="3295"/>
+              </a:lnSpc>
+              <a:buFont typeface="Arial"/>
+              <a:buChar char="⚬"/>
+            </a:pPr>
+            <a:r>
+              <a:rPr lang="en-US" sz="2354">
+                <a:solidFill>
+                  <a:srgbClr val="000000"/>
+                </a:solidFill>
+                <a:latin typeface="Open Sans 1"/>
+                <a:ea typeface="Open Sans 1"/>
+                <a:cs typeface="Open Sans 1"/>
+                <a:sym typeface="Open Sans 1"/>
+              </a:rPr>
+              <a:t>Tracking percentile changes, recommendations to encourage appetite.</a:t>
+            </a:r>
+          </a:p>
+        </p:txBody>
+      </p:sp>
+      <p:sp>
+        <p:nvSpPr>
+          <p:cNvPr name="TextBox 17" id="17"/>
+          <p:cNvSpPr txBox="true"/>
+          <p:nvPr/>
+        </p:nvSpPr>
+        <p:spPr>
+          <a:xfrm rot="0">
+            <a:off x="1417419" y="8768979"/>
+            <a:ext cx="15678150" cy="1207026"/>
+          </a:xfrm>
+          <a:prstGeom prst="rect">
+            <a:avLst/>
+          </a:prstGeom>
+        </p:spPr>
+        <p:txBody>
+          <a:bodyPr anchor="t" rtlCol="false" tIns="0" lIns="0" bIns="0" rIns="0">
+            <a:spAutoFit/>
+          </a:bodyPr>
+          <a:lstStyle/>
+          <a:p>
+            <a:pPr algn="l" marL="508289" indent="-254145" lvl="1">
+              <a:lnSpc>
+                <a:spcPts val="3295"/>
+              </a:lnSpc>
+              <a:buFont typeface="Arial"/>
+              <a:buChar char="•"/>
+            </a:pPr>
+            <a:r>
+              <a:rPr lang="en-US" sz="2354">
+                <a:solidFill>
+                  <a:srgbClr val="034383"/>
+                </a:solidFill>
+                <a:latin typeface="Open Sans 1"/>
+                <a:ea typeface="Open Sans 1"/>
+                <a:cs typeface="Open Sans 1"/>
+                <a:sym typeface="Open Sans 1"/>
+              </a:rPr>
+              <a:t>If you could receive personalized recommendations from a digital system, what information would you want?</a:t>
+            </a:r>
+          </a:p>
+          <a:p>
+            <a:pPr algn="l" marL="1016578" indent="-338859" lvl="2">
+              <a:lnSpc>
+                <a:spcPts val="3295"/>
+              </a:lnSpc>
+              <a:buFont typeface="Arial"/>
+              <a:buChar char="⚬"/>
+            </a:pPr>
+            <a:r>
+              <a:rPr lang="en-US" sz="2354">
+                <a:solidFill>
+                  <a:srgbClr val="000000"/>
+                </a:solidFill>
+                <a:latin typeface="Open Sans 1"/>
+                <a:ea typeface="Open Sans 1"/>
+                <a:cs typeface="Open Sans 1"/>
+                <a:sym typeface="Open Sans 1"/>
+              </a:rPr>
+              <a:t>The child's percentiles and nutritional recommendations.</a:t>
+            </a:r>
+          </a:p>
+          <a:p>
+            <a:pPr algn="l">
+              <a:lnSpc>
+                <a:spcPts val="3295"/>
+              </a:lnSpc>
+            </a:pPr>
+          </a:p>
+        </p:txBody>
+      </p:sp>
+      <p:sp>
+        <p:nvSpPr>
+          <p:cNvPr name="TextBox 18" id="18"/>
+          <p:cNvSpPr txBox="true"/>
+          <p:nvPr/>
+        </p:nvSpPr>
+        <p:spPr>
+          <a:xfrm rot="0">
+            <a:off x="1684445" y="2241164"/>
+            <a:ext cx="12284781" cy="797451"/>
+          </a:xfrm>
+          <a:prstGeom prst="rect">
+            <a:avLst/>
+          </a:prstGeom>
+        </p:spPr>
+        <p:txBody>
+          <a:bodyPr anchor="t" rtlCol="false" tIns="0" lIns="0" bIns="0" rIns="0">
+            <a:spAutoFit/>
+          </a:bodyPr>
+          <a:lstStyle/>
+          <a:p>
+            <a:pPr algn="l">
+              <a:lnSpc>
+                <a:spcPts val="3295"/>
+              </a:lnSpc>
+              <a:spcBef>
+                <a:spcPct val="0"/>
+              </a:spcBef>
+            </a:pPr>
+            <a:r>
+              <a:rPr lang="en-US" b="true" sz="2354">
+                <a:solidFill>
+                  <a:srgbClr val="000000"/>
+                </a:solidFill>
+                <a:latin typeface="Open Sans 1 Bold"/>
+                <a:ea typeface="Open Sans 1 Bold"/>
+                <a:cs typeface="Open Sans 1 Bold"/>
+                <a:sym typeface="Open Sans 1 Bold"/>
+              </a:rPr>
+              <a:t>An interview we conducted with Dr. Natalie Levy Soskin as part of understanding the needs of a parent of a child with FTT.</a:t>
+            </a:r>
+          </a:p>
+        </p:txBody>
+      </p:sp>
+      <p:sp>
+        <p:nvSpPr>
+          <p:cNvPr name="TextBox 19" id="19"/>
+          <p:cNvSpPr txBox="true"/>
+          <p:nvPr/>
+        </p:nvSpPr>
+        <p:spPr>
+          <a:xfrm rot="0">
+            <a:off x="17259300" y="9182100"/>
+            <a:ext cx="152400" cy="228600"/>
+          </a:xfrm>
+          <a:prstGeom prst="rect">
+            <a:avLst/>
+          </a:prstGeom>
+        </p:spPr>
+        <p:txBody>
+          <a:bodyPr anchor="t" rtlCol="false" tIns="0" lIns="0" bIns="0" rIns="0" wrap="none">
+            <a:spAutoFit/>
+          </a:bodyPr>
+          <a:lstStyle/>
+          <a:p>
+            <a:pPr algn="ctr">
+              <a:lnSpc>
+                <a:spcPts val="6160"/>
+              </a:lnSpc>
+              <a:spcBef>
+                <a:spcPct val="0"/>
+              </a:spcBef>
+            </a:pPr>
+            <a:r>
+              <a:rPr lang="en-US" sz="4400">
+                <a:solidFill>
+                  <a:srgbClr val="000000"/>
+                </a:solidFill>
+                <a:latin typeface="Suez One"/>
+                <a:ea typeface="Suez One"/>
+                <a:cs typeface="Suez One"/>
+                <a:sym typeface="Suez One"/>
+              </a:rPr>
+              <a:t>7</a:t>
+            </a:r>
+          </a:p>
+        </p:txBody>
+      </p:sp>
+    </p:spTree>
+  </p:cSld>
+  <p:clrMapOvr>
+    <a:masterClrMapping/>
+  </p:clrMapOvr>
+</p:sld>
+</file>
+
+<file path=ppt/slides/slide8.xml><?xml version="1.0" encoding="utf-8"?>
 <p:sld xmlns:p="http://schemas.openxmlformats.org/presentationml/2006/main" xmlns:a="http://schemas.openxmlformats.org/drawingml/2006/main" xmlns:r="http://schemas.openxmlformats.org/officeDocument/2006/relationships">
   <p:cSld>
     <p:spTree>
@@ -16034,7 +19754,7 @@
         </p:nvSpPr>
         <p:spPr>
           <a:xfrm rot="0">
-            <a:off x="1892127" y="3105150"/>
+            <a:off x="1892127" y="3837011"/>
             <a:ext cx="14394181" cy="542925"/>
           </a:xfrm>
           <a:prstGeom prst="rect">
@@ -16077,8 +19797,8 @@
         </p:nvSpPr>
         <p:spPr>
           <a:xfrm rot="0">
-            <a:off x="2009775" y="4029075"/>
-            <a:ext cx="14394181" cy="2143125"/>
+            <a:off x="2009775" y="4570436"/>
+            <a:ext cx="14756403" cy="2143125"/>
           </a:xfrm>
           <a:prstGeom prst="rect">
             <a:avLst/>
@@ -16170,57 +19890,14 @@
                 <a:cs typeface="Ubuntu"/>
                 <a:sym typeface="Ubuntu"/>
               </a:rPr>
-              <a:t>Generate a tailored treatment plan, including diet and lifestyle changes</a:t>
+              <a:t>Generate a personalized treatment plan, including diet and lifestyle changes.</a:t>
             </a:r>
           </a:p>
         </p:txBody>
       </p:sp>
       <p:sp>
         <p:nvSpPr>
-          <p:cNvPr name="TextBox 12" id="12"/>
-          <p:cNvSpPr txBox="true"/>
-          <p:nvPr/>
-        </p:nvSpPr>
-        <p:spPr>
-          <a:xfrm rot="0">
-            <a:off x="1945342" y="6553200"/>
-            <a:ext cx="14079588" cy="1076325"/>
-          </a:xfrm>
-          <a:prstGeom prst="rect">
-            <a:avLst/>
-          </a:prstGeom>
-        </p:spPr>
-        <p:txBody>
-          <a:bodyPr anchor="t" rtlCol="false" tIns="0" lIns="0" bIns="0" rIns="0">
-            <a:spAutoFit/>
-          </a:bodyPr>
-          <a:lstStyle/>
-          <a:p>
-            <a:pPr algn="l" marL="647700" indent="-323850" lvl="1">
-              <a:lnSpc>
-                <a:spcPts val="4200"/>
-              </a:lnSpc>
-              <a:buFont typeface="Arial"/>
-              <a:buChar char="•"/>
-            </a:pPr>
-            <a:r>
-              <a:rPr lang="en-US" sz="3000">
-                <a:solidFill>
-                  <a:srgbClr val="0D1D29"/>
-                </a:solidFill>
-                <a:latin typeface="Ubuntu"/>
-                <a:ea typeface="Ubuntu"/>
-                <a:cs typeface="Ubuntu"/>
-                <a:sym typeface="Ubuntu"/>
-              </a:rPr>
-              <a:t>This approach integrates structure, behavior, and functionality for clarity and precision.</a:t>
-            </a:r>
-          </a:p>
-        </p:txBody>
-      </p:sp>
-      <p:sp>
-        <p:nvSpPr>
-          <p:cNvPr name="Freeform 13" id="13"/>
+          <p:cNvPr name="Freeform 12" id="12"/>
           <p:cNvSpPr/>
           <p:nvPr/>
         </p:nvSpPr>
@@ -16275,6 +19952,50 @@
           </a:ln>
         </p:spPr>
       </p:sp>
+      <p:sp>
+        <p:nvSpPr>
+          <p:cNvPr name="TextBox 13" id="13"/>
+          <p:cNvSpPr txBox="true"/>
+          <p:nvPr/>
+        </p:nvSpPr>
+        <p:spPr>
+          <a:xfrm rot="0">
+            <a:off x="17259300" y="9182100"/>
+            <a:ext cx="152400" cy="228600"/>
+          </a:xfrm>
+          <a:prstGeom prst="rect">
+            <a:avLst/>
+          </a:prstGeom>
+        </p:spPr>
+        <p:txBody>
+          <a:bodyPr anchor="t" rtlCol="false" tIns="0" lIns="0" bIns="0" rIns="0" wrap="none">
+            <a:spAutoFit/>
+          </a:bodyPr>
+          <a:lstStyle/>
+          <a:p>
+            <a:pPr algn="ctr">
+              <a:lnSpc>
+                <a:spcPts val="6160"/>
+              </a:lnSpc>
+              <a:spcBef>
+                <a:spcPct val="0"/>
+              </a:spcBef>
+            </a:pPr>
+            <a:r>
+              <a:rPr lang="en-US" sz="4400">
+                <a:solidFill>
+                  <a:srgbClr val="000000"/>
+                </a:solidFill>
+                <a:latin typeface="Suez One"/>
+                <a:ea typeface="Suez One"/>
+                <a:cs typeface="Suez One"/>
+                <a:sym typeface="Suez One"/>
+              </a:rPr>
+              <a:t>8</a:t>
+            </a:r>
+          </a:p>
+        </p:txBody>
+      </p:sp>
     </p:spTree>
   </p:cSld>
   <p:clrMapOvr>
@@ -16283,7 +20004,7 @@
 </p:sld>
 </file>
 
-<file path=ppt/slides/slide8.xml><?xml version="1.0" encoding="utf-8"?>
+<file path=ppt/slides/slide9.xml><?xml version="1.0" encoding="utf-8"?>
 <p:sld xmlns:p="http://schemas.openxmlformats.org/presentationml/2006/main" xmlns:a="http://schemas.openxmlformats.org/drawingml/2006/main" xmlns:r="http://schemas.openxmlformats.org/officeDocument/2006/relationships">
   <p:cSld>
     <p:spTree>
@@ -17113,715 +20834,49 @@
           </a:p>
         </p:txBody>
       </p:sp>
-    </p:spTree>
-  </p:cSld>
-  <p:clrMapOvr>
-    <a:masterClrMapping/>
-  </p:clrMapOvr>
-</p:sld>
-</file>
-
-<file path=ppt/slides/slide9.xml><?xml version="1.0" encoding="utf-8"?>
-<p:sld xmlns:p="http://schemas.openxmlformats.org/presentationml/2006/main" xmlns:a="http://schemas.openxmlformats.org/drawingml/2006/main" xmlns:r="http://schemas.openxmlformats.org/officeDocument/2006/relationships">
-  <p:cSld>
-    <p:spTree>
-      <p:nvGrpSpPr>
-        <p:cNvPr id="1" name=""/>
-        <p:cNvGrpSpPr/>
-        <p:nvPr/>
-      </p:nvGrpSpPr>
-      <p:grpSpPr>
-        <a:xfrm>
-          <a:off x="0" y="0"/>
-          <a:ext cx="0" cy="0"/>
-          <a:chOff x="0" y="0"/>
-          <a:chExt cx="0" cy="0"/>
-        </a:xfrm>
-      </p:grpSpPr>
-      <p:sp>
-        <p:nvSpPr>
-          <p:cNvPr name="TextBox 2" id="2"/>
+      <p:sp>
+        <p:nvSpPr>
+          <p:cNvPr name="TextBox 21" id="21"/>
           <p:cNvSpPr txBox="true"/>
           <p:nvPr/>
         </p:nvSpPr>
         <p:spPr>
           <a:xfrm rot="0">
-            <a:off x="2009775" y="1438299"/>
-            <a:ext cx="15702433" cy="949325"/>
+            <a:off x="17259300" y="9182100"/>
+            <a:ext cx="152400" cy="228600"/>
           </a:xfrm>
           <a:prstGeom prst="rect">
             <a:avLst/>
           </a:prstGeom>
         </p:spPr>
         <p:txBody>
-          <a:bodyPr anchor="t" rtlCol="false" tIns="0" lIns="0" bIns="0" rIns="0">
+          <a:bodyPr anchor="t" rtlCol="false" tIns="0" lIns="0" bIns="0" rIns="0" wrap="none">
             <a:spAutoFit/>
           </a:bodyPr>
           <a:lstStyle/>
           <a:p>
-            <a:pPr algn="l">
+            <a:pPr algn="ctr">
               <a:lnSpc>
-                <a:spcPts val="7150"/>
-              </a:lnSpc>
-            </a:pPr>
-            <a:r>
-              <a:rPr lang="en-US" sz="6500" b="true">
-                <a:solidFill>
-                  <a:srgbClr val="034383"/>
-                </a:solidFill>
-                <a:latin typeface="Ubuntu Bold"/>
-                <a:ea typeface="Ubuntu Bold"/>
-                <a:cs typeface="Ubuntu Bold"/>
-                <a:sym typeface="Ubuntu Bold"/>
-              </a:rPr>
-              <a:t>NUTRITION CHANGING</a:t>
-            </a:r>
-          </a:p>
-        </p:txBody>
-      </p:sp>
-      <p:grpSp>
-        <p:nvGrpSpPr>
-          <p:cNvPr name="Group 3" id="3"/>
-          <p:cNvGrpSpPr/>
-          <p:nvPr/>
-        </p:nvGrpSpPr>
-        <p:grpSpPr>
-          <a:xfrm rot="0">
-            <a:off x="2764867" y="-699889"/>
-            <a:ext cx="16931738" cy="1533898"/>
-            <a:chOff x="0" y="0"/>
-            <a:chExt cx="4459388" cy="403990"/>
-          </a:xfrm>
-        </p:grpSpPr>
-        <p:sp>
-          <p:nvSpPr>
-            <p:cNvPr name="Freeform 4" id="4"/>
-            <p:cNvSpPr/>
-            <p:nvPr/>
-          </p:nvSpPr>
-          <p:spPr>
-            <a:xfrm flipH="false" flipV="false" rot="0">
-              <a:off x="0" y="0"/>
-              <a:ext cx="4459388" cy="403990"/>
-            </a:xfrm>
-            <a:custGeom>
-              <a:avLst/>
-              <a:gdLst/>
-              <a:ahLst/>
-              <a:cxnLst/>
-              <a:rect r="r" b="b" t="t" l="l"/>
-              <a:pathLst>
-                <a:path h="403990" w="4459388">
-                  <a:moveTo>
-                    <a:pt x="0" y="0"/>
-                  </a:moveTo>
-                  <a:lnTo>
-                    <a:pt x="4459388" y="0"/>
-                  </a:lnTo>
-                  <a:lnTo>
-                    <a:pt x="4459388" y="403990"/>
-                  </a:lnTo>
-                  <a:lnTo>
-                    <a:pt x="0" y="403990"/>
-                  </a:lnTo>
-                  <a:close/>
-                </a:path>
-              </a:pathLst>
-            </a:custGeom>
-            <a:solidFill>
-              <a:srgbClr val="034383"/>
-            </a:solidFill>
-          </p:spPr>
-        </p:sp>
-        <p:sp>
-          <p:nvSpPr>
-            <p:cNvPr name="TextBox 5" id="5"/>
-            <p:cNvSpPr txBox="true"/>
-            <p:nvPr/>
-          </p:nvSpPr>
-          <p:spPr>
-            <a:xfrm>
-              <a:off x="0" y="-38100"/>
-              <a:ext cx="4459388" cy="442090"/>
-            </a:xfrm>
-            <a:prstGeom prst="rect">
-              <a:avLst/>
-            </a:prstGeom>
-          </p:spPr>
-          <p:txBody>
-            <a:bodyPr anchor="ctr" rtlCol="false" tIns="50800" lIns="50800" bIns="50800" rIns="50800"/>
-            <a:lstStyle/>
-            <a:p>
-              <a:pPr algn="ctr">
-                <a:lnSpc>
-                  <a:spcPts val="3295"/>
-                </a:lnSpc>
-              </a:pPr>
-            </a:p>
-          </p:txBody>
-        </p:sp>
-      </p:grpSp>
-      <p:grpSp>
-        <p:nvGrpSpPr>
-          <p:cNvPr name="Group 6" id="6"/>
-          <p:cNvGrpSpPr/>
-          <p:nvPr/>
-        </p:nvGrpSpPr>
-        <p:grpSpPr>
-          <a:xfrm rot="-5400000">
-            <a:off x="-5015057" y="4582096"/>
-            <a:ext cx="10698089" cy="1533898"/>
-            <a:chOff x="0" y="0"/>
-            <a:chExt cx="2817604" cy="403990"/>
-          </a:xfrm>
-        </p:grpSpPr>
-        <p:sp>
-          <p:nvSpPr>
-            <p:cNvPr name="Freeform 7" id="7"/>
-            <p:cNvSpPr/>
-            <p:nvPr/>
-          </p:nvSpPr>
-          <p:spPr>
-            <a:xfrm flipH="false" flipV="false" rot="0">
-              <a:off x="0" y="0"/>
-              <a:ext cx="2817604" cy="403990"/>
-            </a:xfrm>
-            <a:custGeom>
-              <a:avLst/>
-              <a:gdLst/>
-              <a:ahLst/>
-              <a:cxnLst/>
-              <a:rect r="r" b="b" t="t" l="l"/>
-              <a:pathLst>
-                <a:path h="403990" w="2817604">
-                  <a:moveTo>
-                    <a:pt x="0" y="0"/>
-                  </a:moveTo>
-                  <a:lnTo>
-                    <a:pt x="2817604" y="0"/>
-                  </a:lnTo>
-                  <a:lnTo>
-                    <a:pt x="2817604" y="403990"/>
-                  </a:lnTo>
-                  <a:lnTo>
-                    <a:pt x="0" y="403990"/>
-                  </a:lnTo>
-                  <a:close/>
-                </a:path>
-              </a:pathLst>
-            </a:custGeom>
-            <a:solidFill>
-              <a:srgbClr val="034383"/>
-            </a:solidFill>
-          </p:spPr>
-        </p:sp>
-        <p:sp>
-          <p:nvSpPr>
-            <p:cNvPr name="TextBox 8" id="8"/>
-            <p:cNvSpPr txBox="true"/>
-            <p:nvPr/>
-          </p:nvSpPr>
-          <p:spPr>
-            <a:xfrm>
-              <a:off x="0" y="-38100"/>
-              <a:ext cx="2817604" cy="442090"/>
-            </a:xfrm>
-            <a:prstGeom prst="rect">
-              <a:avLst/>
-            </a:prstGeom>
-          </p:spPr>
-          <p:txBody>
-            <a:bodyPr anchor="ctr" rtlCol="false" tIns="50800" lIns="50800" bIns="50800" rIns="50800"/>
-            <a:lstStyle/>
-            <a:p>
-              <a:pPr algn="ctr">
-                <a:lnSpc>
-                  <a:spcPts val="3295"/>
-                </a:lnSpc>
-              </a:pPr>
-            </a:p>
-          </p:txBody>
-        </p:sp>
-      </p:grpSp>
-      <p:sp>
-        <p:nvSpPr>
-          <p:cNvPr name="Freeform 9" id="9"/>
-          <p:cNvSpPr/>
-          <p:nvPr/>
-        </p:nvSpPr>
-        <p:spPr>
-          <a:xfrm flipH="false" flipV="false" rot="0">
-            <a:off x="-47625" y="-163489"/>
-            <a:ext cx="4114800" cy="4114800"/>
-          </a:xfrm>
-          <a:custGeom>
-            <a:avLst/>
-            <a:gdLst/>
-            <a:ahLst/>
-            <a:cxnLst/>
-            <a:rect r="r" b="b" t="t" l="l"/>
-            <a:pathLst>
-              <a:path h="4114800" w="4114800">
-                <a:moveTo>
-                  <a:pt x="0" y="0"/>
-                </a:moveTo>
-                <a:lnTo>
-                  <a:pt x="4114800" y="0"/>
-                </a:lnTo>
-                <a:lnTo>
-                  <a:pt x="4114800" y="4114800"/>
-                </a:lnTo>
-                <a:lnTo>
-                  <a:pt x="0" y="4114800"/>
-                </a:lnTo>
-                <a:lnTo>
-                  <a:pt x="0" y="0"/>
-                </a:lnTo>
-                <a:close/>
-              </a:path>
-            </a:pathLst>
-          </a:custGeom>
-          <a:blipFill>
-            <a:blip r:embed="rId2">
-              <a:extLst>
-                <a:ext uri="{96DAC541-7B7A-43D3-8B79-37D633B846F1}">
-                  <asvg:svgBlip xmlns:asvg="http://schemas.microsoft.com/office/drawing/2016/SVG/main" r:embed="rId3"/>
-                </a:ext>
-              </a:extLst>
-            </a:blip>
-            <a:stretch>
-              <a:fillRect l="0" t="0" r="0" b="0"/>
-            </a:stretch>
-          </a:blipFill>
-          <a:ln cap="sq">
-            <a:noFill/>
-            <a:prstDash val="solid"/>
-            <a:miter/>
-          </a:ln>
-        </p:spPr>
-      </p:sp>
-      <p:grpSp>
-        <p:nvGrpSpPr>
-          <p:cNvPr name="Group 10" id="10"/>
-          <p:cNvGrpSpPr/>
-          <p:nvPr/>
-        </p:nvGrpSpPr>
-        <p:grpSpPr>
-          <a:xfrm rot="0">
-            <a:off x="17096423" y="4991100"/>
-            <a:ext cx="111442" cy="108585"/>
-            <a:chOff x="0" y="0"/>
-            <a:chExt cx="148590" cy="144780"/>
-          </a:xfrm>
-        </p:grpSpPr>
-        <p:sp>
-          <p:nvSpPr>
-            <p:cNvPr name="Freeform 11" id="11"/>
-            <p:cNvSpPr/>
-            <p:nvPr/>
-          </p:nvSpPr>
-          <p:spPr>
-            <a:xfrm flipH="false" flipV="false" rot="0">
-              <a:off x="46990" y="45720"/>
-              <a:ext cx="49530" cy="52070"/>
-            </a:xfrm>
-            <a:custGeom>
-              <a:avLst/>
-              <a:gdLst/>
-              <a:ahLst/>
-              <a:cxnLst/>
-              <a:rect r="r" b="b" t="t" l="l"/>
-              <a:pathLst>
-                <a:path h="52070" w="49530">
-                  <a:moveTo>
-                    <a:pt x="49530" y="17780"/>
-                  </a:moveTo>
-                  <a:cubicBezTo>
-                    <a:pt x="27940" y="52070"/>
-                    <a:pt x="7620" y="45720"/>
-                    <a:pt x="3810" y="38100"/>
-                  </a:cubicBezTo>
-                  <a:cubicBezTo>
-                    <a:pt x="0" y="31750"/>
-                    <a:pt x="3810" y="10160"/>
-                    <a:pt x="10160" y="5080"/>
-                  </a:cubicBezTo>
-                  <a:cubicBezTo>
-                    <a:pt x="16510" y="0"/>
-                    <a:pt x="43180" y="7620"/>
-                    <a:pt x="43180" y="7620"/>
-                  </a:cubicBezTo>
-                </a:path>
-              </a:pathLst>
-            </a:custGeom>
-            <a:solidFill>
-              <a:srgbClr val="99B9BE"/>
-            </a:solidFill>
-            <a:ln cap="sq">
-              <a:noFill/>
-              <a:prstDash val="solid"/>
-              <a:miter/>
-            </a:ln>
-          </p:spPr>
-        </p:sp>
-      </p:grpSp>
-      <p:sp>
-        <p:nvSpPr>
-          <p:cNvPr name="Freeform 12" id="12"/>
-          <p:cNvSpPr/>
-          <p:nvPr/>
-        </p:nvSpPr>
-        <p:spPr>
-          <a:xfrm flipH="false" flipV="false" rot="0">
-            <a:off x="8703346" y="1973950"/>
-            <a:ext cx="9286228" cy="8313050"/>
-          </a:xfrm>
-          <a:custGeom>
-            <a:avLst/>
-            <a:gdLst/>
-            <a:ahLst/>
-            <a:cxnLst/>
-            <a:rect r="r" b="b" t="t" l="l"/>
-            <a:pathLst>
-              <a:path h="8313050" w="9286228">
-                <a:moveTo>
-                  <a:pt x="0" y="0"/>
-                </a:moveTo>
-                <a:lnTo>
-                  <a:pt x="9286228" y="0"/>
-                </a:lnTo>
-                <a:lnTo>
-                  <a:pt x="9286228" y="8313050"/>
-                </a:lnTo>
-                <a:lnTo>
-                  <a:pt x="0" y="8313050"/>
-                </a:lnTo>
-                <a:lnTo>
-                  <a:pt x="0" y="0"/>
-                </a:lnTo>
-                <a:close/>
-              </a:path>
-            </a:pathLst>
-          </a:custGeom>
-          <a:blipFill>
-            <a:blip r:embed="rId4"/>
-            <a:stretch>
-              <a:fillRect l="0" t="0" r="0" b="0"/>
-            </a:stretch>
-          </a:blipFill>
-        </p:spPr>
-      </p:sp>
-      <p:sp>
-        <p:nvSpPr>
-          <p:cNvPr name="TextBox 13" id="13"/>
-          <p:cNvSpPr txBox="true"/>
-          <p:nvPr/>
-        </p:nvSpPr>
-        <p:spPr>
-          <a:xfrm rot="0">
-            <a:off x="1682146" y="2985400"/>
-            <a:ext cx="6992625" cy="1153795"/>
-          </a:xfrm>
-          <a:prstGeom prst="rect">
-            <a:avLst/>
-          </a:prstGeom>
-        </p:spPr>
-        <p:txBody>
-          <a:bodyPr anchor="t" rtlCol="false" tIns="0" lIns="0" bIns="0" rIns="0">
-            <a:spAutoFit/>
-          </a:bodyPr>
-          <a:lstStyle/>
-          <a:p>
-            <a:pPr algn="just">
-              <a:lnSpc>
-                <a:spcPts val="3079"/>
-              </a:lnSpc>
-            </a:pPr>
-            <a:r>
-              <a:rPr lang="en-US" sz="2199">
-                <a:solidFill>
-                  <a:srgbClr val="034383"/>
-                </a:solidFill>
-                <a:latin typeface="Open Sans 1"/>
-                <a:ea typeface="Open Sans 1"/>
-                <a:cs typeface="Open Sans 1"/>
-                <a:sym typeface="Open Sans 1"/>
-              </a:rPr>
-              <a:t>Purpose</a:t>
-            </a:r>
-          </a:p>
-          <a:p>
-            <a:pPr algn="just" marL="474979" indent="-237490" lvl="1">
-              <a:lnSpc>
-                <a:spcPts val="3079"/>
-              </a:lnSpc>
-              <a:buFont typeface="Arial"/>
-              <a:buChar char="•"/>
-            </a:pPr>
-            <a:r>
-              <a:rPr lang="en-US" sz="2199">
-                <a:solidFill>
-                  <a:srgbClr val="0D1D29"/>
-                </a:solidFill>
-                <a:latin typeface="Open Sans 1"/>
-                <a:ea typeface="Open Sans 1"/>
-                <a:cs typeface="Open Sans 1"/>
-                <a:sym typeface="Open Sans 1"/>
-              </a:rPr>
-              <a:t>Tailors dietary recommendations based on the child's profile (gender, age, weight).</a:t>
-            </a:r>
-          </a:p>
-        </p:txBody>
-      </p:sp>
-      <p:sp>
-        <p:nvSpPr>
-          <p:cNvPr name="TextBox 14" id="14"/>
-          <p:cNvSpPr txBox="true"/>
-          <p:nvPr/>
-        </p:nvSpPr>
-        <p:spPr>
-          <a:xfrm rot="0">
-            <a:off x="1682146" y="8133980"/>
-            <a:ext cx="6992625" cy="1544320"/>
-          </a:xfrm>
-          <a:prstGeom prst="rect">
-            <a:avLst/>
-          </a:prstGeom>
-        </p:spPr>
-        <p:txBody>
-          <a:bodyPr anchor="t" rtlCol="false" tIns="0" lIns="0" bIns="0" rIns="0">
-            <a:spAutoFit/>
-          </a:bodyPr>
-          <a:lstStyle/>
-          <a:p>
-            <a:pPr algn="just">
-              <a:lnSpc>
-                <a:spcPts val="3079"/>
-              </a:lnSpc>
-            </a:pPr>
-            <a:r>
-              <a:rPr lang="en-US" sz="2199">
-                <a:solidFill>
-                  <a:srgbClr val="034383"/>
-                </a:solidFill>
-                <a:latin typeface="Open Sans 1"/>
-                <a:ea typeface="Open Sans 1"/>
-                <a:cs typeface="Open Sans 1"/>
-                <a:sym typeface="Open Sans 1"/>
-              </a:rPr>
-              <a:t>Outcome</a:t>
-            </a:r>
-          </a:p>
-          <a:p>
-            <a:pPr algn="just" marL="474979" indent="-237490" lvl="1">
-              <a:lnSpc>
-                <a:spcPts val="3079"/>
-              </a:lnSpc>
-              <a:buFont typeface="Arial"/>
-              <a:buChar char="•"/>
-            </a:pPr>
-            <a:r>
-              <a:rPr lang="en-US" sz="2199">
-                <a:solidFill>
-                  <a:srgbClr val="0D1D29"/>
-                </a:solidFill>
-                <a:latin typeface="Open Sans 1"/>
-                <a:ea typeface="Open Sans 1"/>
-                <a:cs typeface="Open Sans 1"/>
-                <a:sym typeface="Open Sans 1"/>
-              </a:rPr>
-              <a:t>Integrates all calculations into a personalized treatment protocol for optimized growth and nutrition.</a:t>
-            </a:r>
-          </a:p>
-        </p:txBody>
-      </p:sp>
-      <p:sp>
-        <p:nvSpPr>
-          <p:cNvPr name="TextBox 15" id="15"/>
-          <p:cNvSpPr txBox="true"/>
-          <p:nvPr/>
-        </p:nvSpPr>
-        <p:spPr>
-          <a:xfrm rot="0">
-            <a:off x="1570165" y="4351285"/>
-            <a:ext cx="7104606" cy="3887470"/>
-          </a:xfrm>
-          <a:prstGeom prst="rect">
-            <a:avLst/>
-          </a:prstGeom>
-        </p:spPr>
-        <p:txBody>
-          <a:bodyPr anchor="t" rtlCol="false" tIns="0" lIns="0" bIns="0" rIns="0">
-            <a:spAutoFit/>
-          </a:bodyPr>
-          <a:lstStyle/>
-          <a:p>
-            <a:pPr algn="just" marL="0" indent="0" lvl="0">
-              <a:lnSpc>
-                <a:spcPts val="3079"/>
+                <a:spcPts val="6160"/>
               </a:lnSpc>
               <a:spcBef>
                 <a:spcPct val="0"/>
               </a:spcBef>
             </a:pPr>
             <a:r>
-              <a:rPr lang="en-US" sz="2199">
+              <a:rPr lang="en-US" sz="4400">
                 <a:solidFill>
-                  <a:srgbClr val="034383"/>
+                  <a:srgbClr val="000000"/>
                 </a:solidFill>
-                <a:latin typeface="Open Sans 1"/>
-                <a:ea typeface="Open Sans 1"/>
-                <a:cs typeface="Open Sans 1"/>
-                <a:sym typeface="Open Sans 1"/>
+                <a:latin typeface="Suez One"/>
+                <a:ea typeface="Suez One"/>
+                <a:cs typeface="Suez One"/>
+                <a:sym typeface="Suez One"/>
               </a:rPr>
-              <a:t>K</a:t>
-            </a:r>
-            <a:r>
-              <a:rPr lang="en-US" sz="2199" strike="noStrike" u="none">
-                <a:solidFill>
-                  <a:srgbClr val="034383"/>
-                </a:solidFill>
-                <a:latin typeface="Open Sans 1"/>
-                <a:ea typeface="Open Sans 1"/>
-                <a:cs typeface="Open Sans 1"/>
-                <a:sym typeface="Open Sans 1"/>
-              </a:rPr>
-              <a:t>ey Steps</a:t>
-            </a:r>
-          </a:p>
-          <a:p>
-            <a:pPr algn="just" marL="474979" indent="-237490" lvl="1">
-              <a:lnSpc>
-                <a:spcPts val="3079"/>
-              </a:lnSpc>
-              <a:spcBef>
-                <a:spcPct val="0"/>
-              </a:spcBef>
-              <a:buFont typeface="Arial"/>
-              <a:buChar char="•"/>
-            </a:pPr>
-            <a:r>
-              <a:rPr lang="en-US" sz="2199" strike="noStrike" u="none">
-                <a:solidFill>
-                  <a:srgbClr val="0D1D29"/>
-                </a:solidFill>
-                <a:latin typeface="Open Sans 1"/>
-                <a:ea typeface="Open Sans 1"/>
-                <a:cs typeface="Open Sans 1"/>
-                <a:sym typeface="Open Sans 1"/>
-              </a:rPr>
-              <a:t>Median Weight Defining: Determines target weight for healthy growth.</a:t>
-            </a:r>
-          </a:p>
-          <a:p>
-            <a:pPr algn="just" marL="474979" indent="-237490" lvl="1">
-              <a:lnSpc>
-                <a:spcPts val="3079"/>
-              </a:lnSpc>
-              <a:spcBef>
-                <a:spcPct val="0"/>
-              </a:spcBef>
-              <a:buFont typeface="Arial"/>
-              <a:buChar char="•"/>
-            </a:pPr>
-            <a:r>
-              <a:rPr lang="en-US" sz="2199" strike="noStrike" u="none">
-                <a:solidFill>
-                  <a:srgbClr val="0D1D29"/>
-                </a:solidFill>
-                <a:latin typeface="Open Sans 1"/>
-                <a:ea typeface="Open Sans 1"/>
-                <a:cs typeface="Open Sans 1"/>
-                <a:sym typeface="Open Sans 1"/>
-              </a:rPr>
-              <a:t>Caloric Value Calculation: Calculates daily caloric needs.</a:t>
-            </a:r>
-          </a:p>
-          <a:p>
-            <a:pPr algn="just" marL="474979" indent="-237490" lvl="1">
-              <a:lnSpc>
-                <a:spcPts val="3079"/>
-              </a:lnSpc>
-              <a:spcBef>
-                <a:spcPct val="0"/>
-              </a:spcBef>
-              <a:buFont typeface="Arial"/>
-              <a:buChar char="•"/>
-            </a:pPr>
-            <a:r>
-              <a:rPr lang="en-US" sz="2199" strike="noStrike" u="none">
-                <a:solidFill>
-                  <a:srgbClr val="0D1D29"/>
-                </a:solidFill>
-                <a:latin typeface="Open Sans 1"/>
-                <a:ea typeface="Open Sans 1"/>
-                <a:cs typeface="Open Sans 1"/>
-                <a:sym typeface="Open Sans 1"/>
-              </a:rPr>
-              <a:t>Calorie Distribution: Balances macronutrients (protein, carbohydrates, fats).</a:t>
-            </a:r>
-          </a:p>
-          <a:p>
-            <a:pPr algn="just" marL="474979" indent="-237490" lvl="1">
-              <a:lnSpc>
-                <a:spcPts val="3079"/>
-              </a:lnSpc>
-              <a:spcBef>
-                <a:spcPct val="0"/>
-              </a:spcBef>
-              <a:buFont typeface="Arial"/>
-              <a:buChar char="•"/>
-            </a:pPr>
-            <a:r>
-              <a:rPr lang="en-US" sz="2199" strike="noStrike" u="none">
-                <a:solidFill>
-                  <a:srgbClr val="0D1D29"/>
-                </a:solidFill>
-                <a:latin typeface="Open Sans 1"/>
-                <a:ea typeface="Open Sans 1"/>
-                <a:cs typeface="Open Sans 1"/>
-                <a:sym typeface="Open Sans 1"/>
-              </a:rPr>
-              <a:t>Supplement Supplying: Determines required vitamins and minerals.</a:t>
-            </a:r>
-          </a:p>
-          <a:p>
-            <a:pPr algn="just" marL="0" indent="0" lvl="0">
-              <a:lnSpc>
-                <a:spcPts val="3079"/>
-              </a:lnSpc>
-              <a:spcBef>
-                <a:spcPct val="0"/>
-              </a:spcBef>
-            </a:pPr>
+              <a:t>9</a:t>
+            </a:r>
           </a:p>
         </p:txBody>
-      </p:sp>
-      <p:sp>
-        <p:nvSpPr>
-          <p:cNvPr name="AutoShape 16" id="16"/>
-          <p:cNvSpPr/>
-          <p:nvPr/>
-        </p:nvSpPr>
-        <p:spPr>
-          <a:xfrm flipV="true">
-            <a:off x="14159408" y="9351248"/>
-            <a:ext cx="2802942" cy="0"/>
-          </a:xfrm>
-          <a:prstGeom prst="line">
-            <a:avLst/>
-          </a:prstGeom>
-          <a:ln cap="rnd" w="19050">
-            <a:solidFill>
-              <a:srgbClr val="000000">
-                <a:alpha val="20784"/>
-              </a:srgbClr>
-            </a:solidFill>
-            <a:prstDash val="solid"/>
-            <a:headEnd type="none" len="sm" w="sm"/>
-            <a:tailEnd type="none" len="sm" w="sm"/>
-          </a:ln>
-        </p:spPr>
       </p:sp>
     </p:spTree>
   </p:cSld>
